--- a/RL-CG-MOACO.pptx
+++ b/RL-CG-MOACO.pptx
@@ -14,13 +14,13 @@
     <p:sldId id="353" r:id="rId7"/>
     <p:sldId id="351" r:id="rId8"/>
     <p:sldId id="352" r:id="rId9"/>
-    <p:sldId id="361" r:id="rId15"/>
-    <p:sldId id="354" r:id="rId10"/>
+    <p:sldId id="361" r:id="rId10"/>
+    <p:sldId id="354" r:id="rId11"/>
   </p:sldIdLst>
   <p:sldSz cx="12192000" cy="6858000"/>
   <p:notesSz cx="6858000" cy="9144000"/>
   <p:custDataLst>
-    <p:tags r:id="rId14"/>
+    <p:tags r:id="rId15"/>
   </p:custDataLst>
   <p:defaultTextStyle>
     <a:defPPr>
@@ -3749,10 +3749,16 @@
                 <a:solidFill>
                   <a:srgbClr val="2F5597"/>
                 </a:solidFill>
-                <a:latin typeface="微软雅黑"/>
+                <a:latin typeface="微软雅黑" panose="020B0503020204020204" charset="-122"/>
               </a:rPr>
               <a:t>创新点1：任务–卫星–窗口三元冲突图建模</a:t>
             </a:r>
+            <a:endParaRPr sz="2400" b="1">
+              <a:solidFill>
+                <a:srgbClr val="2F5597"/>
+              </a:solidFill>
+              <a:latin typeface="微软雅黑" panose="020B0503020204020204" charset="-122"/>
+            </a:endParaRPr>
           </a:p>
         </p:txBody>
       </p:sp>
@@ -3773,7 +3779,7 @@
           <a:noFill/>
         </p:spPr>
         <p:txBody>
-          <a:bodyPr wrap="square" lIns="50800" rIns="50800" tIns="38100" bIns="38100">
+          <a:bodyPr wrap="square" lIns="50800" tIns="38100" rIns="50800" bIns="38100">
             <a:spAutoFit/>
           </a:bodyPr>
           <a:lstStyle/>
@@ -3783,10 +3789,16 @@
                 <a:solidFill>
                   <a:srgbClr val="282828"/>
                 </a:solidFill>
-                <a:latin typeface="微软雅黑"/>
+                <a:latin typeface="微软雅黑" panose="020B0503020204020204" charset="-122"/>
               </a:rPr>
               <a:t>首先，将每一个候选观测方案表示为三元节点：vⱼᵢₖ = (taskⱼ, satᵢ, windowₖ)。</a:t>
             </a:r>
+            <a:endParaRPr sz="1800" b="0">
+              <a:solidFill>
+                <a:srgbClr val="282828"/>
+              </a:solidFill>
+              <a:latin typeface="微软雅黑" panose="020B0503020204020204" charset="-122"/>
+            </a:endParaRPr>
           </a:p>
           <a:p>
             <a:r>
@@ -3794,10 +3806,16 @@
                 <a:solidFill>
                   <a:srgbClr val="282828"/>
                 </a:solidFill>
-                <a:latin typeface="微软雅黑"/>
+                <a:latin typeface="微软雅黑" panose="020B0503020204020204" charset="-122"/>
               </a:rPr>
               <a:t>它表示任务 j 由卫星 i 在第 k 个可见时间窗口内执行。算法搜索的基本单元不是“任务”，而是“任务–卫星–窗口候选节点”。</a:t>
             </a:r>
+            <a:endParaRPr sz="1800" b="0">
+              <a:solidFill>
+                <a:srgbClr val="282828"/>
+              </a:solidFill>
+              <a:latin typeface="微软雅黑" panose="020B0503020204020204" charset="-122"/>
+            </a:endParaRPr>
           </a:p>
         </p:txBody>
       </p:sp>
@@ -3839,7 +3857,7 @@
           </a:fontRef>
         </p:style>
         <p:txBody>
-          <a:bodyPr rtlCol="0" anchor="ctr" wrap="square" lIns="63500" rIns="63500" tIns="38100" bIns="38100"/>
+          <a:bodyPr wrap="square" lIns="63500" tIns="38100" rIns="63500" bIns="38100" rtlCol="0" anchor="ctr"/>
           <a:lstStyle/>
           <a:p>
             <a:pPr algn="ctr"/>
@@ -3848,10 +3866,16 @@
                 <a:solidFill>
                   <a:srgbClr val="282828"/>
                 </a:solidFill>
-                <a:latin typeface="微软雅黑"/>
+                <a:latin typeface="微软雅黑" panose="020B0503020204020204" charset="-122"/>
               </a:rPr>
               <a:t>V = { v₁, v₂, …, v_N }，一个完整调度方案表示为 X ⊆ V</a:t>
             </a:r>
+            <a:endParaRPr sz="1900" b="0">
+              <a:solidFill>
+                <a:srgbClr val="282828"/>
+              </a:solidFill>
+              <a:latin typeface="微软雅黑" panose="020B0503020204020204" charset="-122"/>
+            </a:endParaRPr>
           </a:p>
         </p:txBody>
       </p:sp>
@@ -3872,7 +3896,7 @@
           <a:noFill/>
         </p:spPr>
         <p:txBody>
-          <a:bodyPr wrap="square" lIns="50800" rIns="50800" tIns="38100" bIns="38100">
+          <a:bodyPr wrap="square" lIns="50800" tIns="38100" rIns="50800" bIns="38100">
             <a:spAutoFit/>
           </a:bodyPr>
           <a:lstStyle/>
@@ -3882,10 +3906,16 @@
                 <a:solidFill>
                   <a:srgbClr val="282828"/>
                 </a:solidFill>
-                <a:latin typeface="微软雅黑"/>
+                <a:latin typeface="微软雅黑" panose="020B0503020204020204" charset="-122"/>
               </a:rPr>
               <a:t>其次，根据调度约束构建冲突图 G=(V,E)。V 表示所有候选节点集合，E 表示冲突边集合。</a:t>
             </a:r>
+            <a:endParaRPr sz="1700" b="0">
+              <a:solidFill>
+                <a:srgbClr val="282828"/>
+              </a:solidFill>
+              <a:latin typeface="微软雅黑" panose="020B0503020204020204" charset="-122"/>
+            </a:endParaRPr>
           </a:p>
           <a:p>
             <a:r>
@@ -3893,10 +3923,16 @@
                 <a:solidFill>
                   <a:srgbClr val="282828"/>
                 </a:solidFill>
-                <a:latin typeface="微软雅黑"/>
+                <a:latin typeface="微软雅黑" panose="020B0503020204020204" charset="-122"/>
               </a:rPr>
               <a:t>若 (u,v)∈E，则节点 u 和 v 不能同时被选择。冲突边主要来自三类约束：</a:t>
             </a:r>
+            <a:endParaRPr sz="1700" b="0">
+              <a:solidFill>
+                <a:srgbClr val="282828"/>
+              </a:solidFill>
+              <a:latin typeface="微软雅黑" panose="020B0503020204020204" charset="-122"/>
+            </a:endParaRPr>
           </a:p>
           <a:p>
             <a:r>
@@ -3904,10 +3940,16 @@
                 <a:solidFill>
                   <a:srgbClr val="282828"/>
                 </a:solidFill>
-                <a:latin typeface="微软雅黑"/>
+                <a:latin typeface="微软雅黑" panose="020B0503020204020204" charset="-122"/>
               </a:rPr>
               <a:t>1. 同一任务重复观测冲突：同一个任务最多执行一次。</a:t>
             </a:r>
+            <a:endParaRPr sz="1700" b="0">
+              <a:solidFill>
+                <a:srgbClr val="282828"/>
+              </a:solidFill>
+              <a:latin typeface="微软雅黑" panose="020B0503020204020204" charset="-122"/>
+            </a:endParaRPr>
           </a:p>
           <a:p>
             <a:r>
@@ -3915,10 +3957,16 @@
                 <a:solidFill>
                   <a:srgbClr val="282828"/>
                 </a:solidFill>
-                <a:latin typeface="微软雅黑"/>
+                <a:latin typeface="微软雅黑" panose="020B0503020204020204" charset="-122"/>
               </a:rPr>
               <a:t>2. 同一卫星时间窗口重叠冲突：同星观测窗口发生交叉。</a:t>
             </a:r>
+            <a:endParaRPr sz="1700" b="0">
+              <a:solidFill>
+                <a:srgbClr val="282828"/>
+              </a:solidFill>
+              <a:latin typeface="微软雅黑" panose="020B0503020204020204" charset="-122"/>
+            </a:endParaRPr>
           </a:p>
           <a:p>
             <a:r>
@@ -3926,10 +3974,16 @@
                 <a:solidFill>
                   <a:srgbClr val="282828"/>
                 </a:solidFill>
-                <a:latin typeface="微软雅黑"/>
+                <a:latin typeface="微软雅黑" panose="020B0503020204020204" charset="-122"/>
               </a:rPr>
               <a:t>3. 姿态转移时间不足冲突：连续观测之间无法完成姿态机动。</a:t>
             </a:r>
+            <a:endParaRPr sz="1700" b="0">
+              <a:solidFill>
+                <a:srgbClr val="282828"/>
+              </a:solidFill>
+              <a:latin typeface="微软雅黑" panose="020B0503020204020204" charset="-122"/>
+            </a:endParaRPr>
           </a:p>
         </p:txBody>
       </p:sp>
@@ -3971,7 +4025,7 @@
           </a:fontRef>
         </p:style>
         <p:txBody>
-          <a:bodyPr rtlCol="0" anchor="ctr" wrap="square" lIns="63500" rIns="63500" tIns="38100" bIns="38100"/>
+          <a:bodyPr wrap="square" lIns="63500" tIns="38100" rIns="63500" bIns="38100" rtlCol="0" anchor="ctr"/>
           <a:lstStyle/>
           <a:p>
             <a:pPr algn="ctr"/>
@@ -3980,10 +4034,16 @@
                 <a:solidFill>
                   <a:srgbClr val="282828"/>
                 </a:solidFill>
-                <a:latin typeface="微软雅黑"/>
+                <a:latin typeface="微软雅黑" panose="020B0503020204020204" charset="-122"/>
               </a:rPr>
               <a:t>可行调度方案 X ⇔ 冲突图中的独立集：∀u,v∈X，(u,v)∉E</a:t>
             </a:r>
+            <a:endParaRPr sz="1700" b="0">
+              <a:solidFill>
+                <a:srgbClr val="282828"/>
+              </a:solidFill>
+              <a:latin typeface="微软雅黑" panose="020B0503020204020204" charset="-122"/>
+            </a:endParaRPr>
           </a:p>
         </p:txBody>
       </p:sp>
@@ -4039,10 +4099,16 @@
                 <a:solidFill>
                   <a:srgbClr val="2F5597"/>
                 </a:solidFill>
-                <a:latin typeface="微软雅黑"/>
+                <a:latin typeface="微软雅黑" panose="020B0503020204020204" charset="-122"/>
               </a:rPr>
               <a:t>创新点1：从候选窗口到冲突图，再到可行调度解</a:t>
             </a:r>
+            <a:endParaRPr sz="2400" b="1">
+              <a:solidFill>
+                <a:srgbClr val="2F5597"/>
+              </a:solidFill>
+              <a:latin typeface="微软雅黑" panose="020B0503020204020204" charset="-122"/>
+            </a:endParaRPr>
           </a:p>
         </p:txBody>
       </p:sp>
@@ -4084,7 +4150,7 @@
           </a:fontRef>
         </p:style>
         <p:txBody>
-          <a:bodyPr rtlCol="0" anchor="ctr" wrap="square" lIns="63500" rIns="63500" tIns="38100" bIns="38100"/>
+          <a:bodyPr wrap="square" lIns="63500" tIns="38100" rIns="63500" bIns="38100" rtlCol="0" anchor="ctr"/>
           <a:lstStyle/>
           <a:p>
             <a:pPr algn="ctr"/>
@@ -4093,10 +4159,16 @@
                 <a:solidFill>
                   <a:srgbClr val="282828"/>
                 </a:solidFill>
-                <a:latin typeface="微软雅黑"/>
+                <a:latin typeface="微软雅黑" panose="020B0503020204020204" charset="-122"/>
               </a:rPr>
               <a:t>展开成节点</a:t>
             </a:r>
+            <a:endParaRPr sz="1400" b="1">
+              <a:solidFill>
+                <a:srgbClr val="282828"/>
+              </a:solidFill>
+              <a:latin typeface="微软雅黑" panose="020B0503020204020204" charset="-122"/>
+            </a:endParaRPr>
           </a:p>
         </p:txBody>
       </p:sp>
@@ -4117,7 +4189,7 @@
           <a:noFill/>
         </p:spPr>
         <p:txBody>
-          <a:bodyPr wrap="square" lIns="50800" rIns="50800" tIns="38100" bIns="38100">
+          <a:bodyPr wrap="square" lIns="50800" tIns="38100" rIns="50800" bIns="38100">
             <a:spAutoFit/>
           </a:bodyPr>
           <a:lstStyle/>
@@ -4127,10 +4199,16 @@
                 <a:solidFill>
                   <a:srgbClr val="696969"/>
                 </a:solidFill>
-                <a:latin typeface="微软雅黑"/>
+                <a:latin typeface="微软雅黑" panose="020B0503020204020204" charset="-122"/>
               </a:rPr>
               <a:t>一个窗口 = 一个候选节点</a:t>
             </a:r>
+            <a:endParaRPr sz="1200" b="0">
+              <a:solidFill>
+                <a:srgbClr val="696969"/>
+              </a:solidFill>
+              <a:latin typeface="微软雅黑" panose="020B0503020204020204" charset="-122"/>
+            </a:endParaRPr>
           </a:p>
         </p:txBody>
       </p:sp>
@@ -4172,7 +4250,7 @@
           </a:fontRef>
         </p:style>
         <p:txBody>
-          <a:bodyPr rtlCol="0" anchor="ctr" wrap="square" lIns="63500" rIns="63500" tIns="38100" bIns="38100"/>
+          <a:bodyPr wrap="square" lIns="63500" tIns="38100" rIns="63500" bIns="38100" rtlCol="0" anchor="ctr"/>
           <a:lstStyle/>
           <a:p>
             <a:pPr algn="ctr"/>
@@ -4181,10 +4259,16 @@
                 <a:solidFill>
                   <a:srgbClr val="282828"/>
                 </a:solidFill>
-                <a:latin typeface="微软雅黑"/>
+                <a:latin typeface="微软雅黑" panose="020B0503020204020204" charset="-122"/>
               </a:rPr>
               <a:t>v₇,₁,₁</a:t>
             </a:r>
+            <a:endParaRPr sz="1050" b="0">
+              <a:solidFill>
+                <a:srgbClr val="282828"/>
+              </a:solidFill>
+              <a:latin typeface="微软雅黑" panose="020B0503020204020204" charset="-122"/>
+            </a:endParaRPr>
           </a:p>
           <a:p>
             <a:pPr algn="ctr"/>
@@ -4193,10 +4277,16 @@
                 <a:solidFill>
                   <a:srgbClr val="282828"/>
                 </a:solidFill>
-                <a:latin typeface="微软雅黑"/>
+                <a:latin typeface="微软雅黑" panose="020B0503020204020204" charset="-122"/>
               </a:rPr>
               <a:t>t7 · s1</a:t>
             </a:r>
+            <a:endParaRPr sz="1050" b="0">
+              <a:solidFill>
+                <a:srgbClr val="282828"/>
+              </a:solidFill>
+              <a:latin typeface="微软雅黑" panose="020B0503020204020204" charset="-122"/>
+            </a:endParaRPr>
           </a:p>
           <a:p>
             <a:pPr algn="ctr"/>
@@ -4205,10 +4295,16 @@
                 <a:solidFill>
                   <a:srgbClr val="282828"/>
                 </a:solidFill>
-                <a:latin typeface="微软雅黑"/>
+                <a:latin typeface="微软雅黑" panose="020B0503020204020204" charset="-122"/>
               </a:rPr>
               <a:t>08:10–08:14</a:t>
             </a:r>
+            <a:endParaRPr sz="1050" b="0">
+              <a:solidFill>
+                <a:srgbClr val="282828"/>
+              </a:solidFill>
+              <a:latin typeface="微软雅黑" panose="020B0503020204020204" charset="-122"/>
+            </a:endParaRPr>
           </a:p>
         </p:txBody>
       </p:sp>
@@ -4250,7 +4346,7 @@
           </a:fontRef>
         </p:style>
         <p:txBody>
-          <a:bodyPr rtlCol="0" anchor="ctr" wrap="square" lIns="63500" rIns="63500" tIns="38100" bIns="38100"/>
+          <a:bodyPr wrap="square" lIns="63500" tIns="38100" rIns="63500" bIns="38100" rtlCol="0" anchor="ctr"/>
           <a:lstStyle/>
           <a:p>
             <a:pPr algn="ctr"/>
@@ -4259,10 +4355,16 @@
                 <a:solidFill>
                   <a:srgbClr val="282828"/>
                 </a:solidFill>
-                <a:latin typeface="微软雅黑"/>
+                <a:latin typeface="微软雅黑" panose="020B0503020204020204" charset="-122"/>
               </a:rPr>
               <a:t>v₁₂,₁,₁</a:t>
             </a:r>
+            <a:endParaRPr sz="1050" b="0">
+              <a:solidFill>
+                <a:srgbClr val="282828"/>
+              </a:solidFill>
+              <a:latin typeface="微软雅黑" panose="020B0503020204020204" charset="-122"/>
+            </a:endParaRPr>
           </a:p>
           <a:p>
             <a:pPr algn="ctr"/>
@@ -4271,10 +4373,16 @@
                 <a:solidFill>
                   <a:srgbClr val="282828"/>
                 </a:solidFill>
-                <a:latin typeface="微软雅黑"/>
+                <a:latin typeface="微软雅黑" panose="020B0503020204020204" charset="-122"/>
               </a:rPr>
               <a:t>t12 · s1</a:t>
             </a:r>
+            <a:endParaRPr sz="1050" b="0">
+              <a:solidFill>
+                <a:srgbClr val="282828"/>
+              </a:solidFill>
+              <a:latin typeface="微软雅黑" panose="020B0503020204020204" charset="-122"/>
+            </a:endParaRPr>
           </a:p>
           <a:p>
             <a:pPr algn="ctr"/>
@@ -4283,10 +4391,16 @@
                 <a:solidFill>
                   <a:srgbClr val="282828"/>
                 </a:solidFill>
-                <a:latin typeface="微软雅黑"/>
+                <a:latin typeface="微软雅黑" panose="020B0503020204020204" charset="-122"/>
               </a:rPr>
               <a:t>08:18–08:21</a:t>
             </a:r>
+            <a:endParaRPr sz="1050" b="0">
+              <a:solidFill>
+                <a:srgbClr val="282828"/>
+              </a:solidFill>
+              <a:latin typeface="微软雅黑" panose="020B0503020204020204" charset="-122"/>
+            </a:endParaRPr>
           </a:p>
         </p:txBody>
       </p:sp>
@@ -4328,7 +4442,7 @@
           </a:fontRef>
         </p:style>
         <p:txBody>
-          <a:bodyPr rtlCol="0" anchor="ctr" wrap="square" lIns="63500" rIns="63500" tIns="38100" bIns="38100"/>
+          <a:bodyPr wrap="square" lIns="63500" tIns="38100" rIns="63500" bIns="38100" rtlCol="0" anchor="ctr"/>
           <a:lstStyle/>
           <a:p>
             <a:pPr algn="ctr"/>
@@ -4337,10 +4451,16 @@
                 <a:solidFill>
                   <a:srgbClr val="282828"/>
                 </a:solidFill>
-                <a:latin typeface="微软雅黑"/>
+                <a:latin typeface="微软雅黑" panose="020B0503020204020204" charset="-122"/>
               </a:rPr>
               <a:t>v₇,₂,₁</a:t>
             </a:r>
+            <a:endParaRPr sz="1050" b="0">
+              <a:solidFill>
+                <a:srgbClr val="282828"/>
+              </a:solidFill>
+              <a:latin typeface="微软雅黑" panose="020B0503020204020204" charset="-122"/>
+            </a:endParaRPr>
           </a:p>
           <a:p>
             <a:pPr algn="ctr"/>
@@ -4349,10 +4469,16 @@
                 <a:solidFill>
                   <a:srgbClr val="282828"/>
                 </a:solidFill>
-                <a:latin typeface="微软雅黑"/>
+                <a:latin typeface="微软雅黑" panose="020B0503020204020204" charset="-122"/>
               </a:rPr>
               <a:t>t7 · s2</a:t>
             </a:r>
+            <a:endParaRPr sz="1050" b="0">
+              <a:solidFill>
+                <a:srgbClr val="282828"/>
+              </a:solidFill>
+              <a:latin typeface="微软雅黑" panose="020B0503020204020204" charset="-122"/>
+            </a:endParaRPr>
           </a:p>
           <a:p>
             <a:pPr algn="ctr"/>
@@ -4361,10 +4487,16 @@
                 <a:solidFill>
                   <a:srgbClr val="282828"/>
                 </a:solidFill>
-                <a:latin typeface="微软雅黑"/>
+                <a:latin typeface="微软雅黑" panose="020B0503020204020204" charset="-122"/>
               </a:rPr>
               <a:t>09:20–09:24</a:t>
             </a:r>
+            <a:endParaRPr sz="1050" b="0">
+              <a:solidFill>
+                <a:srgbClr val="282828"/>
+              </a:solidFill>
+              <a:latin typeface="微软雅黑" panose="020B0503020204020204" charset="-122"/>
+            </a:endParaRPr>
           </a:p>
         </p:txBody>
       </p:sp>
@@ -4406,7 +4538,7 @@
           </a:fontRef>
         </p:style>
         <p:txBody>
-          <a:bodyPr rtlCol="0" anchor="ctr" wrap="square" lIns="63500" rIns="63500" tIns="38100" bIns="38100"/>
+          <a:bodyPr wrap="square" lIns="63500" tIns="38100" rIns="63500" bIns="38100" rtlCol="0" anchor="ctr"/>
           <a:lstStyle/>
           <a:p>
             <a:pPr algn="ctr"/>
@@ -4415,10 +4547,16 @@
                 <a:solidFill>
                   <a:srgbClr val="282828"/>
                 </a:solidFill>
-                <a:latin typeface="微软雅黑"/>
+                <a:latin typeface="微软雅黑" panose="020B0503020204020204" charset="-122"/>
               </a:rPr>
               <a:t>v₃₁,₃,₁</a:t>
             </a:r>
+            <a:endParaRPr sz="1050" b="0">
+              <a:solidFill>
+                <a:srgbClr val="282828"/>
+              </a:solidFill>
+              <a:latin typeface="微软雅黑" panose="020B0503020204020204" charset="-122"/>
+            </a:endParaRPr>
           </a:p>
           <a:p>
             <a:pPr algn="ctr"/>
@@ -4427,10 +4565,16 @@
                 <a:solidFill>
                   <a:srgbClr val="282828"/>
                 </a:solidFill>
-                <a:latin typeface="微软雅黑"/>
+                <a:latin typeface="微软雅黑" panose="020B0503020204020204" charset="-122"/>
               </a:rPr>
               <a:t>t31 · s3</a:t>
             </a:r>
+            <a:endParaRPr sz="1050" b="0">
+              <a:solidFill>
+                <a:srgbClr val="282828"/>
+              </a:solidFill>
+              <a:latin typeface="微软雅黑" panose="020B0503020204020204" charset="-122"/>
+            </a:endParaRPr>
           </a:p>
           <a:p>
             <a:pPr algn="ctr"/>
@@ -4439,10 +4583,16 @@
                 <a:solidFill>
                   <a:srgbClr val="282828"/>
                 </a:solidFill>
-                <a:latin typeface="微软雅黑"/>
+                <a:latin typeface="微软雅黑" panose="020B0503020204020204" charset="-122"/>
               </a:rPr>
               <a:t>10:05–10:10</a:t>
             </a:r>
+            <a:endParaRPr sz="1050" b="0">
+              <a:solidFill>
+                <a:srgbClr val="282828"/>
+              </a:solidFill>
+              <a:latin typeface="微软雅黑" panose="020B0503020204020204" charset="-122"/>
+            </a:endParaRPr>
           </a:p>
         </p:txBody>
       </p:sp>
@@ -4484,7 +4634,7 @@
           </a:fontRef>
         </p:style>
         <p:txBody>
-          <a:bodyPr rtlCol="0" anchor="ctr" wrap="square" lIns="63500" rIns="63500" tIns="38100" bIns="38100"/>
+          <a:bodyPr wrap="square" lIns="63500" tIns="38100" rIns="63500" bIns="38100" rtlCol="0" anchor="ctr"/>
           <a:lstStyle/>
           <a:p>
             <a:pPr algn="ctr"/>
@@ -4493,10 +4643,16 @@
                 <a:solidFill>
                   <a:srgbClr val="282828"/>
                 </a:solidFill>
-                <a:latin typeface="微软雅黑"/>
+                <a:latin typeface="微软雅黑" panose="020B0503020204020204" charset="-122"/>
               </a:rPr>
               <a:t>节点字段</a:t>
             </a:r>
+            <a:endParaRPr sz="980" b="0">
+              <a:solidFill>
+                <a:srgbClr val="282828"/>
+              </a:solidFill>
+              <a:latin typeface="微软雅黑" panose="020B0503020204020204" charset="-122"/>
+            </a:endParaRPr>
           </a:p>
           <a:p>
             <a:pPr algn="ctr"/>
@@ -4505,10 +4661,16 @@
                 <a:solidFill>
                   <a:srgbClr val="282828"/>
                 </a:solidFill>
-                <a:latin typeface="微软雅黑"/>
+                <a:latin typeface="微软雅黑" panose="020B0503020204020204" charset="-122"/>
               </a:rPr>
               <a:t>node_id / task_id / sat_id / window_id / start / end / profit</a:t>
             </a:r>
+            <a:endParaRPr sz="980" b="0">
+              <a:solidFill>
+                <a:srgbClr val="282828"/>
+              </a:solidFill>
+              <a:latin typeface="微软雅黑" panose="020B0503020204020204" charset="-122"/>
+            </a:endParaRPr>
           </a:p>
         </p:txBody>
       </p:sp>
@@ -4550,7 +4712,7 @@
           </a:fontRef>
         </p:style>
         <p:txBody>
-          <a:bodyPr rtlCol="0" anchor="ctr" wrap="square" lIns="63500" rIns="63500" tIns="38100" bIns="38100"/>
+          <a:bodyPr wrap="square" lIns="63500" tIns="38100" rIns="63500" bIns="38100" rtlCol="0" anchor="ctr"/>
           <a:lstStyle/>
           <a:p>
             <a:pPr algn="ctr"/>
@@ -4559,10 +4721,16 @@
                 <a:solidFill>
                   <a:srgbClr val="282828"/>
                 </a:solidFill>
-                <a:latin typeface="微软雅黑"/>
+                <a:latin typeface="微软雅黑" panose="020B0503020204020204" charset="-122"/>
               </a:rPr>
               <a:t>编码成部分解</a:t>
             </a:r>
+            <a:endParaRPr sz="1400" b="1">
+              <a:solidFill>
+                <a:srgbClr val="282828"/>
+              </a:solidFill>
+              <a:latin typeface="微软雅黑" panose="020B0503020204020204" charset="-122"/>
+            </a:endParaRPr>
           </a:p>
         </p:txBody>
       </p:sp>
@@ -4604,7 +4772,7 @@
           </a:fontRef>
         </p:style>
         <p:txBody>
-          <a:bodyPr rtlCol="0" anchor="ctr" wrap="square" lIns="63500" rIns="63500" tIns="38100" bIns="38100"/>
+          <a:bodyPr wrap="square" lIns="63500" tIns="38100" rIns="63500" bIns="38100" rtlCol="0" anchor="ctr"/>
           <a:lstStyle/>
           <a:p>
             <a:pPr algn="ctr"/>
@@ -4613,10 +4781,16 @@
                 <a:solidFill>
                   <a:srgbClr val="282828"/>
                 </a:solidFill>
-                <a:latin typeface="微软雅黑"/>
+                <a:latin typeface="微软雅黑" panose="020B0503020204020204" charset="-122"/>
               </a:rPr>
               <a:t>Xₜ = { v₇,₁,₁, v₁₂,₁,₁ }</a:t>
             </a:r>
+            <a:endParaRPr sz="1200" b="0">
+              <a:solidFill>
+                <a:srgbClr val="282828"/>
+              </a:solidFill>
+              <a:latin typeface="微软雅黑" panose="020B0503020204020204" charset="-122"/>
+            </a:endParaRPr>
           </a:p>
         </p:txBody>
       </p:sp>
@@ -4658,7 +4832,7 @@
           </a:fontRef>
         </p:style>
         <p:txBody>
-          <a:bodyPr rtlCol="0" anchor="ctr" wrap="square" lIns="63500" rIns="63500" tIns="38100" bIns="38100"/>
+          <a:bodyPr wrap="square" lIns="63500" tIns="38100" rIns="63500" bIns="38100" rtlCol="0" anchor="ctr"/>
           <a:lstStyle/>
           <a:p>
             <a:pPr algn="ctr"/>
@@ -4667,10 +4841,16 @@
                 <a:solidFill>
                   <a:srgbClr val="282828"/>
                 </a:solidFill>
-                <a:latin typeface="微软雅黑"/>
+                <a:latin typeface="微软雅黑" panose="020B0503020204020204" charset="-122"/>
               </a:rPr>
               <a:t>v₇,₁,₁</a:t>
             </a:r>
+            <a:endParaRPr sz="980" b="0">
+              <a:solidFill>
+                <a:srgbClr val="282828"/>
+              </a:solidFill>
+              <a:latin typeface="微软雅黑" panose="020B0503020204020204" charset="-122"/>
+            </a:endParaRPr>
           </a:p>
           <a:p>
             <a:pPr algn="ctr"/>
@@ -4679,10 +4859,16 @@
                 <a:solidFill>
                   <a:srgbClr val="282828"/>
                 </a:solidFill>
-                <a:latin typeface="微软雅黑"/>
+                <a:latin typeface="微软雅黑" panose="020B0503020204020204" charset="-122"/>
               </a:rPr>
               <a:t>t7 · s1  08:10–08:14</a:t>
             </a:r>
+            <a:endParaRPr sz="980" b="0">
+              <a:solidFill>
+                <a:srgbClr val="282828"/>
+              </a:solidFill>
+              <a:latin typeface="微软雅黑" panose="020B0503020204020204" charset="-122"/>
+            </a:endParaRPr>
           </a:p>
         </p:txBody>
       </p:sp>
@@ -4724,7 +4910,7 @@
           </a:fontRef>
         </p:style>
         <p:txBody>
-          <a:bodyPr rtlCol="0" anchor="ctr" wrap="square" lIns="63500" rIns="63500" tIns="38100" bIns="38100"/>
+          <a:bodyPr wrap="square" lIns="63500" tIns="38100" rIns="63500" bIns="38100" rtlCol="0" anchor="ctr"/>
           <a:lstStyle/>
           <a:p>
             <a:pPr algn="ctr"/>
@@ -4733,10 +4919,16 @@
                 <a:solidFill>
                   <a:srgbClr val="282828"/>
                 </a:solidFill>
-                <a:latin typeface="微软雅黑"/>
+                <a:latin typeface="微软雅黑" panose="020B0503020204020204" charset="-122"/>
               </a:rPr>
               <a:t>v₁₂,₁,₁</a:t>
             </a:r>
+            <a:endParaRPr sz="980" b="0">
+              <a:solidFill>
+                <a:srgbClr val="282828"/>
+              </a:solidFill>
+              <a:latin typeface="微软雅黑" panose="020B0503020204020204" charset="-122"/>
+            </a:endParaRPr>
           </a:p>
           <a:p>
             <a:pPr algn="ctr"/>
@@ -4745,10 +4937,16 @@
                 <a:solidFill>
                   <a:srgbClr val="282828"/>
                 </a:solidFill>
-                <a:latin typeface="微软雅黑"/>
+                <a:latin typeface="微软雅黑" panose="020B0503020204020204" charset="-122"/>
               </a:rPr>
               <a:t>t12 · s1  08:18–08:21</a:t>
             </a:r>
+            <a:endParaRPr sz="980" b="0">
+              <a:solidFill>
+                <a:srgbClr val="282828"/>
+              </a:solidFill>
+              <a:latin typeface="微软雅黑" panose="020B0503020204020204" charset="-122"/>
+            </a:endParaRPr>
           </a:p>
         </p:txBody>
       </p:sp>
@@ -4790,7 +4988,7 @@
           </a:fontRef>
         </p:style>
         <p:txBody>
-          <a:bodyPr rtlCol="0" anchor="ctr" wrap="square" lIns="63500" rIns="63500" tIns="38100" bIns="38100"/>
+          <a:bodyPr wrap="square" lIns="63500" tIns="38100" rIns="63500" bIns="38100" rtlCol="0" anchor="ctr"/>
           <a:lstStyle/>
           <a:p>
             <a:pPr algn="ctr"/>
@@ -4799,10 +4997,16 @@
                 <a:solidFill>
                   <a:srgbClr val="282828"/>
                 </a:solidFill>
-                <a:latin typeface="微软雅黑"/>
+                <a:latin typeface="微软雅黑" panose="020B0503020204020204" charset="-122"/>
               </a:rPr>
               <a:t>v₃₁,₃,₁</a:t>
             </a:r>
+            <a:endParaRPr sz="980" b="0">
+              <a:solidFill>
+                <a:srgbClr val="282828"/>
+              </a:solidFill>
+              <a:latin typeface="微软雅黑" panose="020B0503020204020204" charset="-122"/>
+            </a:endParaRPr>
           </a:p>
           <a:p>
             <a:pPr algn="ctr"/>
@@ -4811,10 +5015,16 @@
                 <a:solidFill>
                   <a:srgbClr val="282828"/>
                 </a:solidFill>
-                <a:latin typeface="微软雅黑"/>
+                <a:latin typeface="微软雅黑" panose="020B0503020204020204" charset="-122"/>
               </a:rPr>
               <a:t>t31 · s3  10:05–10:10</a:t>
             </a:r>
+            <a:endParaRPr sz="980" b="0">
+              <a:solidFill>
+                <a:srgbClr val="282828"/>
+              </a:solidFill>
+              <a:latin typeface="微软雅黑" panose="020B0503020204020204" charset="-122"/>
+            </a:endParaRPr>
           </a:p>
         </p:txBody>
       </p:sp>
@@ -4835,7 +5045,7 @@
           <a:noFill/>
         </p:spPr>
         <p:txBody>
-          <a:bodyPr wrap="square" lIns="50800" rIns="50800" tIns="38100" bIns="38100">
+          <a:bodyPr wrap="square" lIns="50800" tIns="38100" rIns="50800" bIns="38100">
             <a:spAutoFit/>
           </a:bodyPr>
           <a:lstStyle/>
@@ -4845,10 +5055,16 @@
                 <a:solidFill>
                   <a:srgbClr val="282828"/>
                 </a:solidFill>
-                <a:latin typeface="微软雅黑"/>
+                <a:latin typeface="微软雅黑" panose="020B0503020204020204" charset="-122"/>
               </a:rPr>
               <a:t>如果某个新节点与 Xₜ 中任意节点有冲突边，则不能加入。</a:t>
             </a:r>
+            <a:endParaRPr sz="1200" b="0">
+              <a:solidFill>
+                <a:srgbClr val="282828"/>
+              </a:solidFill>
+              <a:latin typeface="微软雅黑" panose="020B0503020204020204" charset="-122"/>
+            </a:endParaRPr>
           </a:p>
         </p:txBody>
       </p:sp>
@@ -4869,7 +5085,7 @@
           <a:noFill/>
         </p:spPr>
         <p:txBody>
-          <a:bodyPr wrap="square" lIns="50800" rIns="50800" tIns="38100" bIns="38100">
+          <a:bodyPr wrap="square" lIns="50800" tIns="38100" rIns="50800" bIns="38100">
             <a:spAutoFit/>
           </a:bodyPr>
           <a:lstStyle/>
@@ -4879,10 +5095,16 @@
                 <a:solidFill>
                   <a:srgbClr val="282828"/>
                 </a:solidFill>
-                <a:latin typeface="微软雅黑"/>
+                <a:latin typeface="微软雅黑" panose="020B0503020204020204" charset="-122"/>
               </a:rPr>
               <a:t>候选节点池</a:t>
             </a:r>
+            <a:endParaRPr sz="1300" b="1">
+              <a:solidFill>
+                <a:srgbClr val="282828"/>
+              </a:solidFill>
+              <a:latin typeface="微软雅黑" panose="020B0503020204020204" charset="-122"/>
+            </a:endParaRPr>
           </a:p>
         </p:txBody>
       </p:sp>
@@ -4924,7 +5146,7 @@
           </a:fontRef>
         </p:style>
         <p:txBody>
-          <a:bodyPr rtlCol="0" anchor="ctr" wrap="square" lIns="63500" rIns="63500" tIns="38100" bIns="38100"/>
+          <a:bodyPr wrap="square" lIns="63500" tIns="38100" rIns="63500" bIns="38100" rtlCol="0" anchor="ctr"/>
           <a:lstStyle/>
           <a:p>
             <a:pPr algn="ctr"/>
@@ -4933,10 +5155,16 @@
                 <a:solidFill>
                   <a:srgbClr val="282828"/>
                 </a:solidFill>
-                <a:latin typeface="微软雅黑"/>
+                <a:latin typeface="微软雅黑" panose="020B0503020204020204" charset="-122"/>
               </a:rPr>
               <a:t>v₁</a:t>
             </a:r>
+            <a:endParaRPr sz="950" b="0">
+              <a:solidFill>
+                <a:srgbClr val="282828"/>
+              </a:solidFill>
+              <a:latin typeface="微软雅黑" panose="020B0503020204020204" charset="-122"/>
+            </a:endParaRPr>
           </a:p>
           <a:p>
             <a:pPr algn="ctr"/>
@@ -4945,10 +5173,16 @@
                 <a:solidFill>
                   <a:srgbClr val="282828"/>
                 </a:solidFill>
-                <a:latin typeface="微软雅黑"/>
+                <a:latin typeface="微软雅黑" panose="020B0503020204020204" charset="-122"/>
               </a:rPr>
               <a:t>t7 · s1</a:t>
             </a:r>
+            <a:endParaRPr sz="950" b="0">
+              <a:solidFill>
+                <a:srgbClr val="282828"/>
+              </a:solidFill>
+              <a:latin typeface="微软雅黑" panose="020B0503020204020204" charset="-122"/>
+            </a:endParaRPr>
           </a:p>
           <a:p>
             <a:pPr algn="ctr"/>
@@ -4957,10 +5191,16 @@
                 <a:solidFill>
                   <a:srgbClr val="282828"/>
                 </a:solidFill>
-                <a:latin typeface="微软雅黑"/>
+                <a:latin typeface="微软雅黑" panose="020B0503020204020204" charset="-122"/>
               </a:rPr>
               <a:t>08:10–08:14</a:t>
             </a:r>
+            <a:endParaRPr sz="950" b="0">
+              <a:solidFill>
+                <a:srgbClr val="282828"/>
+              </a:solidFill>
+              <a:latin typeface="微软雅黑" panose="020B0503020204020204" charset="-122"/>
+            </a:endParaRPr>
           </a:p>
         </p:txBody>
       </p:sp>
@@ -5002,7 +5242,7 @@
           </a:fontRef>
         </p:style>
         <p:txBody>
-          <a:bodyPr rtlCol="0" anchor="ctr" wrap="square" lIns="63500" rIns="63500" tIns="38100" bIns="38100"/>
+          <a:bodyPr wrap="square" lIns="63500" tIns="38100" rIns="63500" bIns="38100" rtlCol="0" anchor="ctr"/>
           <a:lstStyle/>
           <a:p>
             <a:pPr algn="ctr"/>
@@ -5011,10 +5251,16 @@
                 <a:solidFill>
                   <a:srgbClr val="282828"/>
                 </a:solidFill>
-                <a:latin typeface="微软雅黑"/>
+                <a:latin typeface="微软雅黑" panose="020B0503020204020204" charset="-122"/>
               </a:rPr>
               <a:t>v₂</a:t>
             </a:r>
+            <a:endParaRPr sz="950" b="0">
+              <a:solidFill>
+                <a:srgbClr val="282828"/>
+              </a:solidFill>
+              <a:latin typeface="微软雅黑" panose="020B0503020204020204" charset="-122"/>
+            </a:endParaRPr>
           </a:p>
           <a:p>
             <a:pPr algn="ctr"/>
@@ -5023,10 +5269,16 @@
                 <a:solidFill>
                   <a:srgbClr val="282828"/>
                 </a:solidFill>
-                <a:latin typeface="微软雅黑"/>
+                <a:latin typeface="微软雅黑" panose="020B0503020204020204" charset="-122"/>
               </a:rPr>
               <a:t>t7 · s2</a:t>
             </a:r>
+            <a:endParaRPr sz="950" b="0">
+              <a:solidFill>
+                <a:srgbClr val="282828"/>
+              </a:solidFill>
+              <a:latin typeface="微软雅黑" panose="020B0503020204020204" charset="-122"/>
+            </a:endParaRPr>
           </a:p>
           <a:p>
             <a:pPr algn="ctr"/>
@@ -5035,10 +5287,16 @@
                 <a:solidFill>
                   <a:srgbClr val="282828"/>
                 </a:solidFill>
-                <a:latin typeface="微软雅黑"/>
+                <a:latin typeface="微软雅黑" panose="020B0503020204020204" charset="-122"/>
               </a:rPr>
               <a:t>09:20–09:24</a:t>
             </a:r>
+            <a:endParaRPr sz="950" b="0">
+              <a:solidFill>
+                <a:srgbClr val="282828"/>
+              </a:solidFill>
+              <a:latin typeface="微软雅黑" panose="020B0503020204020204" charset="-122"/>
+            </a:endParaRPr>
           </a:p>
         </p:txBody>
       </p:sp>
@@ -5080,7 +5338,7 @@
           </a:fontRef>
         </p:style>
         <p:txBody>
-          <a:bodyPr rtlCol="0" anchor="ctr" wrap="square" lIns="63500" rIns="63500" tIns="38100" bIns="38100"/>
+          <a:bodyPr wrap="square" lIns="63500" tIns="38100" rIns="63500" bIns="38100" rtlCol="0" anchor="ctr"/>
           <a:lstStyle/>
           <a:p>
             <a:pPr algn="ctr"/>
@@ -5089,10 +5347,16 @@
                 <a:solidFill>
                   <a:srgbClr val="282828"/>
                 </a:solidFill>
-                <a:latin typeface="微软雅黑"/>
+                <a:latin typeface="微软雅黑" panose="020B0503020204020204" charset="-122"/>
               </a:rPr>
               <a:t>v₃</a:t>
             </a:r>
+            <a:endParaRPr sz="950" b="0">
+              <a:solidFill>
+                <a:srgbClr val="282828"/>
+              </a:solidFill>
+              <a:latin typeface="微软雅黑" panose="020B0503020204020204" charset="-122"/>
+            </a:endParaRPr>
           </a:p>
           <a:p>
             <a:pPr algn="ctr"/>
@@ -5101,10 +5365,16 @@
                 <a:solidFill>
                   <a:srgbClr val="282828"/>
                 </a:solidFill>
-                <a:latin typeface="微软雅黑"/>
+                <a:latin typeface="微软雅黑" panose="020B0503020204020204" charset="-122"/>
               </a:rPr>
               <a:t>t12 · s1</a:t>
             </a:r>
+            <a:endParaRPr sz="950" b="0">
+              <a:solidFill>
+                <a:srgbClr val="282828"/>
+              </a:solidFill>
+              <a:latin typeface="微软雅黑" panose="020B0503020204020204" charset="-122"/>
+            </a:endParaRPr>
           </a:p>
           <a:p>
             <a:pPr algn="ctr"/>
@@ -5113,10 +5383,16 @@
                 <a:solidFill>
                   <a:srgbClr val="282828"/>
                 </a:solidFill>
-                <a:latin typeface="微软雅黑"/>
+                <a:latin typeface="微软雅黑" panose="020B0503020204020204" charset="-122"/>
               </a:rPr>
               <a:t>08:12–08:16</a:t>
             </a:r>
+            <a:endParaRPr sz="950" b="0">
+              <a:solidFill>
+                <a:srgbClr val="282828"/>
+              </a:solidFill>
+              <a:latin typeface="微软雅黑" panose="020B0503020204020204" charset="-122"/>
+            </a:endParaRPr>
           </a:p>
         </p:txBody>
       </p:sp>
@@ -5158,7 +5434,7 @@
           </a:fontRef>
         </p:style>
         <p:txBody>
-          <a:bodyPr rtlCol="0" anchor="ctr" wrap="square" lIns="63500" rIns="63500" tIns="38100" bIns="38100"/>
+          <a:bodyPr wrap="square" lIns="63500" tIns="38100" rIns="63500" bIns="38100" rtlCol="0" anchor="ctr"/>
           <a:lstStyle/>
           <a:p>
             <a:pPr algn="ctr"/>
@@ -5167,10 +5443,16 @@
                 <a:solidFill>
                   <a:srgbClr val="282828"/>
                 </a:solidFill>
-                <a:latin typeface="微软雅黑"/>
+                <a:latin typeface="微软雅黑" panose="020B0503020204020204" charset="-122"/>
               </a:rPr>
               <a:t>v₄</a:t>
             </a:r>
+            <a:endParaRPr sz="950" b="0">
+              <a:solidFill>
+                <a:srgbClr val="282828"/>
+              </a:solidFill>
+              <a:latin typeface="微软雅黑" panose="020B0503020204020204" charset="-122"/>
+            </a:endParaRPr>
           </a:p>
           <a:p>
             <a:pPr algn="ctr"/>
@@ -5179,10 +5461,16 @@
                 <a:solidFill>
                   <a:srgbClr val="282828"/>
                 </a:solidFill>
-                <a:latin typeface="微软雅黑"/>
+                <a:latin typeface="微软雅黑" panose="020B0503020204020204" charset="-122"/>
               </a:rPr>
               <a:t>t31 · s1</a:t>
             </a:r>
+            <a:endParaRPr sz="950" b="0">
+              <a:solidFill>
+                <a:srgbClr val="282828"/>
+              </a:solidFill>
+              <a:latin typeface="微软雅黑" panose="020B0503020204020204" charset="-122"/>
+            </a:endParaRPr>
           </a:p>
           <a:p>
             <a:pPr algn="ctr"/>
@@ -5191,10 +5479,16 @@
                 <a:solidFill>
                   <a:srgbClr val="282828"/>
                 </a:solidFill>
-                <a:latin typeface="微软雅黑"/>
+                <a:latin typeface="微软雅黑" panose="020B0503020204020204" charset="-122"/>
               </a:rPr>
               <a:t>08:18–08:21</a:t>
             </a:r>
+            <a:endParaRPr sz="950" b="0">
+              <a:solidFill>
+                <a:srgbClr val="282828"/>
+              </a:solidFill>
+              <a:latin typeface="微软雅黑" panose="020B0503020204020204" charset="-122"/>
+            </a:endParaRPr>
           </a:p>
         </p:txBody>
       </p:sp>
@@ -5236,7 +5530,7 @@
           </a:fontRef>
         </p:style>
         <p:txBody>
-          <a:bodyPr rtlCol="0" anchor="ctr" wrap="square" lIns="63500" rIns="63500" tIns="38100" bIns="38100"/>
+          <a:bodyPr wrap="square" lIns="63500" tIns="38100" rIns="63500" bIns="38100" rtlCol="0" anchor="ctr"/>
           <a:lstStyle/>
           <a:p>
             <a:pPr algn="ctr"/>
@@ -5245,10 +5539,16 @@
                 <a:solidFill>
                   <a:srgbClr val="282828"/>
                 </a:solidFill>
-                <a:latin typeface="微软雅黑"/>
+                <a:latin typeface="微软雅黑" panose="020B0503020204020204" charset="-122"/>
               </a:rPr>
               <a:t>两两判断：</a:t>
             </a:r>
+            <a:endParaRPr sz="1050" b="0">
+              <a:solidFill>
+                <a:srgbClr val="282828"/>
+              </a:solidFill>
+              <a:latin typeface="微软雅黑" panose="020B0503020204020204" charset="-122"/>
+            </a:endParaRPr>
           </a:p>
           <a:p>
             <a:pPr algn="ctr"/>
@@ -5257,10 +5557,16 @@
                 <a:solidFill>
                   <a:srgbClr val="282828"/>
                 </a:solidFill>
-                <a:latin typeface="微软雅黑"/>
+                <a:latin typeface="微软雅黑" panose="020B0503020204020204" charset="-122"/>
               </a:rPr>
               <a:t>不能同时选就连边</a:t>
             </a:r>
+            <a:endParaRPr sz="1050" b="0">
+              <a:solidFill>
+                <a:srgbClr val="282828"/>
+              </a:solidFill>
+              <a:latin typeface="微软雅黑" panose="020B0503020204020204" charset="-122"/>
+            </a:endParaRPr>
           </a:p>
         </p:txBody>
       </p:sp>
@@ -5281,7 +5587,7 @@
           <a:noFill/>
         </p:spPr>
         <p:txBody>
-          <a:bodyPr wrap="square" lIns="50800" rIns="50800" tIns="38100" bIns="38100">
+          <a:bodyPr wrap="square" lIns="50800" tIns="38100" rIns="50800" bIns="38100">
             <a:spAutoFit/>
           </a:bodyPr>
           <a:lstStyle/>
@@ -5291,10 +5597,16 @@
                 <a:solidFill>
                   <a:srgbClr val="282828"/>
                 </a:solidFill>
-                <a:latin typeface="微软雅黑"/>
+                <a:latin typeface="微软雅黑" panose="020B0503020204020204" charset="-122"/>
               </a:rPr>
               <a:t>生成冲突图 G=(V,E)</a:t>
             </a:r>
+            <a:endParaRPr sz="1300" b="1">
+              <a:solidFill>
+                <a:srgbClr val="282828"/>
+              </a:solidFill>
+              <a:latin typeface="微软雅黑" panose="020B0503020204020204" charset="-122"/>
+            </a:endParaRPr>
           </a:p>
         </p:txBody>
       </p:sp>
@@ -5441,7 +5753,7 @@
           </a:fontRef>
         </p:style>
         <p:txBody>
-          <a:bodyPr rtlCol="0" anchor="ctr" wrap="square" lIns="63500" rIns="63500" tIns="38100" bIns="38100"/>
+          <a:bodyPr wrap="square" lIns="63500" tIns="38100" rIns="63500" bIns="38100" rtlCol="0" anchor="ctr"/>
           <a:lstStyle/>
           <a:p>
             <a:pPr algn="ctr"/>
@@ -5450,10 +5762,16 @@
                 <a:solidFill>
                   <a:srgbClr val="282828"/>
                 </a:solidFill>
-                <a:latin typeface="微软雅黑"/>
+                <a:latin typeface="微软雅黑" panose="020B0503020204020204" charset="-122"/>
               </a:rPr>
               <a:t>v₁</a:t>
             </a:r>
+            <a:endParaRPr sz="1200" b="1">
+              <a:solidFill>
+                <a:srgbClr val="282828"/>
+              </a:solidFill>
+              <a:latin typeface="微软雅黑" panose="020B0503020204020204" charset="-122"/>
+            </a:endParaRPr>
           </a:p>
         </p:txBody>
       </p:sp>
@@ -5495,7 +5813,7 @@
           </a:fontRef>
         </p:style>
         <p:txBody>
-          <a:bodyPr rtlCol="0" anchor="ctr" wrap="square" lIns="63500" rIns="63500" tIns="38100" bIns="38100"/>
+          <a:bodyPr wrap="square" lIns="63500" tIns="38100" rIns="63500" bIns="38100" rtlCol="0" anchor="ctr"/>
           <a:lstStyle/>
           <a:p>
             <a:pPr algn="ctr"/>
@@ -5504,10 +5822,16 @@
                 <a:solidFill>
                   <a:srgbClr val="282828"/>
                 </a:solidFill>
-                <a:latin typeface="微软雅黑"/>
+                <a:latin typeface="微软雅黑" panose="020B0503020204020204" charset="-122"/>
               </a:rPr>
               <a:t>v₂</a:t>
             </a:r>
+            <a:endParaRPr sz="1200" b="1">
+              <a:solidFill>
+                <a:srgbClr val="282828"/>
+              </a:solidFill>
+              <a:latin typeface="微软雅黑" panose="020B0503020204020204" charset="-122"/>
+            </a:endParaRPr>
           </a:p>
         </p:txBody>
       </p:sp>
@@ -5549,7 +5873,7 @@
           </a:fontRef>
         </p:style>
         <p:txBody>
-          <a:bodyPr rtlCol="0" anchor="ctr" wrap="square" lIns="63500" rIns="63500" tIns="38100" bIns="38100"/>
+          <a:bodyPr wrap="square" lIns="63500" tIns="38100" rIns="63500" bIns="38100" rtlCol="0" anchor="ctr"/>
           <a:lstStyle/>
           <a:p>
             <a:pPr algn="ctr"/>
@@ -5558,10 +5882,16 @@
                 <a:solidFill>
                   <a:srgbClr val="282828"/>
                 </a:solidFill>
-                <a:latin typeface="微软雅黑"/>
+                <a:latin typeface="微软雅黑" panose="020B0503020204020204" charset="-122"/>
               </a:rPr>
               <a:t>v₃</a:t>
             </a:r>
+            <a:endParaRPr sz="1200" b="1">
+              <a:solidFill>
+                <a:srgbClr val="282828"/>
+              </a:solidFill>
+              <a:latin typeface="微软雅黑" panose="020B0503020204020204" charset="-122"/>
+            </a:endParaRPr>
           </a:p>
         </p:txBody>
       </p:sp>
@@ -5603,7 +5933,7 @@
           </a:fontRef>
         </p:style>
         <p:txBody>
-          <a:bodyPr rtlCol="0" anchor="ctr" wrap="square" lIns="63500" rIns="63500" tIns="38100" bIns="38100"/>
+          <a:bodyPr wrap="square" lIns="63500" tIns="38100" rIns="63500" bIns="38100" rtlCol="0" anchor="ctr"/>
           <a:lstStyle/>
           <a:p>
             <a:pPr algn="ctr"/>
@@ -5612,10 +5942,16 @@
                 <a:solidFill>
                   <a:srgbClr val="282828"/>
                 </a:solidFill>
-                <a:latin typeface="微软雅黑"/>
+                <a:latin typeface="微软雅黑" panose="020B0503020204020204" charset="-122"/>
               </a:rPr>
               <a:t>v₄</a:t>
             </a:r>
+            <a:endParaRPr sz="1200" b="1">
+              <a:solidFill>
+                <a:srgbClr val="282828"/>
+              </a:solidFill>
+              <a:latin typeface="微软雅黑" panose="020B0503020204020204" charset="-122"/>
+            </a:endParaRPr>
           </a:p>
         </p:txBody>
       </p:sp>
@@ -5657,7 +5993,7 @@
           </a:fontRef>
         </p:style>
         <p:txBody>
-          <a:bodyPr rtlCol="0" anchor="ctr" wrap="square" lIns="63500" rIns="63500" tIns="38100" bIns="38100"/>
+          <a:bodyPr wrap="square" lIns="63500" tIns="38100" rIns="63500" bIns="38100" rtlCol="0" anchor="ctr"/>
           <a:lstStyle/>
           <a:p>
             <a:pPr algn="ctr"/>
@@ -5666,10 +6002,16 @@
                 <a:solidFill>
                   <a:srgbClr val="282828"/>
                 </a:solidFill>
-                <a:latin typeface="微软雅黑"/>
+                <a:latin typeface="微软雅黑" panose="020B0503020204020204" charset="-122"/>
               </a:rPr>
               <a:t>同任务</a:t>
             </a:r>
+            <a:endParaRPr sz="850" b="0">
+              <a:solidFill>
+                <a:srgbClr val="282828"/>
+              </a:solidFill>
+              <a:latin typeface="微软雅黑" panose="020B0503020204020204" charset="-122"/>
+            </a:endParaRPr>
           </a:p>
           <a:p>
             <a:pPr algn="ctr"/>
@@ -5678,10 +6020,16 @@
                 <a:solidFill>
                   <a:srgbClr val="282828"/>
                 </a:solidFill>
-                <a:latin typeface="微软雅黑"/>
+                <a:latin typeface="微软雅黑" panose="020B0503020204020204" charset="-122"/>
               </a:rPr>
               <a:t>互斥</a:t>
             </a:r>
+            <a:endParaRPr sz="850" b="0">
+              <a:solidFill>
+                <a:srgbClr val="282828"/>
+              </a:solidFill>
+              <a:latin typeface="微软雅黑" panose="020B0503020204020204" charset="-122"/>
+            </a:endParaRPr>
           </a:p>
         </p:txBody>
       </p:sp>
@@ -5723,7 +6071,7 @@
           </a:fontRef>
         </p:style>
         <p:txBody>
-          <a:bodyPr rtlCol="0" anchor="ctr" wrap="square" lIns="63500" rIns="63500" tIns="38100" bIns="38100"/>
+          <a:bodyPr wrap="square" lIns="63500" tIns="38100" rIns="63500" bIns="38100" rtlCol="0" anchor="ctr"/>
           <a:lstStyle/>
           <a:p>
             <a:pPr algn="ctr"/>
@@ -5732,10 +6080,16 @@
                 <a:solidFill>
                   <a:srgbClr val="282828"/>
                 </a:solidFill>
-                <a:latin typeface="微软雅黑"/>
+                <a:latin typeface="微软雅黑" panose="020B0503020204020204" charset="-122"/>
               </a:rPr>
               <a:t>同星</a:t>
             </a:r>
+            <a:endParaRPr sz="850" b="0">
+              <a:solidFill>
+                <a:srgbClr val="282828"/>
+              </a:solidFill>
+              <a:latin typeface="微软雅黑" panose="020B0503020204020204" charset="-122"/>
+            </a:endParaRPr>
           </a:p>
           <a:p>
             <a:pPr algn="ctr"/>
@@ -5744,10 +6098,16 @@
                 <a:solidFill>
                   <a:srgbClr val="282828"/>
                 </a:solidFill>
-                <a:latin typeface="微软雅黑"/>
+                <a:latin typeface="微软雅黑" panose="020B0503020204020204" charset="-122"/>
               </a:rPr>
               <a:t>重叠</a:t>
             </a:r>
+            <a:endParaRPr sz="850" b="0">
+              <a:solidFill>
+                <a:srgbClr val="282828"/>
+              </a:solidFill>
+              <a:latin typeface="微软雅黑" panose="020B0503020204020204" charset="-122"/>
+            </a:endParaRPr>
           </a:p>
         </p:txBody>
       </p:sp>
@@ -5789,7 +6149,7 @@
           </a:fontRef>
         </p:style>
         <p:txBody>
-          <a:bodyPr rtlCol="0" anchor="ctr" wrap="square" lIns="63500" rIns="63500" tIns="38100" bIns="38100"/>
+          <a:bodyPr wrap="square" lIns="63500" tIns="38100" rIns="63500" bIns="38100" rtlCol="0" anchor="ctr"/>
           <a:lstStyle/>
           <a:p>
             <a:pPr algn="ctr"/>
@@ -5798,10 +6158,16 @@
                 <a:solidFill>
                   <a:srgbClr val="282828"/>
                 </a:solidFill>
-                <a:latin typeface="微软雅黑"/>
+                <a:latin typeface="微软雅黑" panose="020B0503020204020204" charset="-122"/>
               </a:rPr>
               <a:t>机动</a:t>
             </a:r>
+            <a:endParaRPr sz="850" b="0">
+              <a:solidFill>
+                <a:srgbClr val="282828"/>
+              </a:solidFill>
+              <a:latin typeface="微软雅黑" panose="020B0503020204020204" charset="-122"/>
+            </a:endParaRPr>
           </a:p>
           <a:p>
             <a:pPr algn="ctr"/>
@@ -5810,10 +6176,16 @@
                 <a:solidFill>
                   <a:srgbClr val="282828"/>
                 </a:solidFill>
-                <a:latin typeface="微软雅黑"/>
+                <a:latin typeface="微软雅黑" panose="020B0503020204020204" charset="-122"/>
               </a:rPr>
               <a:t>不足</a:t>
             </a:r>
+            <a:endParaRPr sz="850" b="0">
+              <a:solidFill>
+                <a:srgbClr val="282828"/>
+              </a:solidFill>
+              <a:latin typeface="微软雅黑" panose="020B0503020204020204" charset="-122"/>
+            </a:endParaRPr>
           </a:p>
         </p:txBody>
       </p:sp>
@@ -5834,7 +6206,7 @@
           <a:noFill/>
         </p:spPr>
         <p:txBody>
-          <a:bodyPr wrap="square" lIns="50800" rIns="50800" tIns="38100" bIns="38100">
+          <a:bodyPr wrap="square" lIns="50800" tIns="38100" rIns="50800" bIns="38100">
             <a:spAutoFit/>
           </a:bodyPr>
           <a:lstStyle/>
@@ -5844,10 +6216,16 @@
                 <a:solidFill>
                   <a:srgbClr val="282828"/>
                 </a:solidFill>
-                <a:latin typeface="微软雅黑"/>
+                <a:latin typeface="微软雅黑" panose="020B0503020204020204" charset="-122"/>
               </a:rPr>
               <a:t>冲突图的价值：构造前就知道哪些组合不可行。</a:t>
             </a:r>
+            <a:endParaRPr sz="1200" b="0">
+              <a:solidFill>
+                <a:srgbClr val="282828"/>
+              </a:solidFill>
+              <a:latin typeface="微软雅黑" panose="020B0503020204020204" charset="-122"/>
+            </a:endParaRPr>
           </a:p>
         </p:txBody>
       </p:sp>
@@ -5903,10 +6281,16 @@
                 <a:solidFill>
                   <a:srgbClr val="2F5597"/>
                 </a:solidFill>
-                <a:latin typeface="微软雅黑"/>
+                <a:latin typeface="微软雅黑" panose="020B0503020204020204" charset="-122"/>
               </a:rPr>
               <a:t>创新点2：基于冲突图动作掩码的可行构造机制</a:t>
             </a:r>
+            <a:endParaRPr sz="2400" b="1">
+              <a:solidFill>
+                <a:srgbClr val="2F5597"/>
+              </a:solidFill>
+              <a:latin typeface="微软雅黑" panose="020B0503020204020204" charset="-122"/>
+            </a:endParaRPr>
           </a:p>
         </p:txBody>
       </p:sp>
@@ -5927,7 +6311,7 @@
           <a:noFill/>
         </p:spPr>
         <p:txBody>
-          <a:bodyPr wrap="square" lIns="50800" rIns="50800" tIns="38100" bIns="38100">
+          <a:bodyPr wrap="square" lIns="50800" tIns="38100" rIns="50800" bIns="38100">
             <a:spAutoFit/>
           </a:bodyPr>
           <a:lstStyle/>
@@ -5937,10 +6321,16 @@
                 <a:solidFill>
                   <a:srgbClr val="282828"/>
                 </a:solidFill>
-                <a:latin typeface="微软雅黑"/>
+                <a:latin typeface="微软雅黑" panose="020B0503020204020204" charset="-122"/>
               </a:rPr>
               <a:t>蚂蚁从空解开始逐步选择候选节点。当前已选节点集合为 Xₜ，下一步不是从全部 V 中选，而是从冲突图掩码后的可行动作集合 Aₜ 中选。</a:t>
             </a:r>
+            <a:endParaRPr sz="1800" b="0">
+              <a:solidFill>
+                <a:srgbClr val="282828"/>
+              </a:solidFill>
+              <a:latin typeface="微软雅黑" panose="020B0503020204020204" charset="-122"/>
+            </a:endParaRPr>
           </a:p>
         </p:txBody>
       </p:sp>
@@ -5982,7 +6372,7 @@
           </a:fontRef>
         </p:style>
         <p:txBody>
-          <a:bodyPr rtlCol="0" anchor="ctr" wrap="square" lIns="63500" rIns="63500" tIns="38100" bIns="38100"/>
+          <a:bodyPr wrap="square" lIns="63500" tIns="38100" rIns="63500" bIns="38100" rtlCol="0" anchor="ctr"/>
           <a:lstStyle/>
           <a:p>
             <a:pPr algn="ctr"/>
@@ -5991,10 +6381,16 @@
                 <a:solidFill>
                   <a:srgbClr val="282828"/>
                 </a:solidFill>
-                <a:latin typeface="微软雅黑"/>
+                <a:latin typeface="微软雅黑" panose="020B0503020204020204" charset="-122"/>
               </a:rPr>
               <a:t>Aₜ = { v ∈ V | v ∉ Xₜ,  N(v) ∩ Xₜ = ∅ }</a:t>
             </a:r>
+            <a:endParaRPr sz="2200" b="0">
+              <a:solidFill>
+                <a:srgbClr val="282828"/>
+              </a:solidFill>
+              <a:latin typeface="微软雅黑" panose="020B0503020204020204" charset="-122"/>
+            </a:endParaRPr>
           </a:p>
         </p:txBody>
       </p:sp>
@@ -6036,7 +6432,7 @@
           </a:fontRef>
         </p:style>
         <p:txBody>
-          <a:bodyPr rtlCol="0" anchor="ctr" wrap="square" lIns="127000" rIns="101600" tIns="76200" bIns="76200"/>
+          <a:bodyPr wrap="square" lIns="127000" tIns="76200" rIns="101600" bIns="76200" rtlCol="0" anchor="ctr"/>
           <a:lstStyle/>
           <a:p>
             <a:pPr algn="ctr"/>
@@ -6045,46 +6441,67 @@
                 <a:solidFill>
                   <a:srgbClr val="2F5597"/>
                 </a:solidFill>
-                <a:latin typeface="微软雅黑"/>
+                <a:latin typeface="微软雅黑" panose="020B0503020204020204" charset="-122"/>
               </a:rPr>
               <a:t>动作掩码的作用</a:t>
             </a:r>
-          </a:p>
-          <a:p>
-            <a:pPr/>
+            <a:endParaRPr sz="1500" b="1">
+              <a:solidFill>
+                <a:srgbClr val="2F5597"/>
+              </a:solidFill>
+              <a:latin typeface="微软雅黑" panose="020B0503020204020204" charset="-122"/>
+            </a:endParaRPr>
+          </a:p>
+          <a:p>
             <a:r>
               <a:rPr sz="1350">
                 <a:solidFill>
                   <a:srgbClr val="282828"/>
                 </a:solidFill>
-                <a:latin typeface="微软雅黑"/>
+                <a:latin typeface="微软雅黑" panose="020B0503020204020204" charset="-122"/>
               </a:rPr>
               <a:t>• N(v) 是节点 v 在冲突图中的邻域。</a:t>
             </a:r>
-          </a:p>
-          <a:p>
-            <a:pPr/>
+            <a:endParaRPr sz="1350">
+              <a:solidFill>
+                <a:srgbClr val="282828"/>
+              </a:solidFill>
+              <a:latin typeface="微软雅黑" panose="020B0503020204020204" charset="-122"/>
+            </a:endParaRPr>
+          </a:p>
+          <a:p>
             <a:r>
               <a:rPr sz="1350">
                 <a:solidFill>
                   <a:srgbClr val="282828"/>
                 </a:solidFill>
-                <a:latin typeface="微软雅黑"/>
+                <a:latin typeface="微软雅黑" panose="020B0503020204020204" charset="-122"/>
               </a:rPr>
               <a:t>• 若 N(v)∩Xₜ≠∅，说明 v 与当前部分解冲突，直接屏蔽。</a:t>
             </a:r>
-          </a:p>
-          <a:p>
-            <a:pPr/>
+            <a:endParaRPr sz="1350">
+              <a:solidFill>
+                <a:srgbClr val="282828"/>
+              </a:solidFill>
+              <a:latin typeface="微软雅黑" panose="020B0503020204020204" charset="-122"/>
+            </a:endParaRPr>
+          </a:p>
+          <a:p>
             <a:r>
               <a:rPr sz="1350">
                 <a:solidFill>
                   <a:srgbClr val="282828"/>
                 </a:solidFill>
-                <a:latin typeface="微软雅黑"/>
+                <a:latin typeface="微软雅黑" panose="020B0503020204020204" charset="-122"/>
               </a:rPr>
               <a:t>• 构造过程中 Xₜ 始终保持可行，不需要事后大规模修复。</a:t>
             </a:r>
+            <a:endParaRPr sz="1350">
+              <a:solidFill>
+                <a:srgbClr val="282828"/>
+              </a:solidFill>
+              <a:latin typeface="微软雅黑" panose="020B0503020204020204" charset="-122"/>
+            </a:endParaRPr>
           </a:p>
         </p:txBody>
       </p:sp>
@@ -6126,7 +6543,7 @@
           </a:fontRef>
         </p:style>
         <p:txBody>
-          <a:bodyPr rtlCol="0" anchor="ctr" wrap="square" lIns="127000" rIns="101600" tIns="76200" bIns="76200"/>
+          <a:bodyPr wrap="square" lIns="127000" tIns="76200" rIns="101600" bIns="76200" rtlCol="0" anchor="ctr"/>
           <a:lstStyle/>
           <a:p>
             <a:pPr algn="ctr"/>
@@ -6135,46 +6552,67 @@
                 <a:solidFill>
                   <a:srgbClr val="2F5597"/>
                 </a:solidFill>
-                <a:latin typeface="微软雅黑"/>
+                <a:latin typeface="微软雅黑" panose="020B0503020204020204" charset="-122"/>
               </a:rPr>
               <a:t>这一点的核心思想</a:t>
             </a:r>
-          </a:p>
-          <a:p>
-            <a:pPr/>
+            <a:endParaRPr sz="1500" b="1">
+              <a:solidFill>
+                <a:srgbClr val="2F5597"/>
+              </a:solidFill>
+              <a:latin typeface="微软雅黑" panose="020B0503020204020204" charset="-122"/>
+            </a:endParaRPr>
+          </a:p>
+          <a:p>
             <a:r>
               <a:rPr sz="1350">
                 <a:solidFill>
                   <a:srgbClr val="282828"/>
                 </a:solidFill>
-                <a:latin typeface="微软雅黑"/>
+                <a:latin typeface="微软雅黑" panose="020B0503020204020204" charset="-122"/>
               </a:rPr>
               <a:t>• RL 不负责学习硬约束。</a:t>
             </a:r>
-          </a:p>
-          <a:p>
-            <a:pPr/>
+            <a:endParaRPr sz="1350">
+              <a:solidFill>
+                <a:srgbClr val="282828"/>
+              </a:solidFill>
+              <a:latin typeface="微软雅黑" panose="020B0503020204020204" charset="-122"/>
+            </a:endParaRPr>
+          </a:p>
+          <a:p>
             <a:r>
               <a:rPr sz="1350">
                 <a:solidFill>
                   <a:srgbClr val="282828"/>
                 </a:solidFill>
-                <a:latin typeface="微软雅黑"/>
+                <a:latin typeface="微软雅黑" panose="020B0503020204020204" charset="-122"/>
               </a:rPr>
               <a:t>• RL 只在可行动作空间 Aₜ 内学习“哪个节点更值得选”。</a:t>
             </a:r>
-          </a:p>
-          <a:p>
-            <a:pPr/>
+            <a:endParaRPr sz="1350">
+              <a:solidFill>
+                <a:srgbClr val="282828"/>
+              </a:solidFill>
+              <a:latin typeface="微软雅黑" panose="020B0503020204020204" charset="-122"/>
+            </a:endParaRPr>
+          </a:p>
+          <a:p>
             <a:r>
               <a:rPr sz="1350">
                 <a:solidFill>
                   <a:srgbClr val="282828"/>
                 </a:solidFill>
-                <a:latin typeface="微软雅黑"/>
+                <a:latin typeface="微软雅黑" panose="020B0503020204020204" charset="-122"/>
               </a:rPr>
               <a:t>• 冲突图负责可行性，学习模块负责选择质量。</a:t>
             </a:r>
+            <a:endParaRPr sz="1350">
+              <a:solidFill>
+                <a:srgbClr val="282828"/>
+              </a:solidFill>
+              <a:latin typeface="微软雅黑" panose="020B0503020204020204" charset="-122"/>
+            </a:endParaRPr>
           </a:p>
         </p:txBody>
       </p:sp>
@@ -6216,7 +6654,7 @@
           </a:fontRef>
         </p:style>
         <p:txBody>
-          <a:bodyPr rtlCol="0" anchor="ctr" wrap="square" lIns="63500" rIns="63500" tIns="38100" bIns="38100"/>
+          <a:bodyPr wrap="square" lIns="63500" tIns="38100" rIns="63500" bIns="38100" rtlCol="0" anchor="ctr"/>
           <a:lstStyle/>
           <a:p>
             <a:pPr algn="ctr"/>
@@ -6225,10 +6663,16 @@
                 <a:solidFill>
                   <a:srgbClr val="282828"/>
                 </a:solidFill>
-                <a:latin typeface="微软雅黑"/>
+                <a:latin typeface="微软雅黑" panose="020B0503020204020204" charset="-122"/>
               </a:rPr>
               <a:t>选择 vₜ 后：Xₜ₊₁ = Xₜ ∪ {vₜ}，Aₜ₊₁ = Aₜ − {vₜ} − N(vₜ)</a:t>
             </a:r>
+            <a:endParaRPr sz="1600" b="0">
+              <a:solidFill>
+                <a:srgbClr val="282828"/>
+              </a:solidFill>
+              <a:latin typeface="微软雅黑" panose="020B0503020204020204" charset="-122"/>
+            </a:endParaRPr>
           </a:p>
         </p:txBody>
       </p:sp>
@@ -6284,10 +6728,16 @@
                 <a:solidFill>
                   <a:srgbClr val="2F5597"/>
                 </a:solidFill>
-                <a:latin typeface="微软雅黑"/>
+                <a:latin typeface="微软雅黑" panose="020B0503020204020204" charset="-122"/>
               </a:rPr>
               <a:t>创新点3：MLP-DDQN 辅助的候选节点价值学习</a:t>
             </a:r>
+            <a:endParaRPr sz="2400" b="1">
+              <a:solidFill>
+                <a:srgbClr val="2F5597"/>
+              </a:solidFill>
+              <a:latin typeface="微软雅黑" panose="020B0503020204020204" charset="-122"/>
+            </a:endParaRPr>
           </a:p>
         </p:txBody>
       </p:sp>
@@ -6308,7 +6758,7 @@
           <a:noFill/>
         </p:spPr>
         <p:txBody>
-          <a:bodyPr wrap="square" lIns="50800" rIns="50800" tIns="38100" bIns="38100">
+          <a:bodyPr wrap="square" lIns="50800" tIns="38100" rIns="50800" bIns="38100">
             <a:spAutoFit/>
           </a:bodyPr>
           <a:lstStyle/>
@@ -6318,10 +6768,16 @@
                 <a:solidFill>
                   <a:srgbClr val="282828"/>
                 </a:solidFill>
-                <a:latin typeface="微软雅黑"/>
+                <a:latin typeface="微软雅黑" panose="020B0503020204020204" charset="-122"/>
               </a:rPr>
               <a:t>将蚂蚁逐节点构造调度方案的过程建模为 MDP。状态表示当前构造局面，动作表示选择一个当前可行候选节点。</a:t>
             </a:r>
+            <a:endParaRPr sz="1700" b="0">
+              <a:solidFill>
+                <a:srgbClr val="282828"/>
+              </a:solidFill>
+              <a:latin typeface="微软雅黑" panose="020B0503020204020204" charset="-122"/>
+            </a:endParaRPr>
           </a:p>
         </p:txBody>
       </p:sp>
@@ -6363,7 +6819,7 @@
           </a:fontRef>
         </p:style>
         <p:txBody>
-          <a:bodyPr rtlCol="0" anchor="ctr" wrap="square" lIns="63500" rIns="63500" tIns="38100" bIns="38100"/>
+          <a:bodyPr wrap="square" lIns="63500" tIns="38100" rIns="63500" bIns="38100" rtlCol="0" anchor="ctr"/>
           <a:lstStyle/>
           <a:p>
             <a:pPr algn="ctr"/>
@@ -6372,10 +6828,16 @@
                 <a:solidFill>
                   <a:srgbClr val="282828"/>
                 </a:solidFill>
-                <a:latin typeface="微软雅黑"/>
+                <a:latin typeface="微软雅黑" panose="020B0503020204020204" charset="-122"/>
               </a:rPr>
               <a:t>Qθ(sₜ,v) = MLP([ gₜ, h(v) ])</a:t>
             </a:r>
+            <a:endParaRPr sz="2200" b="0">
+              <a:solidFill>
+                <a:srgbClr val="282828"/>
+              </a:solidFill>
+              <a:latin typeface="微软雅黑" panose="020B0503020204020204" charset="-122"/>
+            </a:endParaRPr>
           </a:p>
         </p:txBody>
       </p:sp>
@@ -6417,7 +6879,7 @@
           </a:fontRef>
         </p:style>
         <p:txBody>
-          <a:bodyPr rtlCol="0" anchor="ctr" wrap="square" lIns="127000" rIns="101600" tIns="76200" bIns="76200"/>
+          <a:bodyPr wrap="square" lIns="127000" tIns="76200" rIns="101600" bIns="76200" rtlCol="0" anchor="ctr"/>
           <a:lstStyle/>
           <a:p>
             <a:pPr algn="ctr"/>
@@ -6426,82 +6888,118 @@
                 <a:solidFill>
                   <a:srgbClr val="2F5597"/>
                 </a:solidFill>
-                <a:latin typeface="微软雅黑"/>
+                <a:latin typeface="微软雅黑" panose="020B0503020204020204" charset="-122"/>
               </a:rPr>
               <a:t>状态特征 gₜ</a:t>
             </a:r>
-          </a:p>
-          <a:p>
-            <a:pPr/>
+            <a:endParaRPr sz="1500" b="1">
+              <a:solidFill>
+                <a:srgbClr val="2F5597"/>
+              </a:solidFill>
+              <a:latin typeface="微软雅黑" panose="020B0503020204020204" charset="-122"/>
+            </a:endParaRPr>
+          </a:p>
+          <a:p>
             <a:r>
               <a:rPr sz="1350">
                 <a:solidFill>
                   <a:srgbClr val="282828"/>
                 </a:solidFill>
-                <a:latin typeface="微软雅黑"/>
+                <a:latin typeface="微软雅黑" panose="020B0503020204020204" charset="-122"/>
               </a:rPr>
               <a:t>• 当前收益比例 Profitₜ</a:t>
             </a:r>
-          </a:p>
-          <a:p>
-            <a:pPr/>
+            <a:endParaRPr sz="1350">
+              <a:solidFill>
+                <a:srgbClr val="282828"/>
+              </a:solidFill>
+              <a:latin typeface="微软雅黑" panose="020B0503020204020204" charset="-122"/>
+            </a:endParaRPr>
+          </a:p>
+          <a:p>
             <a:r>
               <a:rPr sz="1350">
                 <a:solidFill>
                   <a:srgbClr val="282828"/>
                 </a:solidFill>
-                <a:latin typeface="微软雅黑"/>
+                <a:latin typeface="微软雅黑" panose="020B0503020204020204" charset="-122"/>
               </a:rPr>
               <a:t>• 累计机动代价 Maneuverₜ</a:t>
             </a:r>
-          </a:p>
-          <a:p>
-            <a:pPr/>
+            <a:endParaRPr sz="1350">
+              <a:solidFill>
+                <a:srgbClr val="282828"/>
+              </a:solidFill>
+              <a:latin typeface="微软雅黑" panose="020B0503020204020204" charset="-122"/>
+            </a:endParaRPr>
+          </a:p>
+          <a:p>
             <a:r>
               <a:rPr sz="1350">
                 <a:solidFill>
                   <a:srgbClr val="282828"/>
                 </a:solidFill>
-                <a:latin typeface="微软雅黑"/>
+                <a:latin typeface="微软雅黑" panose="020B0503020204020204" charset="-122"/>
               </a:rPr>
               <a:t>• 负载不均衡 LoadStdₜ</a:t>
             </a:r>
-          </a:p>
-          <a:p>
-            <a:pPr/>
+            <a:endParaRPr sz="1350">
+              <a:solidFill>
+                <a:srgbClr val="282828"/>
+              </a:solidFill>
+              <a:latin typeface="微软雅黑" panose="020B0503020204020204" charset="-122"/>
+            </a:endParaRPr>
+          </a:p>
+          <a:p>
             <a:r>
               <a:rPr sz="1350">
                 <a:solidFill>
                   <a:srgbClr val="282828"/>
                 </a:solidFill>
-                <a:latin typeface="微软雅黑"/>
+                <a:latin typeface="微软雅黑" panose="020B0503020204020204" charset="-122"/>
               </a:rPr>
               <a:t>• 剩余可选比例 AvailableRatioₜ</a:t>
             </a:r>
-          </a:p>
-          <a:p>
-            <a:pPr/>
+            <a:endParaRPr sz="1350">
+              <a:solidFill>
+                <a:srgbClr val="282828"/>
+              </a:solidFill>
+              <a:latin typeface="微软雅黑" panose="020B0503020204020204" charset="-122"/>
+            </a:endParaRPr>
+          </a:p>
+          <a:p>
             <a:r>
               <a:rPr sz="1350">
                 <a:solidFill>
                   <a:srgbClr val="282828"/>
                 </a:solidFill>
-                <a:latin typeface="微软雅黑"/>
+                <a:latin typeface="微软雅黑" panose="020B0503020204020204" charset="-122"/>
               </a:rPr>
               <a:t>• 平均冲突度 AvgConflictₜ</a:t>
             </a:r>
-          </a:p>
-          <a:p>
-            <a:pPr/>
+            <a:endParaRPr sz="1350">
+              <a:solidFill>
+                <a:srgbClr val="282828"/>
+              </a:solidFill>
+              <a:latin typeface="微软雅黑" panose="020B0503020204020204" charset="-122"/>
+            </a:endParaRPr>
+          </a:p>
+          <a:p>
             <a:r>
               <a:rPr sz="1350">
                 <a:solidFill>
                   <a:srgbClr val="282828"/>
                 </a:solidFill>
-                <a:latin typeface="微软雅黑"/>
+                <a:latin typeface="微软雅黑" panose="020B0503020204020204" charset="-122"/>
               </a:rPr>
               <a:t>• 迭代进度 IterRatio</a:t>
             </a:r>
+            <a:endParaRPr sz="1350">
+              <a:solidFill>
+                <a:srgbClr val="282828"/>
+              </a:solidFill>
+              <a:latin typeface="微软雅黑" panose="020B0503020204020204" charset="-122"/>
+            </a:endParaRPr>
           </a:p>
         </p:txBody>
       </p:sp>
@@ -6543,7 +7041,7 @@
           </a:fontRef>
         </p:style>
         <p:txBody>
-          <a:bodyPr rtlCol="0" anchor="ctr" wrap="square" lIns="127000" rIns="101600" tIns="76200" bIns="76200"/>
+          <a:bodyPr wrap="square" lIns="127000" tIns="76200" rIns="101600" bIns="76200" rtlCol="0" anchor="ctr"/>
           <a:lstStyle/>
           <a:p>
             <a:pPr algn="ctr"/>
@@ -6552,94 +7050,135 @@
                 <a:solidFill>
                   <a:srgbClr val="2F5597"/>
                 </a:solidFill>
-                <a:latin typeface="微软雅黑"/>
+                <a:latin typeface="微软雅黑" panose="020B0503020204020204" charset="-122"/>
               </a:rPr>
               <a:t>节点特征 h(v)</a:t>
             </a:r>
-          </a:p>
-          <a:p>
-            <a:pPr/>
+            <a:endParaRPr sz="1500" b="1">
+              <a:solidFill>
+                <a:srgbClr val="2F5597"/>
+              </a:solidFill>
+              <a:latin typeface="微软雅黑" panose="020B0503020204020204" charset="-122"/>
+            </a:endParaRPr>
+          </a:p>
+          <a:p>
             <a:r>
               <a:rPr sz="1350">
                 <a:solidFill>
                   <a:srgbClr val="282828"/>
                 </a:solidFill>
-                <a:latin typeface="微软雅黑"/>
+                <a:latin typeface="微软雅黑" panose="020B0503020204020204" charset="-122"/>
               </a:rPr>
               <a:t>• 任务收益 p(v)</a:t>
             </a:r>
-          </a:p>
-          <a:p>
-            <a:pPr/>
+            <a:endParaRPr sz="1350">
+              <a:solidFill>
+                <a:srgbClr val="282828"/>
+              </a:solidFill>
+              <a:latin typeface="微软雅黑" panose="020B0503020204020204" charset="-122"/>
+            </a:endParaRPr>
+          </a:p>
+          <a:p>
             <a:r>
               <a:rPr sz="1350">
                 <a:solidFill>
                   <a:srgbClr val="282828"/>
                 </a:solidFill>
-                <a:latin typeface="微软雅黑"/>
+                <a:latin typeface="微软雅黑" panose="020B0503020204020204" charset="-122"/>
               </a:rPr>
               <a:t>• 窗口稀缺度 R(v)</a:t>
             </a:r>
-          </a:p>
-          <a:p>
-            <a:pPr/>
+            <a:endParaRPr sz="1350">
+              <a:solidFill>
+                <a:srgbClr val="282828"/>
+              </a:solidFill>
+              <a:latin typeface="微软雅黑" panose="020B0503020204020204" charset="-122"/>
+            </a:endParaRPr>
+          </a:p>
+          <a:p>
             <a:r>
               <a:rPr sz="1350">
                 <a:solidFill>
                   <a:srgbClr val="282828"/>
                 </a:solidFill>
-                <a:latin typeface="微软雅黑"/>
+                <a:latin typeface="微软雅黑" panose="020B0503020204020204" charset="-122"/>
               </a:rPr>
               <a:t>• 节点冲突度 C(v)</a:t>
             </a:r>
-          </a:p>
-          <a:p>
-            <a:pPr/>
+            <a:endParaRPr sz="1350">
+              <a:solidFill>
+                <a:srgbClr val="282828"/>
+              </a:solidFill>
+              <a:latin typeface="微软雅黑" panose="020B0503020204020204" charset="-122"/>
+            </a:endParaRPr>
+          </a:p>
+          <a:p>
             <a:r>
               <a:rPr sz="1350">
                 <a:solidFill>
                   <a:srgbClr val="282828"/>
                 </a:solidFill>
-                <a:latin typeface="微软雅黑"/>
+                <a:latin typeface="微软雅黑" panose="020B0503020204020204" charset="-122"/>
               </a:rPr>
               <a:t>• 插入机动代价 M(v)</a:t>
             </a:r>
-          </a:p>
-          <a:p>
-            <a:pPr/>
+            <a:endParaRPr sz="1350">
+              <a:solidFill>
+                <a:srgbClr val="282828"/>
+              </a:solidFill>
+              <a:latin typeface="微软雅黑" panose="020B0503020204020204" charset="-122"/>
+            </a:endParaRPr>
+          </a:p>
+          <a:p>
             <a:r>
               <a:rPr sz="1350">
                 <a:solidFill>
                   <a:srgbClr val="282828"/>
                 </a:solidFill>
-                <a:latin typeface="微软雅黑"/>
+                <a:latin typeface="微软雅黑" panose="020B0503020204020204" charset="-122"/>
               </a:rPr>
               <a:t>• 卫星当前负载 L(sᵢ)</a:t>
             </a:r>
-          </a:p>
-          <a:p>
-            <a:pPr/>
+            <a:endParaRPr sz="1350">
+              <a:solidFill>
+                <a:srgbClr val="282828"/>
+              </a:solidFill>
+              <a:latin typeface="微软雅黑" panose="020B0503020204020204" charset="-122"/>
+            </a:endParaRPr>
+          </a:p>
+          <a:p>
             <a:r>
               <a:rPr sz="1350">
                 <a:solidFill>
                   <a:srgbClr val="282828"/>
                 </a:solidFill>
-                <a:latin typeface="微软雅黑"/>
+                <a:latin typeface="微软雅黑" panose="020B0503020204020204" charset="-122"/>
               </a:rPr>
               <a:t>• 信息素 τ(v)、启发式 η(v)</a:t>
             </a:r>
-          </a:p>
-          <a:p>
-            <a:pPr/>
+            <a:endParaRPr sz="1350">
+              <a:solidFill>
+                <a:srgbClr val="282828"/>
+              </a:solidFill>
+              <a:latin typeface="微软雅黑" panose="020B0503020204020204" charset="-122"/>
+            </a:endParaRPr>
+          </a:p>
+          <a:p>
             <a:r>
               <a:rPr sz="1350">
                 <a:solidFill>
                   <a:srgbClr val="282828"/>
                 </a:solidFill>
-                <a:latin typeface="微软雅黑"/>
+                <a:latin typeface="微软雅黑" panose="020B0503020204020204" charset="-122"/>
               </a:rPr>
               <a:t>• BlockPenalty(v)</a:t>
             </a:r>
+            <a:endParaRPr sz="1350">
+              <a:solidFill>
+                <a:srgbClr val="282828"/>
+              </a:solidFill>
+              <a:latin typeface="微软雅黑" panose="020B0503020204020204" charset="-122"/>
+            </a:endParaRPr>
           </a:p>
         </p:txBody>
       </p:sp>
@@ -6681,7 +7220,7 @@
           </a:fontRef>
         </p:style>
         <p:txBody>
-          <a:bodyPr rtlCol="0" anchor="ctr" wrap="square" lIns="127000" rIns="101600" tIns="76200" bIns="76200"/>
+          <a:bodyPr wrap="square" lIns="127000" tIns="76200" rIns="101600" bIns="76200" rtlCol="0" anchor="ctr"/>
           <a:lstStyle/>
           <a:p>
             <a:pPr algn="ctr"/>
@@ -6690,46 +7229,67 @@
                 <a:solidFill>
                   <a:srgbClr val="2F5597"/>
                 </a:solidFill>
-                <a:latin typeface="微软雅黑"/>
+                <a:latin typeface="微软雅黑" panose="020B0503020204020204" charset="-122"/>
               </a:rPr>
               <a:t>DDQN 学的是什么</a:t>
             </a:r>
-          </a:p>
-          <a:p>
-            <a:pPr/>
+            <a:endParaRPr sz="1500" b="1">
+              <a:solidFill>
+                <a:srgbClr val="2F5597"/>
+              </a:solidFill>
+              <a:latin typeface="微软雅黑" panose="020B0503020204020204" charset="-122"/>
+            </a:endParaRPr>
+          </a:p>
+          <a:p>
             <a:r>
               <a:rPr sz="1350">
                 <a:solidFill>
                   <a:srgbClr val="282828"/>
                 </a:solidFill>
-                <a:latin typeface="微软雅黑"/>
+                <a:latin typeface="微软雅黑" panose="020B0503020204020204" charset="-122"/>
               </a:rPr>
               <a:t>• 不是替代 MOACO。</a:t>
             </a:r>
-          </a:p>
-          <a:p>
-            <a:pPr/>
+            <a:endParaRPr sz="1350">
+              <a:solidFill>
+                <a:srgbClr val="282828"/>
+              </a:solidFill>
+              <a:latin typeface="微软雅黑" panose="020B0503020204020204" charset="-122"/>
+            </a:endParaRPr>
+          </a:p>
+          <a:p>
             <a:r>
               <a:rPr sz="1350">
                 <a:solidFill>
                   <a:srgbClr val="282828"/>
                 </a:solidFill>
-                <a:latin typeface="微软雅黑"/>
+                <a:latin typeface="微软雅黑" panose="020B0503020204020204" charset="-122"/>
               </a:rPr>
               <a:t>• 不是直接输出完整解。</a:t>
             </a:r>
-          </a:p>
-          <a:p>
-            <a:pPr/>
+            <a:endParaRPr sz="1350">
+              <a:solidFill>
+                <a:srgbClr val="282828"/>
+              </a:solidFill>
+              <a:latin typeface="微软雅黑" panose="020B0503020204020204" charset="-122"/>
+            </a:endParaRPr>
+          </a:p>
+          <a:p>
             <a:r>
               <a:rPr sz="1350">
                 <a:solidFill>
                   <a:srgbClr val="282828"/>
                 </a:solidFill>
-                <a:latin typeface="微软雅黑"/>
+                <a:latin typeface="微软雅黑" panose="020B0503020204020204" charset="-122"/>
               </a:rPr>
               <a:t>• 学习在当前状态 sₜ 下，候选节点 v 的长期选择价值。</a:t>
             </a:r>
+            <a:endParaRPr sz="1350">
+              <a:solidFill>
+                <a:srgbClr val="282828"/>
+              </a:solidFill>
+              <a:latin typeface="微软雅黑" panose="020B0503020204020204" charset="-122"/>
+            </a:endParaRPr>
           </a:p>
         </p:txBody>
       </p:sp>
@@ -6771,7 +7331,7 @@
           </a:fontRef>
         </p:style>
         <p:txBody>
-          <a:bodyPr rtlCol="0" anchor="ctr" wrap="square" lIns="63500" rIns="63500" tIns="38100" bIns="38100"/>
+          <a:bodyPr wrap="square" lIns="63500" tIns="38100" rIns="63500" bIns="38100" rtlCol="0" anchor="ctr"/>
           <a:lstStyle/>
           <a:p>
             <a:pPr algn="ctr"/>
@@ -6780,10 +7340,16 @@
                 <a:solidFill>
                   <a:srgbClr val="282828"/>
                 </a:solidFill>
-                <a:latin typeface="微软雅黑"/>
+                <a:latin typeface="微软雅黑" panose="020B0503020204020204" charset="-122"/>
               </a:rPr>
               <a:t>aₜ = v ∈ Aₜ，选择动作会改变后续仍然可选的节点集合</a:t>
             </a:r>
+            <a:endParaRPr sz="1600" b="0">
+              <a:solidFill>
+                <a:srgbClr val="282828"/>
+              </a:solidFill>
+              <a:latin typeface="微软雅黑" panose="020B0503020204020204" charset="-122"/>
+            </a:endParaRPr>
           </a:p>
         </p:txBody>
       </p:sp>
@@ -6839,10 +7405,16 @@
                 <a:solidFill>
                   <a:srgbClr val="2F5597"/>
                 </a:solidFill>
-                <a:latin typeface="微软雅黑"/>
+                <a:latin typeface="微软雅黑" panose="020B0503020204020204" charset="-122"/>
               </a:rPr>
               <a:t>创新点4：基于 Advantage 校正的状态感知节点选择机制</a:t>
             </a:r>
+            <a:endParaRPr sz="2400" b="1">
+              <a:solidFill>
+                <a:srgbClr val="2F5597"/>
+              </a:solidFill>
+              <a:latin typeface="微软雅黑" panose="020B0503020204020204" charset="-122"/>
+            </a:endParaRPr>
           </a:p>
         </p:txBody>
       </p:sp>
@@ -6863,7 +7435,7 @@
           <a:noFill/>
         </p:spPr>
         <p:txBody>
-          <a:bodyPr wrap="square" lIns="50800" rIns="50800" tIns="38100" bIns="38100">
+          <a:bodyPr wrap="square" lIns="50800" tIns="38100" rIns="50800" bIns="38100">
             <a:spAutoFit/>
           </a:bodyPr>
           <a:lstStyle/>
@@ -6873,10 +7445,16 @@
                 <a:solidFill>
                   <a:srgbClr val="282828"/>
                 </a:solidFill>
-                <a:latin typeface="微软雅黑"/>
+                <a:latin typeface="微软雅黑" panose="020B0503020204020204" charset="-122"/>
               </a:rPr>
               <a:t>传统 MOACO 中，信息素 τ(v) 反映历史经验，启发式 η(v) 反映静态结构质量。二者先给出 ACO 基础吸引力。</a:t>
             </a:r>
+            <a:endParaRPr sz="1600" b="0">
+              <a:solidFill>
+                <a:srgbClr val="282828"/>
+              </a:solidFill>
+              <a:latin typeface="微软雅黑" panose="020B0503020204020204" charset="-122"/>
+            </a:endParaRPr>
           </a:p>
         </p:txBody>
       </p:sp>
@@ -6918,7 +7496,7 @@
           </a:fontRef>
         </p:style>
         <p:txBody>
-          <a:bodyPr rtlCol="0" anchor="ctr" wrap="square" lIns="63500" rIns="63500" tIns="38100" bIns="38100"/>
+          <a:bodyPr wrap="square" lIns="63500" tIns="38100" rIns="63500" bIns="38100" rtlCol="0" anchor="ctr"/>
           <a:lstStyle/>
           <a:p>
             <a:pPr algn="ctr"/>
@@ -6927,10 +7505,16 @@
                 <a:solidFill>
                   <a:srgbClr val="282828"/>
                 </a:solidFill>
-                <a:latin typeface="微软雅黑"/>
+                <a:latin typeface="微软雅黑" panose="020B0503020204020204" charset="-122"/>
               </a:rPr>
               <a:t>Bₜ(v) = α log τ(v) + β log η(v)</a:t>
             </a:r>
+            <a:endParaRPr sz="2000" b="0">
+              <a:solidFill>
+                <a:srgbClr val="282828"/>
+              </a:solidFill>
+              <a:latin typeface="微软雅黑" panose="020B0503020204020204" charset="-122"/>
+            </a:endParaRPr>
           </a:p>
         </p:txBody>
       </p:sp>
@@ -6951,7 +7535,7 @@
           <a:noFill/>
         </p:spPr>
         <p:txBody>
-          <a:bodyPr wrap="square" lIns="50800" rIns="50800" tIns="38100" bIns="38100">
+          <a:bodyPr wrap="square" lIns="50800" tIns="38100" rIns="50800" bIns="38100">
             <a:spAutoFit/>
           </a:bodyPr>
           <a:lstStyle/>
@@ -6961,10 +7545,16 @@
                 <a:solidFill>
                   <a:srgbClr val="282828"/>
                 </a:solidFill>
-                <a:latin typeface="微软雅黑"/>
+                <a:latin typeface="微软雅黑" panose="020B0503020204020204" charset="-122"/>
               </a:rPr>
               <a:t>DDQN 不直接把绝对 Q 值作为第三个加数，而是先计算当前可行动作集合内的平均 Q 值，再得到相对优势项。</a:t>
             </a:r>
+            <a:endParaRPr sz="1600" b="0">
+              <a:solidFill>
+                <a:srgbClr val="282828"/>
+              </a:solidFill>
+              <a:latin typeface="微软雅黑" panose="020B0503020204020204" charset="-122"/>
+            </a:endParaRPr>
           </a:p>
         </p:txBody>
       </p:sp>
@@ -7006,7 +7596,7 @@
           </a:fontRef>
         </p:style>
         <p:txBody>
-          <a:bodyPr rtlCol="0" anchor="ctr" wrap="square" lIns="63500" rIns="63500" tIns="38100" bIns="38100"/>
+          <a:bodyPr wrap="square" lIns="63500" tIns="38100" rIns="63500" bIns="38100" rtlCol="0" anchor="ctr"/>
           <a:lstStyle/>
           <a:p>
             <a:pPr algn="ctr"/>
@@ -7015,10 +7605,16 @@
                 <a:solidFill>
                   <a:srgbClr val="282828"/>
                 </a:solidFill>
-                <a:latin typeface="微软雅黑"/>
+                <a:latin typeface="微软雅黑" panose="020B0503020204020204" charset="-122"/>
               </a:rPr>
               <a:t>Q̄ₜ = (1/|Aₜ|) Σᵤ∈Aₜ Qθ(sₜ,u)</a:t>
             </a:r>
+            <a:endParaRPr sz="1600" b="0">
+              <a:solidFill>
+                <a:srgbClr val="282828"/>
+              </a:solidFill>
+              <a:latin typeface="微软雅黑" panose="020B0503020204020204" charset="-122"/>
+            </a:endParaRPr>
           </a:p>
         </p:txBody>
       </p:sp>
@@ -7060,7 +7656,7 @@
           </a:fontRef>
         </p:style>
         <p:txBody>
-          <a:bodyPr rtlCol="0" anchor="ctr" wrap="square" lIns="63500" rIns="63500" tIns="38100" bIns="38100"/>
+          <a:bodyPr wrap="square" lIns="63500" tIns="38100" rIns="63500" bIns="38100" rtlCol="0" anchor="ctr"/>
           <a:lstStyle/>
           <a:p>
             <a:pPr algn="ctr"/>
@@ -7069,10 +7665,16 @@
                 <a:solidFill>
                   <a:srgbClr val="282828"/>
                 </a:solidFill>
-                <a:latin typeface="微软雅黑"/>
+                <a:latin typeface="微软雅黑" panose="020B0503020204020204" charset="-122"/>
               </a:rPr>
               <a:t>Advθ(sₜ,v) = Qθ(sₜ,v) − Q̄ₜ</a:t>
             </a:r>
+            <a:endParaRPr sz="1600" b="0">
+              <a:solidFill>
+                <a:srgbClr val="282828"/>
+              </a:solidFill>
+              <a:latin typeface="微软雅黑" panose="020B0503020204020204" charset="-122"/>
+            </a:endParaRPr>
           </a:p>
         </p:txBody>
       </p:sp>
@@ -7114,7 +7716,7 @@
           </a:fontRef>
         </p:style>
         <p:txBody>
-          <a:bodyPr rtlCol="0" anchor="ctr" wrap="square" lIns="63500" rIns="63500" tIns="38100" bIns="38100"/>
+          <a:bodyPr wrap="square" lIns="63500" tIns="38100" rIns="63500" bIns="38100" rtlCol="0" anchor="ctr"/>
           <a:lstStyle/>
           <a:p>
             <a:pPr algn="ctr"/>
@@ -7123,10 +7725,16 @@
                 <a:solidFill>
                   <a:srgbClr val="282828"/>
                 </a:solidFill>
-                <a:latin typeface="微软雅黑"/>
+                <a:latin typeface="微软雅黑" panose="020B0503020204020204" charset="-122"/>
               </a:rPr>
               <a:t>P(v|sₜ) = exp(Bₜ(v)+κAdvθ(sₜ,v)) / Σᵤ∈Aₜ exp(Bₜ(u)+κAdvθ(sₜ,u))</a:t>
             </a:r>
+            <a:endParaRPr sz="1600" b="0">
+              <a:solidFill>
+                <a:srgbClr val="282828"/>
+              </a:solidFill>
+              <a:latin typeface="微软雅黑" panose="020B0503020204020204" charset="-122"/>
+            </a:endParaRPr>
           </a:p>
         </p:txBody>
       </p:sp>
@@ -7168,7 +7776,7 @@
           </a:fontRef>
         </p:style>
         <p:txBody>
-          <a:bodyPr rtlCol="0" anchor="ctr" wrap="square" lIns="127000" rIns="101600" tIns="76200" bIns="76200"/>
+          <a:bodyPr wrap="square" lIns="127000" tIns="76200" rIns="101600" bIns="76200" rtlCol="0" anchor="ctr"/>
           <a:lstStyle/>
           <a:p>
             <a:pPr algn="ctr"/>
@@ -7177,22 +7785,33 @@
                 <a:solidFill>
                   <a:srgbClr val="2F5597"/>
                 </a:solidFill>
-                <a:latin typeface="微软雅黑"/>
+                <a:latin typeface="微软雅黑" panose="020B0503020204020204" charset="-122"/>
               </a:rPr>
               <a:t>这样写的含义</a:t>
             </a:r>
-          </a:p>
-          <a:p>
-            <a:pPr/>
+            <a:endParaRPr sz="1500" b="1">
+              <a:solidFill>
+                <a:srgbClr val="2F5597"/>
+              </a:solidFill>
+              <a:latin typeface="微软雅黑" panose="020B0503020204020204" charset="-122"/>
+            </a:endParaRPr>
+          </a:p>
+          <a:p>
             <a:r>
               <a:rPr sz="1350">
                 <a:solidFill>
                   <a:srgbClr val="282828"/>
                 </a:solidFill>
-                <a:latin typeface="微软雅黑"/>
+                <a:latin typeface="微软雅黑" panose="020B0503020204020204" charset="-122"/>
               </a:rPr>
               <a:t>• ACO 给基础偏好，DDQN 只做状态相关校正。</a:t>
             </a:r>
+            <a:endParaRPr sz="1350">
+              <a:solidFill>
+                <a:srgbClr val="282828"/>
+              </a:solidFill>
+              <a:latin typeface="微软雅黑" panose="020B0503020204020204" charset="-122"/>
+            </a:endParaRPr>
           </a:p>
         </p:txBody>
       </p:sp>
@@ -7234,7 +7853,7 @@
           </a:fontRef>
         </p:style>
         <p:txBody>
-          <a:bodyPr rtlCol="0" anchor="ctr" wrap="square" lIns="127000" rIns="101600" tIns="76200" bIns="76200"/>
+          <a:bodyPr wrap="square" lIns="127000" tIns="76200" rIns="101600" bIns="76200" rtlCol="0" anchor="ctr"/>
           <a:lstStyle/>
           <a:p>
             <a:pPr algn="ctr"/>
@@ -7243,22 +7862,33 @@
                 <a:solidFill>
                   <a:srgbClr val="2F5597"/>
                 </a:solidFill>
-                <a:latin typeface="微软雅黑"/>
+                <a:latin typeface="微软雅黑" panose="020B0503020204020204" charset="-122"/>
               </a:rPr>
               <a:t>避免的问题</a:t>
             </a:r>
-          </a:p>
-          <a:p>
-            <a:pPr/>
+            <a:endParaRPr sz="1500" b="1">
+              <a:solidFill>
+                <a:srgbClr val="2F5597"/>
+              </a:solidFill>
+              <a:latin typeface="微软雅黑" panose="020B0503020204020204" charset="-122"/>
+            </a:endParaRPr>
+          </a:p>
+          <a:p>
             <a:r>
               <a:rPr sz="1350">
                 <a:solidFill>
                   <a:srgbClr val="282828"/>
                 </a:solidFill>
-                <a:latin typeface="微软雅黑"/>
+                <a:latin typeface="微软雅黑" panose="020B0503020204020204" charset="-122"/>
               </a:rPr>
               <a:t>• 避免被理解为“信息素 + 启发式 + Q 值”简单相加。</a:t>
             </a:r>
+            <a:endParaRPr sz="1350">
+              <a:solidFill>
+                <a:srgbClr val="282828"/>
+              </a:solidFill>
+              <a:latin typeface="微软雅黑" panose="020B0503020204020204" charset="-122"/>
+            </a:endParaRPr>
           </a:p>
         </p:txBody>
       </p:sp>
@@ -7287,165 +7917,6 @@
           <a:chExt cx="0" cy="0"/>
         </a:xfrm>
       </p:grpSpPr>
-      <mc:AlternateContent xmlns:mc="http://schemas.openxmlformats.org/markup-compatibility/2006">
-        <mc:Choice xmlns:a14="http://schemas.microsoft.com/office/drawing/2010/main" Requires="a14">
-          <p:sp>
-            <p:nvSpPr>
-              <p:cNvPr id="4" name="文本框 3"/>
-              <p:cNvSpPr txBox="1"/>
-              <p:nvPr/>
-            </p:nvSpPr>
-            <p:spPr>
-              <a:xfrm>
-                <a:off x="606425" y="2564130"/>
-                <a:ext cx="10627995" cy="1198880"/>
-              </a:xfrm>
-              <a:prstGeom prst="rect">
-                <a:avLst/>
-              </a:prstGeom>
-              <a:noFill/>
-            </p:spPr>
-            <p:txBody>
-              <a:bodyPr wrap="square" rtlCol="0">
-                <a:spAutoFit/>
-              </a:bodyPr>
-              <a:lstStyle/>
-              <a:p>
-                <a:r>
-                  <a:rPr lang="zh-CN" altLang="en-US"/>
-                  <a:t>快速插入：对于当前解 </a:t>
-                </a:r>
-                <a:r>
-                  <a:rPr lang="en-US" altLang="zh-CN"/>
-                  <a:t>X，</a:t>
-                </a:r>
-                <a:r>
-                  <a:rPr lang="zh-CN" altLang="en-US"/>
-                  <a:t>首先找出未调度任务对应的候选节点集合：</a:t>
-                </a:r>
-                <a:r>
-                  <a:rPr lang="en-US" altLang="zh-CN"/>
-                  <a:t>U = {v ∈ V | task(v) </a:t>
-                </a:r>
-                <a14:m>
-                  <m:oMath xmlns:m="http://schemas.openxmlformats.org/officeDocument/2006/math">
-                    <m:r>
-                      <a:rPr lang="en-US" altLang="zh-CN">
-                        <a:latin typeface="Cambria Math" panose="02040503050406030204" charset="0"/>
-                        <a:cs typeface="Cambria Math" panose="02040503050406030204" charset="0"/>
-                      </a:rPr>
-                      <m:t>∉</m:t>
-                    </m:r>
-                  </m:oMath>
-                </a14:m>
-                <a:r>
-                  <a:rPr lang="en-US" altLang="zh-CN"/>
-                  <a:t> task(X)}</a:t>
-                </a:r>
-                <a:r>
-                  <a:rPr lang="zh-CN" altLang="en-US"/>
-                  <a:t>；对每个候选节点 </a:t>
-                </a:r>
-                <a:r>
-                  <a:rPr lang="en-US" altLang="zh-CN"/>
-                  <a:t>v ∈ U ，</a:t>
-                </a:r>
-                <a:r>
-                  <a:rPr lang="zh-CN" altLang="en-US"/>
-                  <a:t>判断其是否可以直接插入当前解：</a:t>
-                </a:r>
-                <a:r>
-                  <a:rPr lang="en-US" altLang="zh-CN"/>
-                  <a:t>N (v) </a:t>
-                </a:r>
-                <a14:m>
-                  <m:oMath xmlns:m="http://schemas.openxmlformats.org/officeDocument/2006/math">
-                    <m:r>
-                      <a:rPr lang="en-US" altLang="zh-CN">
-                        <a:latin typeface="Cambria Math" panose="02040503050406030204" charset="0"/>
-                        <a:cs typeface="Cambria Math" panose="02040503050406030204" charset="0"/>
-                      </a:rPr>
-                      <m:t>∩</m:t>
-                    </m:r>
-                  </m:oMath>
-                </a14:m>
-                <a:r>
-                  <a:rPr lang="en-US" altLang="zh-CN"/>
-                  <a:t> X = </a:t>
-                </a:r>
-                <a14:m>
-                  <m:oMath xmlns:m="http://schemas.openxmlformats.org/officeDocument/2006/math">
-                    <m:r>
-                      <a:rPr lang="en-US" altLang="zh-CN">
-                        <a:latin typeface="Cambria Math" panose="02040503050406030204" charset="0"/>
-                        <a:cs typeface="Cambria Math" panose="02040503050406030204" charset="0"/>
-                      </a:rPr>
-                      <m:t>∅</m:t>
-                    </m:r>
-                  </m:oMath>
-                </a14:m>
-                <a:r>
-                  <a:rPr lang="en-US" altLang="zh-CN"/>
-                  <a:t> </a:t>
-                </a:r>
-                <a:r>
-                  <a:rPr lang="zh-CN" altLang="en-US"/>
-                  <a:t>若成立，则直接插入。</a:t>
-                </a:r>
-                <a:br>
-                  <a:rPr lang="zh-CN" altLang="en-US"/>
-                </a:br>
-                <a:br>
-                  <a:rPr lang="en-US" altLang="zh-CN"/>
-                </a:br>
-                <a:r>
-                  <a:rPr lang="zh-CN" altLang="en-US"/>
-                  <a:t>在插入前，要先对候选节点进行一个排序</a:t>
-                </a:r>
-                <a:endParaRPr lang="zh-CN" altLang="en-US"/>
-              </a:p>
-            </p:txBody>
-          </p:sp>
-        </mc:Choice>
-        <mc:Fallback>
-          <p:sp>
-            <p:nvSpPr>
-              <p:cNvPr id="4" name="文本框 3"/>
-              <p:cNvSpPr txBox="1">
-                <a:spLocks noRot="1" noChangeAspect="1" noMove="1" noResize="1" noEditPoints="1" noAdjustHandles="1" noChangeArrowheads="1" noChangeShapeType="1" noTextEdit="1"/>
-              </p:cNvSpPr>
-              <p:nvPr/>
-            </p:nvSpPr>
-            <p:spPr>
-              <a:xfrm>
-                <a:off x="606425" y="2564130"/>
-                <a:ext cx="10627995" cy="1198880"/>
-              </a:xfrm>
-              <a:prstGeom prst="rect">
-                <a:avLst/>
-              </a:prstGeom>
-              <a:blipFill rotWithShape="1">
-                <a:blip r:embed="rId2"/>
-                <a:stretch>
-                  <a:fillRect/>
-                </a:stretch>
-              </a:blipFill>
-            </p:spPr>
-            <p:txBody>
-              <a:bodyPr/>
-              <a:lstStyle/>
-              <a:p>
-                <a:r>
-                  <a:rPr lang="zh-CN" altLang="en-US">
-                    <a:noFill/>
-                  </a:rPr>
-                  <a:t> </a:t>
-                </a:r>
-              </a:p>
-            </p:txBody>
-          </p:sp>
-        </mc:Fallback>
-      </mc:AlternateContent>
       <p:sp>
         <p:nvSpPr>
           <p:cNvPr id="5" name="TextBox 4"/>
@@ -7473,10 +7944,16 @@
                 <a:solidFill>
                   <a:srgbClr val="2F5597"/>
                 </a:solidFill>
-                <a:latin typeface="微软雅黑"/>
+                <a:latin typeface="微软雅黑" panose="020B0503020204020204" charset="-122"/>
               </a:rPr>
               <a:t>DDQN 训练奖励：缩放即时构造奖励 + Pareto 终局奖励</a:t>
             </a:r>
+            <a:endParaRPr sz="2400" b="1">
+              <a:solidFill>
+                <a:srgbClr val="2F5597"/>
+              </a:solidFill>
+              <a:latin typeface="微软雅黑" panose="020B0503020204020204" charset="-122"/>
+            </a:endParaRPr>
           </a:p>
         </p:txBody>
       </p:sp>
@@ -7497,7 +7974,7 @@
           <a:noFill/>
         </p:spPr>
         <p:txBody>
-          <a:bodyPr wrap="square" lIns="50800" rIns="50800" tIns="38100" bIns="38100">
+          <a:bodyPr wrap="square" lIns="50800" tIns="38100" rIns="50800" bIns="38100">
             <a:spAutoFit/>
           </a:bodyPr>
           <a:lstStyle/>
@@ -7507,10 +7984,16 @@
                 <a:solidFill>
                   <a:srgbClr val="282828"/>
                 </a:solidFill>
-                <a:latin typeface="微软雅黑"/>
+                <a:latin typeface="微软雅黑" panose="020B0503020204020204" charset="-122"/>
               </a:rPr>
               <a:t>奖励不直接使用 HV。每步奖励评价当前动作的局部构造质量；最终奖励评价完整解是否进入 Pareto 档案。</a:t>
             </a:r>
+            <a:endParaRPr sz="1600" b="0">
+              <a:solidFill>
+                <a:srgbClr val="282828"/>
+              </a:solidFill>
+              <a:latin typeface="微软雅黑" panose="020B0503020204020204" charset="-122"/>
+            </a:endParaRPr>
           </a:p>
         </p:txBody>
       </p:sp>
@@ -7552,7 +8035,7 @@
           </a:fontRef>
         </p:style>
         <p:txBody>
-          <a:bodyPr rtlCol="0" anchor="ctr" wrap="square" lIns="63500" rIns="63500" tIns="38100" bIns="38100"/>
+          <a:bodyPr wrap="square" lIns="63500" tIns="38100" rIns="63500" bIns="38100" rtlCol="0" anchor="ctr"/>
           <a:lstStyle/>
           <a:p>
             <a:pPr algn="ctr"/>
@@ -7561,10 +8044,16 @@
                 <a:solidFill>
                   <a:srgbClr val="282828"/>
                 </a:solidFill>
-                <a:latin typeface="微软雅黑"/>
+                <a:latin typeface="微软雅黑" panose="020B0503020204020204" charset="-122"/>
               </a:rPr>
               <a:t>cₜ = 1/3(ΔProfit̂ − ΔManeuver̂ − ΔLoad̂) − 0.2·BlockPenalty(v)</a:t>
             </a:r>
+            <a:endParaRPr sz="1600" b="0">
+              <a:solidFill>
+                <a:srgbClr val="282828"/>
+              </a:solidFill>
+              <a:latin typeface="微软雅黑" panose="020B0503020204020204" charset="-122"/>
+            </a:endParaRPr>
           </a:p>
         </p:txBody>
       </p:sp>
@@ -7606,7 +8095,7 @@
           </a:fontRef>
         </p:style>
         <p:txBody>
-          <a:bodyPr rtlCol="0" anchor="ctr" wrap="square" lIns="127000" rIns="101600" tIns="76200" bIns="76200"/>
+          <a:bodyPr wrap="square" lIns="127000" tIns="76200" rIns="101600" bIns="76200" rtlCol="0" anchor="ctr"/>
           <a:lstStyle/>
           <a:p>
             <a:pPr algn="ctr"/>
@@ -7615,58 +8104,84 @@
                 <a:solidFill>
                   <a:srgbClr val="2F5597"/>
                 </a:solidFill>
-                <a:latin typeface="微软雅黑"/>
+                <a:latin typeface="微软雅黑" panose="020B0503020204020204" charset="-122"/>
               </a:rPr>
               <a:t>每步奖励评价什么</a:t>
             </a:r>
-          </a:p>
-          <a:p>
-            <a:pPr/>
+            <a:endParaRPr sz="1500" b="1">
+              <a:solidFill>
+                <a:srgbClr val="2F5597"/>
+              </a:solidFill>
+              <a:latin typeface="微软雅黑" panose="020B0503020204020204" charset="-122"/>
+            </a:endParaRPr>
+          </a:p>
+          <a:p>
             <a:r>
               <a:rPr sz="1350">
                 <a:solidFill>
                   <a:srgbClr val="282828"/>
                 </a:solidFill>
-                <a:latin typeface="微软雅黑"/>
+                <a:latin typeface="微软雅黑" panose="020B0503020204020204" charset="-122"/>
               </a:rPr>
               <a:t>• 收益提升：ΔProfit̂</a:t>
             </a:r>
-          </a:p>
-          <a:p>
-            <a:pPr/>
+            <a:endParaRPr sz="1350">
+              <a:solidFill>
+                <a:srgbClr val="282828"/>
+              </a:solidFill>
+              <a:latin typeface="微软雅黑" panose="020B0503020204020204" charset="-122"/>
+            </a:endParaRPr>
+          </a:p>
+          <a:p>
             <a:r>
               <a:rPr sz="1350">
                 <a:solidFill>
                   <a:srgbClr val="282828"/>
                 </a:solidFill>
-                <a:latin typeface="微软雅黑"/>
+                <a:latin typeface="微软雅黑" panose="020B0503020204020204" charset="-122"/>
               </a:rPr>
               <a:t>• 机动代价增加：ΔManeuver̂</a:t>
             </a:r>
-          </a:p>
-          <a:p>
-            <a:pPr/>
+            <a:endParaRPr sz="1350">
+              <a:solidFill>
+                <a:srgbClr val="282828"/>
+              </a:solidFill>
+              <a:latin typeface="微软雅黑" panose="020B0503020204020204" charset="-122"/>
+            </a:endParaRPr>
+          </a:p>
+          <a:p>
             <a:r>
               <a:rPr sz="1350">
                 <a:solidFill>
                   <a:srgbClr val="282828"/>
                 </a:solidFill>
-                <a:latin typeface="微软雅黑"/>
+                <a:latin typeface="微软雅黑" panose="020B0503020204020204" charset="-122"/>
               </a:rPr>
               <a:t>• 负载不均衡变化：ΔLoad̂</a:t>
             </a:r>
-          </a:p>
-          <a:p>
-            <a:pPr/>
+            <a:endParaRPr sz="1350">
+              <a:solidFill>
+                <a:srgbClr val="282828"/>
+              </a:solidFill>
+              <a:latin typeface="微软雅黑" panose="020B0503020204020204" charset="-122"/>
+            </a:endParaRPr>
+          </a:p>
+          <a:p>
             <a:r>
               <a:rPr sz="1350">
                 <a:solidFill>
                   <a:srgbClr val="282828"/>
                 </a:solidFill>
-                <a:latin typeface="微软雅黑"/>
+                <a:latin typeface="微软雅黑" panose="020B0503020204020204" charset="-122"/>
               </a:rPr>
               <a:t>• 选择该节点后屏蔽后续高收益节点的比例：BlockPenalty(v)</a:t>
             </a:r>
+            <a:endParaRPr sz="1350">
+              <a:solidFill>
+                <a:srgbClr val="282828"/>
+              </a:solidFill>
+              <a:latin typeface="微软雅黑" panose="020B0503020204020204" charset="-122"/>
+            </a:endParaRPr>
           </a:p>
         </p:txBody>
       </p:sp>
@@ -7708,7 +8223,7 @@
           </a:fontRef>
         </p:style>
         <p:txBody>
-          <a:bodyPr rtlCol="0" anchor="ctr" wrap="square" lIns="127000" rIns="101600" tIns="76200" bIns="76200"/>
+          <a:bodyPr wrap="square" lIns="127000" tIns="76200" rIns="101600" bIns="76200" rtlCol="0" anchor="ctr"/>
           <a:lstStyle/>
           <a:p>
             <a:pPr algn="ctr"/>
@@ -7717,46 +8232,67 @@
                 <a:solidFill>
                   <a:srgbClr val="2F5597"/>
                 </a:solidFill>
-                <a:latin typeface="微软雅黑"/>
+                <a:latin typeface="微软雅黑" panose="020B0503020204020204" charset="-122"/>
               </a:rPr>
               <a:t>为什么要缩放</a:t>
             </a:r>
-          </a:p>
-          <a:p>
-            <a:pPr/>
+            <a:endParaRPr sz="1500" b="1">
+              <a:solidFill>
+                <a:srgbClr val="2F5597"/>
+              </a:solidFill>
+              <a:latin typeface="微软雅黑" panose="020B0503020204020204" charset="-122"/>
+            </a:endParaRPr>
+          </a:p>
+          <a:p>
             <a:r>
               <a:rPr sz="1350">
                 <a:solidFill>
                   <a:srgbClr val="282828"/>
                 </a:solidFill>
-                <a:latin typeface="微软雅黑"/>
+                <a:latin typeface="微软雅黑" panose="020B0503020204020204" charset="-122"/>
               </a:rPr>
               <a:t>• 一个完整解通常需要多步构造。</a:t>
             </a:r>
-          </a:p>
-          <a:p>
-            <a:pPr/>
+            <a:endParaRPr sz="1350">
+              <a:solidFill>
+                <a:srgbClr val="282828"/>
+              </a:solidFill>
+              <a:latin typeface="微软雅黑" panose="020B0503020204020204" charset="-122"/>
+            </a:endParaRPr>
+          </a:p>
+          <a:p>
             <a:r>
               <a:rPr sz="1350">
                 <a:solidFill>
                   <a:srgbClr val="282828"/>
                 </a:solidFill>
-                <a:latin typeface="微软雅黑"/>
+                <a:latin typeface="微软雅黑" panose="020B0503020204020204" charset="-122"/>
               </a:rPr>
               <a:t>• 若每步奖励不缩放，累计即时奖励会淹没终局 Pareto 奖励。</a:t>
             </a:r>
-          </a:p>
-          <a:p>
-            <a:pPr/>
+            <a:endParaRPr sz="1350">
+              <a:solidFill>
+                <a:srgbClr val="282828"/>
+              </a:solidFill>
+              <a:latin typeface="微软雅黑" panose="020B0503020204020204" charset="-122"/>
+            </a:endParaRPr>
+          </a:p>
+          <a:p>
             <a:r>
               <a:rPr sz="1350">
                 <a:solidFill>
                   <a:srgbClr val="282828"/>
                 </a:solidFill>
-                <a:latin typeface="微软雅黑"/>
+                <a:latin typeface="微软雅黑" panose="020B0503020204020204" charset="-122"/>
               </a:rPr>
               <a:t>• Warm-up 阶段估计平均构造长度 Tref。</a:t>
             </a:r>
+            <a:endParaRPr sz="1350">
+              <a:solidFill>
+                <a:srgbClr val="282828"/>
+              </a:solidFill>
+              <a:latin typeface="微软雅黑" panose="020B0503020204020204" charset="-122"/>
+            </a:endParaRPr>
           </a:p>
         </p:txBody>
       </p:sp>
@@ -7798,7 +8334,7 @@
           </a:fontRef>
         </p:style>
         <p:txBody>
-          <a:bodyPr rtlCol="0" anchor="ctr" wrap="square" lIns="63500" rIns="63500" tIns="38100" bIns="38100"/>
+          <a:bodyPr wrap="square" lIns="63500" tIns="38100" rIns="63500" bIns="38100" rtlCol="0" anchor="ctr"/>
           <a:lstStyle/>
           <a:p>
             <a:pPr algn="ctr"/>
@@ -7807,10 +8343,16 @@
                 <a:solidFill>
                   <a:srgbClr val="282828"/>
                 </a:solidFill>
-                <a:latin typeface="微软雅黑"/>
+                <a:latin typeface="微软雅黑" panose="020B0503020204020204" charset="-122"/>
               </a:rPr>
               <a:t>rₜ = clip(cₜ,−1,1) / Tref</a:t>
             </a:r>
+            <a:endParaRPr sz="1700" b="0">
+              <a:solidFill>
+                <a:srgbClr val="282828"/>
+              </a:solidFill>
+              <a:latin typeface="微软雅黑" panose="020B0503020204020204" charset="-122"/>
+            </a:endParaRPr>
           </a:p>
         </p:txBody>
       </p:sp>
@@ -7852,7 +8394,7 @@
           </a:fontRef>
         </p:style>
         <p:txBody>
-          <a:bodyPr rtlCol="0" anchor="ctr" wrap="square" lIns="63500" rIns="63500" tIns="38100" bIns="38100"/>
+          <a:bodyPr wrap="square" lIns="63500" tIns="38100" rIns="63500" bIns="38100" rtlCol="0" anchor="ctr"/>
           <a:lstStyle/>
           <a:p>
             <a:pPr algn="ctr"/>
@@ -7861,10 +8403,16 @@
                 <a:solidFill>
                   <a:srgbClr val="282828"/>
                 </a:solidFill>
-                <a:latin typeface="微软雅黑"/>
+                <a:latin typeface="微软雅黑" panose="020B0503020204020204" charset="-122"/>
               </a:rPr>
               <a:t>rfinal = 1，若 X 进入 Pareto 档案；否则 0</a:t>
             </a:r>
+            <a:endParaRPr sz="1500" b="0">
+              <a:solidFill>
+                <a:srgbClr val="282828"/>
+              </a:solidFill>
+              <a:latin typeface="微软雅黑" panose="020B0503020204020204" charset="-122"/>
+            </a:endParaRPr>
           </a:p>
         </p:txBody>
       </p:sp>
@@ -7906,7 +8454,7 @@
           </a:fontRef>
         </p:style>
         <p:txBody>
-          <a:bodyPr rtlCol="0" anchor="ctr" wrap="square" lIns="63500" rIns="63500" tIns="38100" bIns="38100"/>
+          <a:bodyPr wrap="square" lIns="63500" tIns="38100" rIns="63500" bIns="38100" rtlCol="0" anchor="ctr"/>
           <a:lstStyle/>
           <a:p>
             <a:pPr algn="ctr"/>
@@ -7915,10 +8463,16 @@
                 <a:solidFill>
                   <a:srgbClr val="282828"/>
                 </a:solidFill>
-                <a:latin typeface="微软雅黑"/>
+                <a:latin typeface="微软雅黑" panose="020B0503020204020204" charset="-122"/>
               </a:rPr>
               <a:t>Rₜ = rₜ  (t&lt;T)，最后一步 R_T = r_T + rfinal</a:t>
             </a:r>
+            <a:endParaRPr sz="1700" b="0">
+              <a:solidFill>
+                <a:srgbClr val="282828"/>
+              </a:solidFill>
+              <a:latin typeface="微软雅黑" panose="020B0503020204020204" charset="-122"/>
+            </a:endParaRPr>
           </a:p>
         </p:txBody>
       </p:sp>
@@ -7939,14 +8493,7 @@
         <p:cNvGrpSpPr/>
         <p:nvPr/>
       </p:nvGrpSpPr>
-      <p:grpSpPr>
-        <a:xfrm>
-          <a:off x="0" y="0"/>
-          <a:ext cx="0" cy="0"/>
-          <a:chOff x="0" y="0"/>
-          <a:chExt cx="0" cy="0"/>
-        </a:xfrm>
-      </p:grpSpPr>
+      <p:grpSpPr/>
       <p:sp>
         <p:nvSpPr>
           <p:cNvPr id="2" name="TextBox 1"/>
@@ -7964,1009 +8511,81 @@
           <a:noFill/>
         </p:spPr>
         <p:txBody>
-          <a:bodyPr wrap="none">
+          <a:bodyPr wrap="square" lIns="0" tIns="0" rIns="0" bIns="0">
             <a:spAutoFit/>
           </a:bodyPr>
           <a:lstStyle/>
           <a:p>
-            <a:r>
-              <a:rPr sz="2400" b="1">
+            <a:pPr algn="l"/>
+            <a:r>
+              <a:rPr sz="2000" b="1">
                 <a:solidFill>
                   <a:srgbClr val="2F5597"/>
                 </a:solidFill>
-                <a:latin typeface="微软雅黑"/>
-              </a:rPr>
-              <a:t>算法整理流程</a:t>
-            </a:r>
-          </a:p>
-        </p:txBody>
-      </p:sp>
-      <p:sp>
-        <p:nvSpPr>
-          <p:cNvPr id="3" name="Rounded Rectangle 2"/>
+                <a:latin typeface="微软雅黑" panose="020B0503020204020204" charset="-122"/>
+              </a:rPr>
+              <a:t>DDQN 在线训练机制与阶段安排</a:t>
+            </a:r>
+            <a:endParaRPr sz="2000" b="1">
+              <a:solidFill>
+                <a:srgbClr val="2F5597"/>
+              </a:solidFill>
+              <a:latin typeface="微软雅黑" panose="020B0503020204020204" charset="-122"/>
+            </a:endParaRPr>
+          </a:p>
+        </p:txBody>
+      </p:sp>
+      <p:sp>
+        <p:nvSpPr>
+          <p:cNvPr id="3" name="TextBox 2"/>
+          <p:cNvSpPr txBox="1"/>
+          <p:nvPr/>
+        </p:nvSpPr>
+        <p:spPr>
+          <a:xfrm>
+            <a:off x="502920" y="868680"/>
+            <a:ext cx="10332720" cy="685800"/>
+          </a:xfrm>
+          <a:prstGeom prst="rect">
+            <a:avLst/>
+          </a:prstGeom>
+          <a:noFill/>
+        </p:spPr>
+        <p:txBody>
+          <a:bodyPr wrap="square" lIns="0" tIns="0" rIns="0" bIns="0">
+            <a:spAutoFit/>
+          </a:bodyPr>
+          <a:lstStyle/>
+          <a:p>
+            <a:pPr algn="l"/>
+            <a:r>
+              <a:rPr sz="1300" b="0">
+                <a:solidFill>
+                  <a:srgbClr val="282828"/>
+                </a:solidFill>
+                <a:latin typeface="微软雅黑" panose="020B0503020204020204" charset="-122"/>
+              </a:rPr>
+              <a:t>每只蚂蚁构造一个完整调度方案视为一个 episode。算法边构造解、边存储经验，并用 Replay Buffer 在线更新 MLP-DDQN；RL 的影响强度 κ 分阶段逐步增大。</a:t>
+            </a:r>
+            <a:endParaRPr sz="1300" b="0">
+              <a:solidFill>
+                <a:srgbClr val="282828"/>
+              </a:solidFill>
+              <a:latin typeface="微软雅黑" panose="020B0503020204020204" charset="-122"/>
+            </a:endParaRPr>
+          </a:p>
+        </p:txBody>
+      </p:sp>
+      <p:sp>
+        <p:nvSpPr>
+          <p:cNvPr id="4" name="Rounded Rectangle 3"/>
           <p:cNvSpPr/>
           <p:nvPr/>
         </p:nvSpPr>
         <p:spPr>
           <a:xfrm>
-            <a:off x="548640" y="960120"/>
-            <a:ext cx="411480" cy="411480"/>
-          </a:xfrm>
-          <a:prstGeom prst="roundRect">
-            <a:avLst/>
-          </a:prstGeom>
-          <a:solidFill>
-            <a:srgbClr val="2F5597"/>
-          </a:solidFill>
-          <a:ln w="12700">
-            <a:solidFill>
-              <a:srgbClr val="2F5597"/>
-            </a:solidFill>
-          </a:ln>
-        </p:spPr>
-        <p:style>
-          <a:lnRef idx="1">
-            <a:schemeClr val="accent1"/>
-          </a:lnRef>
-          <a:fillRef idx="3">
-            <a:schemeClr val="accent1"/>
-          </a:fillRef>
-          <a:effectRef idx="2">
-            <a:schemeClr val="accent1"/>
-          </a:effectRef>
-          <a:fontRef idx="minor">
-            <a:schemeClr val="lt1"/>
-          </a:fontRef>
-        </p:style>
-        <p:txBody>
-          <a:bodyPr rtlCol="0" anchor="ctr" wrap="square" lIns="63500" rIns="63500" tIns="38100" bIns="38100"/>
-          <a:lstStyle/>
-          <a:p>
-            <a:pPr algn="ctr"/>
-            <a:r>
-              <a:rPr sz="1400" b="1">
-                <a:solidFill>
-                  <a:srgbClr val="FFFFFF"/>
-                </a:solidFill>
-                <a:latin typeface="微软雅黑"/>
-              </a:rPr>
-              <a:t>1</a:t>
-            </a:r>
-          </a:p>
-        </p:txBody>
-      </p:sp>
-      <p:sp>
-        <p:nvSpPr>
-          <p:cNvPr id="4" name="TextBox 3"/>
-          <p:cNvSpPr txBox="1"/>
-          <p:nvPr/>
-        </p:nvSpPr>
-        <p:spPr>
-          <a:xfrm>
-            <a:off x="1097280" y="941832"/>
-            <a:ext cx="4572000" cy="256032"/>
-          </a:xfrm>
-          <a:prstGeom prst="rect">
-            <a:avLst/>
-          </a:prstGeom>
-          <a:noFill/>
-        </p:spPr>
-        <p:txBody>
-          <a:bodyPr wrap="square" lIns="50800" rIns="50800" tIns="38100" bIns="38100">
-            <a:spAutoFit/>
-          </a:bodyPr>
-          <a:lstStyle/>
-          <a:p>
-            <a:r>
-              <a:rPr sz="1400" b="1">
-                <a:solidFill>
-                  <a:srgbClr val="2F5597"/>
-                </a:solidFill>
-                <a:latin typeface="微软雅黑"/>
-              </a:rPr>
-              <a:t>生成三元候选节点 V</a:t>
-            </a:r>
-          </a:p>
-        </p:txBody>
-      </p:sp>
-      <p:sp>
-        <p:nvSpPr>
-          <p:cNvPr id="5" name="TextBox 4"/>
-          <p:cNvSpPr txBox="1"/>
-          <p:nvPr/>
-        </p:nvSpPr>
-        <p:spPr>
-          <a:xfrm>
-            <a:off x="1097280" y="1280160"/>
-            <a:ext cx="4754880" cy="566928"/>
-          </a:xfrm>
-          <a:prstGeom prst="rect">
-            <a:avLst/>
-          </a:prstGeom>
-          <a:noFill/>
-        </p:spPr>
-        <p:txBody>
-          <a:bodyPr wrap="square" lIns="50800" rIns="50800" tIns="38100" bIns="38100">
-            <a:spAutoFit/>
-          </a:bodyPr>
-          <a:lstStyle/>
-          <a:p>
-            <a:r>
-              <a:rPr sz="1200" b="0">
-                <a:solidFill>
-                  <a:srgbClr val="282828"/>
-                </a:solidFill>
-                <a:latin typeface="微软雅黑"/>
-              </a:rPr>
-              <a:t>task / satellite / window → vⱼᵢₖ</a:t>
-            </a:r>
-          </a:p>
-        </p:txBody>
-      </p:sp>
-      <p:sp>
-        <p:nvSpPr>
-          <p:cNvPr id="6" name="Rounded Rectangle 5"/>
-          <p:cNvSpPr/>
-          <p:nvPr/>
-        </p:nvSpPr>
-        <p:spPr>
-          <a:xfrm>
-            <a:off x="548640" y="2103120"/>
-            <a:ext cx="411480" cy="411480"/>
-          </a:xfrm>
-          <a:prstGeom prst="roundRect">
-            <a:avLst/>
-          </a:prstGeom>
-          <a:solidFill>
-            <a:srgbClr val="2F5597"/>
-          </a:solidFill>
-          <a:ln w="12700">
-            <a:solidFill>
-              <a:srgbClr val="2F5597"/>
-            </a:solidFill>
-          </a:ln>
-        </p:spPr>
-        <p:style>
-          <a:lnRef idx="1">
-            <a:schemeClr val="accent1"/>
-          </a:lnRef>
-          <a:fillRef idx="3">
-            <a:schemeClr val="accent1"/>
-          </a:fillRef>
-          <a:effectRef idx="2">
-            <a:schemeClr val="accent1"/>
-          </a:effectRef>
-          <a:fontRef idx="minor">
-            <a:schemeClr val="lt1"/>
-          </a:fontRef>
-        </p:style>
-        <p:txBody>
-          <a:bodyPr rtlCol="0" anchor="ctr" wrap="square" lIns="63500" rIns="63500" tIns="38100" bIns="38100"/>
-          <a:lstStyle/>
-          <a:p>
-            <a:pPr algn="ctr"/>
-            <a:r>
-              <a:rPr sz="1400" b="1">
-                <a:solidFill>
-                  <a:srgbClr val="FFFFFF"/>
-                </a:solidFill>
-                <a:latin typeface="微软雅黑"/>
-              </a:rPr>
-              <a:t>2</a:t>
-            </a:r>
-          </a:p>
-        </p:txBody>
-      </p:sp>
-      <p:sp>
-        <p:nvSpPr>
-          <p:cNvPr id="7" name="TextBox 6"/>
-          <p:cNvSpPr txBox="1"/>
-          <p:nvPr/>
-        </p:nvSpPr>
-        <p:spPr>
-          <a:xfrm>
-            <a:off x="1097280" y="2084831"/>
-            <a:ext cx="4572000" cy="256032"/>
-          </a:xfrm>
-          <a:prstGeom prst="rect">
-            <a:avLst/>
-          </a:prstGeom>
-          <a:noFill/>
-        </p:spPr>
-        <p:txBody>
-          <a:bodyPr wrap="square" lIns="50800" rIns="50800" tIns="38100" bIns="38100">
-            <a:spAutoFit/>
-          </a:bodyPr>
-          <a:lstStyle/>
-          <a:p>
-            <a:r>
-              <a:rPr sz="1400" b="1">
-                <a:solidFill>
-                  <a:srgbClr val="2F5597"/>
-                </a:solidFill>
-                <a:latin typeface="微软雅黑"/>
-              </a:rPr>
-              <a:t>构建冲突图 G=(V,E)</a:t>
-            </a:r>
-          </a:p>
-        </p:txBody>
-      </p:sp>
-      <p:sp>
-        <p:nvSpPr>
-          <p:cNvPr id="8" name="TextBox 7"/>
-          <p:cNvSpPr txBox="1"/>
-          <p:nvPr/>
-        </p:nvSpPr>
-        <p:spPr>
-          <a:xfrm>
-            <a:off x="1097280" y="2423160"/>
-            <a:ext cx="4754880" cy="566928"/>
-          </a:xfrm>
-          <a:prstGeom prst="rect">
-            <a:avLst/>
-          </a:prstGeom>
-          <a:noFill/>
-        </p:spPr>
-        <p:txBody>
-          <a:bodyPr wrap="square" lIns="50800" rIns="50800" tIns="38100" bIns="38100">
-            <a:spAutoFit/>
-          </a:bodyPr>
-          <a:lstStyle/>
-          <a:p>
-            <a:r>
-              <a:rPr sz="1200" b="0">
-                <a:solidFill>
-                  <a:srgbClr val="282828"/>
-                </a:solidFill>
-                <a:latin typeface="微软雅黑"/>
-              </a:rPr>
-              <a:t>任务重复、窗口重叠、姿态转移不足连边</a:t>
-            </a:r>
-          </a:p>
-        </p:txBody>
-      </p:sp>
-      <p:sp>
-        <p:nvSpPr>
-          <p:cNvPr id="9" name="Rounded Rectangle 8"/>
-          <p:cNvSpPr/>
-          <p:nvPr/>
-        </p:nvSpPr>
-        <p:spPr>
-          <a:xfrm>
-            <a:off x="548640" y="3246120"/>
-            <a:ext cx="411480" cy="411480"/>
-          </a:xfrm>
-          <a:prstGeom prst="roundRect">
-            <a:avLst/>
-          </a:prstGeom>
-          <a:solidFill>
-            <a:srgbClr val="2F5597"/>
-          </a:solidFill>
-          <a:ln w="12700">
-            <a:solidFill>
-              <a:srgbClr val="2F5597"/>
-            </a:solidFill>
-          </a:ln>
-        </p:spPr>
-        <p:style>
-          <a:lnRef idx="1">
-            <a:schemeClr val="accent1"/>
-          </a:lnRef>
-          <a:fillRef idx="3">
-            <a:schemeClr val="accent1"/>
-          </a:fillRef>
-          <a:effectRef idx="2">
-            <a:schemeClr val="accent1"/>
-          </a:effectRef>
-          <a:fontRef idx="minor">
-            <a:schemeClr val="lt1"/>
-          </a:fontRef>
-        </p:style>
-        <p:txBody>
-          <a:bodyPr rtlCol="0" anchor="ctr" wrap="square" lIns="63500" rIns="63500" tIns="38100" bIns="38100"/>
-          <a:lstStyle/>
-          <a:p>
-            <a:pPr algn="ctr"/>
-            <a:r>
-              <a:rPr sz="1400" b="1">
-                <a:solidFill>
-                  <a:srgbClr val="FFFFFF"/>
-                </a:solidFill>
-                <a:latin typeface="微软雅黑"/>
-              </a:rPr>
-              <a:t>3</a:t>
-            </a:r>
-          </a:p>
-        </p:txBody>
-      </p:sp>
-      <p:sp>
-        <p:nvSpPr>
-          <p:cNvPr id="10" name="TextBox 9"/>
-          <p:cNvSpPr txBox="1"/>
-          <p:nvPr/>
-        </p:nvSpPr>
-        <p:spPr>
-          <a:xfrm>
-            <a:off x="1097280" y="3227832"/>
-            <a:ext cx="4572000" cy="256032"/>
-          </a:xfrm>
-          <a:prstGeom prst="rect">
-            <a:avLst/>
-          </a:prstGeom>
-          <a:noFill/>
-        </p:spPr>
-        <p:txBody>
-          <a:bodyPr wrap="square" lIns="50800" rIns="50800" tIns="38100" bIns="38100">
-            <a:spAutoFit/>
-          </a:bodyPr>
-          <a:lstStyle/>
-          <a:p>
-            <a:r>
-              <a:rPr sz="1400" b="1">
-                <a:solidFill>
-                  <a:srgbClr val="2F5597"/>
-                </a:solidFill>
-                <a:latin typeface="微软雅黑"/>
-              </a:rPr>
-              <a:t>初始化 MOACO 与 DDQN</a:t>
-            </a:r>
-          </a:p>
-        </p:txBody>
-      </p:sp>
-      <p:sp>
-        <p:nvSpPr>
-          <p:cNvPr id="11" name="TextBox 10"/>
-          <p:cNvSpPr txBox="1"/>
-          <p:nvPr/>
-        </p:nvSpPr>
-        <p:spPr>
-          <a:xfrm>
-            <a:off x="1097280" y="3566160"/>
-            <a:ext cx="4754880" cy="566928"/>
-          </a:xfrm>
-          <a:prstGeom prst="rect">
-            <a:avLst/>
-          </a:prstGeom>
-          <a:noFill/>
-        </p:spPr>
-        <p:txBody>
-          <a:bodyPr wrap="square" lIns="50800" rIns="50800" tIns="38100" bIns="38100">
-            <a:spAutoFit/>
-          </a:bodyPr>
-          <a:lstStyle/>
-          <a:p>
-            <a:r>
-              <a:rPr sz="1200" b="0">
-                <a:solidFill>
-                  <a:srgbClr val="282828"/>
-                </a:solidFill>
-                <a:latin typeface="微软雅黑"/>
-              </a:rPr>
-              <a:t>τ(v)、η(v)、Pareto 档案、MLP-DDQN、Replay Buffer</a:t>
-            </a:r>
-          </a:p>
-        </p:txBody>
-      </p:sp>
-      <p:sp>
-        <p:nvSpPr>
-          <p:cNvPr id="12" name="Rounded Rectangle 11"/>
-          <p:cNvSpPr/>
-          <p:nvPr/>
-        </p:nvSpPr>
-        <p:spPr>
-          <a:xfrm>
-            <a:off x="548640" y="4389120"/>
-            <a:ext cx="411480" cy="411480"/>
-          </a:xfrm>
-          <a:prstGeom prst="roundRect">
-            <a:avLst/>
-          </a:prstGeom>
-          <a:solidFill>
-            <a:srgbClr val="2F5597"/>
-          </a:solidFill>
-          <a:ln w="12700">
-            <a:solidFill>
-              <a:srgbClr val="2F5597"/>
-            </a:solidFill>
-          </a:ln>
-        </p:spPr>
-        <p:style>
-          <a:lnRef idx="1">
-            <a:schemeClr val="accent1"/>
-          </a:lnRef>
-          <a:fillRef idx="3">
-            <a:schemeClr val="accent1"/>
-          </a:fillRef>
-          <a:effectRef idx="2">
-            <a:schemeClr val="accent1"/>
-          </a:effectRef>
-          <a:fontRef idx="minor">
-            <a:schemeClr val="lt1"/>
-          </a:fontRef>
-        </p:style>
-        <p:txBody>
-          <a:bodyPr rtlCol="0" anchor="ctr" wrap="square" lIns="63500" rIns="63500" tIns="38100" bIns="38100"/>
-          <a:lstStyle/>
-          <a:p>
-            <a:pPr algn="ctr"/>
-            <a:r>
-              <a:rPr sz="1400" b="1">
-                <a:solidFill>
-                  <a:srgbClr val="FFFFFF"/>
-                </a:solidFill>
-                <a:latin typeface="微软雅黑"/>
-              </a:rPr>
-              <a:t>4</a:t>
-            </a:r>
-          </a:p>
-        </p:txBody>
-      </p:sp>
-      <p:sp>
-        <p:nvSpPr>
-          <p:cNvPr id="13" name="TextBox 12"/>
-          <p:cNvSpPr txBox="1"/>
-          <p:nvPr/>
-        </p:nvSpPr>
-        <p:spPr>
-          <a:xfrm>
-            <a:off x="1097280" y="4370832"/>
-            <a:ext cx="4572000" cy="256032"/>
-          </a:xfrm>
-          <a:prstGeom prst="rect">
-            <a:avLst/>
-          </a:prstGeom>
-          <a:noFill/>
-        </p:spPr>
-        <p:txBody>
-          <a:bodyPr wrap="square" lIns="50800" rIns="50800" tIns="38100" bIns="38100">
-            <a:spAutoFit/>
-          </a:bodyPr>
-          <a:lstStyle/>
-          <a:p>
-            <a:r>
-              <a:rPr sz="1400" b="1">
-                <a:solidFill>
-                  <a:srgbClr val="2F5597"/>
-                </a:solidFill>
-                <a:latin typeface="微软雅黑"/>
-              </a:rPr>
-              <a:t>Warm-up 阶段</a:t>
-            </a:r>
-          </a:p>
-        </p:txBody>
-      </p:sp>
-      <p:sp>
-        <p:nvSpPr>
-          <p:cNvPr id="14" name="TextBox 13"/>
-          <p:cNvSpPr txBox="1"/>
-          <p:nvPr/>
-        </p:nvSpPr>
-        <p:spPr>
-          <a:xfrm>
-            <a:off x="1097280" y="4709159"/>
-            <a:ext cx="4754880" cy="566928"/>
-          </a:xfrm>
-          <a:prstGeom prst="rect">
-            <a:avLst/>
-          </a:prstGeom>
-          <a:noFill/>
-        </p:spPr>
-        <p:txBody>
-          <a:bodyPr wrap="square" lIns="50800" rIns="50800" tIns="38100" bIns="38100">
-            <a:spAutoFit/>
-          </a:bodyPr>
-          <a:lstStyle/>
-          <a:p>
-            <a:r>
-              <a:rPr sz="1200" b="0">
-                <a:solidFill>
-                  <a:srgbClr val="282828"/>
-                </a:solidFill>
-                <a:latin typeface="微软雅黑"/>
-              </a:rPr>
-              <a:t>只用 τ+η 构造解，统计 Tref，收集原始轨迹</a:t>
-            </a:r>
-          </a:p>
-        </p:txBody>
-      </p:sp>
-      <p:sp>
-        <p:nvSpPr>
-          <p:cNvPr id="15" name="Rounded Rectangle 14"/>
-          <p:cNvSpPr/>
-          <p:nvPr/>
-        </p:nvSpPr>
-        <p:spPr>
-          <a:xfrm>
-            <a:off x="5943600" y="960120"/>
-            <a:ext cx="411480" cy="411480"/>
-          </a:xfrm>
-          <a:prstGeom prst="roundRect">
-            <a:avLst/>
-          </a:prstGeom>
-          <a:solidFill>
-            <a:srgbClr val="2F5597"/>
-          </a:solidFill>
-          <a:ln w="12700">
-            <a:solidFill>
-              <a:srgbClr val="2F5597"/>
-            </a:solidFill>
-          </a:ln>
-        </p:spPr>
-        <p:style>
-          <a:lnRef idx="1">
-            <a:schemeClr val="accent1"/>
-          </a:lnRef>
-          <a:fillRef idx="3">
-            <a:schemeClr val="accent1"/>
-          </a:fillRef>
-          <a:effectRef idx="2">
-            <a:schemeClr val="accent1"/>
-          </a:effectRef>
-          <a:fontRef idx="minor">
-            <a:schemeClr val="lt1"/>
-          </a:fontRef>
-        </p:style>
-        <p:txBody>
-          <a:bodyPr rtlCol="0" anchor="ctr" wrap="square" lIns="63500" rIns="63500" tIns="38100" bIns="38100"/>
-          <a:lstStyle/>
-          <a:p>
-            <a:pPr algn="ctr"/>
-            <a:r>
-              <a:rPr sz="1400" b="1">
-                <a:solidFill>
-                  <a:srgbClr val="FFFFFF"/>
-                </a:solidFill>
-                <a:latin typeface="微软雅黑"/>
-              </a:rPr>
-              <a:t>5</a:t>
-            </a:r>
-          </a:p>
-        </p:txBody>
-      </p:sp>
-      <p:sp>
-        <p:nvSpPr>
-          <p:cNvPr id="16" name="TextBox 15"/>
-          <p:cNvSpPr txBox="1"/>
-          <p:nvPr/>
-        </p:nvSpPr>
-        <p:spPr>
-          <a:xfrm>
-            <a:off x="6492240" y="941832"/>
-            <a:ext cx="4572000" cy="256032"/>
-          </a:xfrm>
-          <a:prstGeom prst="rect">
-            <a:avLst/>
-          </a:prstGeom>
-          <a:noFill/>
-        </p:spPr>
-        <p:txBody>
-          <a:bodyPr wrap="square" lIns="50800" rIns="50800" tIns="38100" bIns="38100">
-            <a:spAutoFit/>
-          </a:bodyPr>
-          <a:lstStyle/>
-          <a:p>
-            <a:r>
-              <a:rPr sz="1400" b="1">
-                <a:solidFill>
-                  <a:srgbClr val="2F5597"/>
-                </a:solidFill>
-                <a:latin typeface="微软雅黑"/>
-              </a:rPr>
-              <a:t>冲突图动作掩码</a:t>
-            </a:r>
-          </a:p>
-        </p:txBody>
-      </p:sp>
-      <p:sp>
-        <p:nvSpPr>
-          <p:cNvPr id="17" name="TextBox 16"/>
-          <p:cNvSpPr txBox="1"/>
-          <p:nvPr/>
-        </p:nvSpPr>
-        <p:spPr>
-          <a:xfrm>
-            <a:off x="6492240" y="1280160"/>
-            <a:ext cx="4754880" cy="566928"/>
-          </a:xfrm>
-          <a:prstGeom prst="rect">
-            <a:avLst/>
-          </a:prstGeom>
-          <a:noFill/>
-        </p:spPr>
-        <p:txBody>
-          <a:bodyPr wrap="square" lIns="50800" rIns="50800" tIns="38100" bIns="38100">
-            <a:spAutoFit/>
-          </a:bodyPr>
-          <a:lstStyle/>
-          <a:p>
-            <a:r>
-              <a:rPr sz="1200" b="0">
-                <a:solidFill>
-                  <a:srgbClr val="282828"/>
-                </a:solidFill>
-                <a:latin typeface="微软雅黑"/>
-              </a:rPr>
-              <a:t>根据 Aₜ={v|N(v)∩Xₜ=∅} 得到当前可选节点</a:t>
-            </a:r>
-          </a:p>
-        </p:txBody>
-      </p:sp>
-      <p:sp>
-        <p:nvSpPr>
-          <p:cNvPr id="18" name="Rounded Rectangle 17"/>
-          <p:cNvSpPr/>
-          <p:nvPr/>
-        </p:nvSpPr>
-        <p:spPr>
-          <a:xfrm>
-            <a:off x="5943600" y="2103120"/>
-            <a:ext cx="411480" cy="411480"/>
-          </a:xfrm>
-          <a:prstGeom prst="roundRect">
-            <a:avLst/>
-          </a:prstGeom>
-          <a:solidFill>
-            <a:srgbClr val="2F5597"/>
-          </a:solidFill>
-          <a:ln w="12700">
-            <a:solidFill>
-              <a:srgbClr val="2F5597"/>
-            </a:solidFill>
-          </a:ln>
-        </p:spPr>
-        <p:style>
-          <a:lnRef idx="1">
-            <a:schemeClr val="accent1"/>
-          </a:lnRef>
-          <a:fillRef idx="3">
-            <a:schemeClr val="accent1"/>
-          </a:fillRef>
-          <a:effectRef idx="2">
-            <a:schemeClr val="accent1"/>
-          </a:effectRef>
-          <a:fontRef idx="minor">
-            <a:schemeClr val="lt1"/>
-          </a:fontRef>
-        </p:style>
-        <p:txBody>
-          <a:bodyPr rtlCol="0" anchor="ctr" wrap="square" lIns="63500" rIns="63500" tIns="38100" bIns="38100"/>
-          <a:lstStyle/>
-          <a:p>
-            <a:pPr algn="ctr"/>
-            <a:r>
-              <a:rPr sz="1400" b="1">
-                <a:solidFill>
-                  <a:srgbClr val="FFFFFF"/>
-                </a:solidFill>
-                <a:latin typeface="微软雅黑"/>
-              </a:rPr>
-              <a:t>6</a:t>
-            </a:r>
-          </a:p>
-        </p:txBody>
-      </p:sp>
-      <p:sp>
-        <p:nvSpPr>
-          <p:cNvPr id="19" name="TextBox 18"/>
-          <p:cNvSpPr txBox="1"/>
-          <p:nvPr/>
-        </p:nvSpPr>
-        <p:spPr>
-          <a:xfrm>
-            <a:off x="6492240" y="2084831"/>
-            <a:ext cx="4572000" cy="256032"/>
-          </a:xfrm>
-          <a:prstGeom prst="rect">
-            <a:avLst/>
-          </a:prstGeom>
-          <a:noFill/>
-        </p:spPr>
-        <p:txBody>
-          <a:bodyPr wrap="square" lIns="50800" rIns="50800" tIns="38100" bIns="38100">
-            <a:spAutoFit/>
-          </a:bodyPr>
-          <a:lstStyle/>
-          <a:p>
-            <a:r>
-              <a:rPr sz="1400" b="1">
-                <a:solidFill>
-                  <a:srgbClr val="2F5597"/>
-                </a:solidFill>
-                <a:latin typeface="微软雅黑"/>
-              </a:rPr>
-              <a:t>DDQN 计算节点 Q 值</a:t>
-            </a:r>
-          </a:p>
-        </p:txBody>
-      </p:sp>
-      <p:sp>
-        <p:nvSpPr>
-          <p:cNvPr id="20" name="TextBox 19"/>
-          <p:cNvSpPr txBox="1"/>
-          <p:nvPr/>
-        </p:nvSpPr>
-        <p:spPr>
-          <a:xfrm>
-            <a:off x="6492240" y="2423160"/>
-            <a:ext cx="4754880" cy="566928"/>
-          </a:xfrm>
-          <a:prstGeom prst="rect">
-            <a:avLst/>
-          </a:prstGeom>
-          <a:noFill/>
-        </p:spPr>
-        <p:txBody>
-          <a:bodyPr wrap="square" lIns="50800" rIns="50800" tIns="38100" bIns="38100">
-            <a:spAutoFit/>
-          </a:bodyPr>
-          <a:lstStyle/>
-          <a:p>
-            <a:r>
-              <a:rPr sz="1200" b="0">
-                <a:solidFill>
-                  <a:srgbClr val="282828"/>
-                </a:solidFill>
-                <a:latin typeface="微软雅黑"/>
-              </a:rPr>
-              <a:t>Qθ(sₜ,v)=MLP([gₜ,h(v)])，并计算 Advθ(sₜ,v)</a:t>
-            </a:r>
-          </a:p>
-        </p:txBody>
-      </p:sp>
-      <p:sp>
-        <p:nvSpPr>
-          <p:cNvPr id="21" name="Rounded Rectangle 20"/>
-          <p:cNvSpPr/>
-          <p:nvPr/>
-        </p:nvSpPr>
-        <p:spPr>
-          <a:xfrm>
-            <a:off x="5943600" y="3246120"/>
-            <a:ext cx="411480" cy="411480"/>
-          </a:xfrm>
-          <a:prstGeom prst="roundRect">
-            <a:avLst/>
-          </a:prstGeom>
-          <a:solidFill>
-            <a:srgbClr val="2F5597"/>
-          </a:solidFill>
-          <a:ln w="12700">
-            <a:solidFill>
-              <a:srgbClr val="2F5597"/>
-            </a:solidFill>
-          </a:ln>
-        </p:spPr>
-        <p:style>
-          <a:lnRef idx="1">
-            <a:schemeClr val="accent1"/>
-          </a:lnRef>
-          <a:fillRef idx="3">
-            <a:schemeClr val="accent1"/>
-          </a:fillRef>
-          <a:effectRef idx="2">
-            <a:schemeClr val="accent1"/>
-          </a:effectRef>
-          <a:fontRef idx="minor">
-            <a:schemeClr val="lt1"/>
-          </a:fontRef>
-        </p:style>
-        <p:txBody>
-          <a:bodyPr rtlCol="0" anchor="ctr" wrap="square" lIns="63500" rIns="63500" tIns="38100" bIns="38100"/>
-          <a:lstStyle/>
-          <a:p>
-            <a:pPr algn="ctr"/>
-            <a:r>
-              <a:rPr sz="1400" b="1">
-                <a:solidFill>
-                  <a:srgbClr val="FFFFFF"/>
-                </a:solidFill>
-                <a:latin typeface="微软雅黑"/>
-              </a:rPr>
-              <a:t>7</a:t>
-            </a:r>
-          </a:p>
-        </p:txBody>
-      </p:sp>
-      <p:sp>
-        <p:nvSpPr>
-          <p:cNvPr id="22" name="TextBox 21"/>
-          <p:cNvSpPr txBox="1"/>
-          <p:nvPr/>
-        </p:nvSpPr>
-        <p:spPr>
-          <a:xfrm>
-            <a:off x="6492240" y="3227832"/>
-            <a:ext cx="4572000" cy="256032"/>
-          </a:xfrm>
-          <a:prstGeom prst="rect">
-            <a:avLst/>
-          </a:prstGeom>
-          <a:noFill/>
-        </p:spPr>
-        <p:txBody>
-          <a:bodyPr wrap="square" lIns="50800" rIns="50800" tIns="38100" bIns="38100">
-            <a:spAutoFit/>
-          </a:bodyPr>
-          <a:lstStyle/>
-          <a:p>
-            <a:r>
-              <a:rPr sz="1400" b="1">
-                <a:solidFill>
-                  <a:srgbClr val="2F5597"/>
-                </a:solidFill>
-                <a:latin typeface="微软雅黑"/>
-              </a:rPr>
-              <a:t>状态感知节点选择</a:t>
-            </a:r>
-          </a:p>
-        </p:txBody>
-      </p:sp>
-      <p:sp>
-        <p:nvSpPr>
-          <p:cNvPr id="23" name="TextBox 22"/>
-          <p:cNvSpPr txBox="1"/>
-          <p:nvPr/>
-        </p:nvSpPr>
-        <p:spPr>
-          <a:xfrm>
-            <a:off x="6492240" y="3566160"/>
-            <a:ext cx="4754880" cy="566928"/>
-          </a:xfrm>
-          <a:prstGeom prst="rect">
-            <a:avLst/>
-          </a:prstGeom>
-          <a:noFill/>
-        </p:spPr>
-        <p:txBody>
-          <a:bodyPr wrap="square" lIns="50800" rIns="50800" tIns="38100" bIns="38100">
-            <a:spAutoFit/>
-          </a:bodyPr>
-          <a:lstStyle/>
-          <a:p>
-            <a:r>
-              <a:rPr sz="1200" b="0">
-                <a:solidFill>
-                  <a:srgbClr val="282828"/>
-                </a:solidFill>
-                <a:latin typeface="微软雅黑"/>
-              </a:rPr>
-              <a:t>P(v|sₜ) ∝ τ(v)^α η(v)^β exp(κAdvθ(sₜ,v))</a:t>
-            </a:r>
-          </a:p>
-        </p:txBody>
-      </p:sp>
-      <p:sp>
-        <p:nvSpPr>
-          <p:cNvPr id="24" name="Rounded Rectangle 23"/>
-          <p:cNvSpPr/>
-          <p:nvPr/>
-        </p:nvSpPr>
-        <p:spPr>
-          <a:xfrm>
-            <a:off x="5943600" y="4389120"/>
-            <a:ext cx="411480" cy="411480"/>
-          </a:xfrm>
-          <a:prstGeom prst="roundRect">
-            <a:avLst/>
-          </a:prstGeom>
-          <a:solidFill>
-            <a:srgbClr val="2F5597"/>
-          </a:solidFill>
-          <a:ln w="12700">
-            <a:solidFill>
-              <a:srgbClr val="2F5597"/>
-            </a:solidFill>
-          </a:ln>
-        </p:spPr>
-        <p:style>
-          <a:lnRef idx="1">
-            <a:schemeClr val="accent1"/>
-          </a:lnRef>
-          <a:fillRef idx="3">
-            <a:schemeClr val="accent1"/>
-          </a:fillRef>
-          <a:effectRef idx="2">
-            <a:schemeClr val="accent1"/>
-          </a:effectRef>
-          <a:fontRef idx="minor">
-            <a:schemeClr val="lt1"/>
-          </a:fontRef>
-        </p:style>
-        <p:txBody>
-          <a:bodyPr rtlCol="0" anchor="ctr" wrap="square" lIns="63500" rIns="63500" tIns="38100" bIns="38100"/>
-          <a:lstStyle/>
-          <a:p>
-            <a:pPr algn="ctr"/>
-            <a:r>
-              <a:rPr sz="1400" b="1">
-                <a:solidFill>
-                  <a:srgbClr val="FFFFFF"/>
-                </a:solidFill>
-                <a:latin typeface="微软雅黑"/>
-              </a:rPr>
-              <a:t>8</a:t>
-            </a:r>
-          </a:p>
-        </p:txBody>
-      </p:sp>
-      <p:sp>
-        <p:nvSpPr>
-          <p:cNvPr id="25" name="TextBox 24"/>
-          <p:cNvSpPr txBox="1"/>
-          <p:nvPr/>
-        </p:nvSpPr>
-        <p:spPr>
-          <a:xfrm>
-            <a:off x="6492240" y="4370832"/>
-            <a:ext cx="4572000" cy="256032"/>
-          </a:xfrm>
-          <a:prstGeom prst="rect">
-            <a:avLst/>
-          </a:prstGeom>
-          <a:noFill/>
-        </p:spPr>
-        <p:txBody>
-          <a:bodyPr wrap="square" lIns="50800" rIns="50800" tIns="38100" bIns="38100">
-            <a:spAutoFit/>
-          </a:bodyPr>
-          <a:lstStyle/>
-          <a:p>
-            <a:r>
-              <a:rPr sz="1400" b="1">
-                <a:solidFill>
-                  <a:srgbClr val="2F5597"/>
-                </a:solidFill>
-                <a:latin typeface="微软雅黑"/>
-              </a:rPr>
-              <a:t>奖励、档案与信息素更新</a:t>
-            </a:r>
-          </a:p>
-        </p:txBody>
-      </p:sp>
-      <p:sp>
-        <p:nvSpPr>
-          <p:cNvPr id="26" name="TextBox 25"/>
-          <p:cNvSpPr txBox="1"/>
-          <p:nvPr/>
-        </p:nvSpPr>
-        <p:spPr>
-          <a:xfrm>
-            <a:off x="6492240" y="4709159"/>
-            <a:ext cx="4754880" cy="566928"/>
-          </a:xfrm>
-          <a:prstGeom prst="rect">
-            <a:avLst/>
-          </a:prstGeom>
-          <a:noFill/>
-        </p:spPr>
-        <p:txBody>
-          <a:bodyPr wrap="square" lIns="50800" rIns="50800" tIns="38100" bIns="38100">
-            <a:spAutoFit/>
-          </a:bodyPr>
-          <a:lstStyle/>
-          <a:p>
-            <a:r>
-              <a:rPr sz="1200" b="0">
-                <a:solidFill>
-                  <a:srgbClr val="282828"/>
-                </a:solidFill>
-                <a:latin typeface="微软雅黑"/>
-              </a:rPr>
-              <a:t>缩放即时奖励 + Pareto 终局奖励；更新 Archive 与 τ(v)</a:t>
-            </a:r>
-          </a:p>
-        </p:txBody>
-      </p:sp>
-      <p:sp>
-        <p:nvSpPr>
-          <p:cNvPr id="27" name="Rounded Rectangle 26"/>
-          <p:cNvSpPr/>
-          <p:nvPr/>
-        </p:nvSpPr>
-        <p:spPr>
-          <a:xfrm>
-            <a:off x="1097280" y="5715000"/>
-            <a:ext cx="9326880" cy="411480"/>
+            <a:off x="548640" y="1661160"/>
+            <a:ext cx="10972800" cy="594360"/>
           </a:xfrm>
           <a:prstGeom prst="roundRect">
             <a:avLst/>
@@ -8995,19 +8614,767 @@
           </a:fontRef>
         </p:style>
         <p:txBody>
-          <a:bodyPr rtlCol="0" anchor="ctr" wrap="square" lIns="63500" rIns="63500" tIns="38100" bIns="38100"/>
+          <a:bodyPr wrap="square" rtlCol="0" anchor="ctr"/>
           <a:lstStyle/>
           <a:p>
             <a:pPr algn="ctr"/>
             <a:r>
-              <a:rPr sz="1500" b="0">
-                <a:solidFill>
-                  <a:srgbClr val="282828"/>
-                </a:solidFill>
-                <a:latin typeface="微软雅黑"/>
-              </a:rPr>
-              <a:t>输出：Pareto 档案中的非支配调度方案集合</a:t>
-            </a:r>
+              <a:rPr sz="1400">
+                <a:solidFill>
+                  <a:srgbClr val="282828"/>
+                </a:solidFill>
+                <a:latin typeface="微软雅黑" panose="020B0503020204020204" charset="-122"/>
+              </a:rPr>
+              <a:t>transition = (sₜ, vₜ, Rₜ, sₜ₊₁, Aₜ₊₁)      yₜ = Rₜ + γ Qθ⁻(sₜ₊₁, argmaxᵤ Qθ(sₜ₊₁,u))</a:t>
+            </a:r>
+            <a:endParaRPr sz="1400">
+              <a:solidFill>
+                <a:srgbClr val="282828"/>
+              </a:solidFill>
+              <a:latin typeface="微软雅黑" panose="020B0503020204020204" charset="-122"/>
+            </a:endParaRPr>
+          </a:p>
+        </p:txBody>
+      </p:sp>
+      <p:sp>
+        <p:nvSpPr>
+          <p:cNvPr id="5" name="Rounded Rectangle 4"/>
+          <p:cNvSpPr/>
+          <p:nvPr/>
+        </p:nvSpPr>
+        <p:spPr>
+          <a:xfrm>
+            <a:off x="640080" y="2529840"/>
+            <a:ext cx="5029200" cy="1680000"/>
+          </a:xfrm>
+          <a:prstGeom prst="roundRect">
+            <a:avLst/>
+          </a:prstGeom>
+          <a:solidFill>
+            <a:srgbClr val="F2F6FC"/>
+          </a:solidFill>
+          <a:ln w="12700">
+            <a:solidFill>
+              <a:srgbClr val="7896BE"/>
+            </a:solidFill>
+          </a:ln>
+        </p:spPr>
+        <p:style>
+          <a:lnRef idx="1">
+            <a:schemeClr val="accent1"/>
+          </a:lnRef>
+          <a:fillRef idx="3">
+            <a:schemeClr val="accent1"/>
+          </a:fillRef>
+          <a:effectRef idx="2">
+            <a:schemeClr val="accent1"/>
+          </a:effectRef>
+          <a:fontRef idx="minor">
+            <a:schemeClr val="lt1"/>
+          </a:fontRef>
+        </p:style>
+        <p:txBody>
+          <a:bodyPr wrap="square" lIns="118872" tIns="54864" rIns="118872" bIns="54864" rtlCol="0" anchor="ctr"/>
+          <a:lstStyle/>
+          <a:p>
+            <a:pPr algn="l">
+              <a:spcAft>
+                <a:spcPts val="150"/>
+              </a:spcAft>
+            </a:pPr>
+            <a:r>
+              <a:rPr sz="1150" b="1">
+                <a:solidFill>
+                  <a:srgbClr val="2F5597"/>
+                </a:solidFill>
+                <a:latin typeface="微软雅黑" panose="020B0503020204020204" charset="-122"/>
+              </a:rPr>
+              <a:t>在线训练怎么做</a:t>
+            </a:r>
+            <a:endParaRPr sz="1150" b="1">
+              <a:solidFill>
+                <a:srgbClr val="2F5597"/>
+              </a:solidFill>
+              <a:latin typeface="微软雅黑" panose="020B0503020204020204" charset="-122"/>
+            </a:endParaRPr>
+          </a:p>
+          <a:p>
+            <a:pPr algn="l">
+              <a:spcAft>
+                <a:spcPts val="150"/>
+              </a:spcAft>
+            </a:pPr>
+            <a:r>
+              <a:rPr sz="1050" b="0">
+                <a:solidFill>
+                  <a:srgbClr val="282828"/>
+                </a:solidFill>
+                <a:latin typeface="微软雅黑" panose="020B0503020204020204" charset="-122"/>
+              </a:rPr>
+              <a:t>• Warm-up 阶段不让 DDQN 参与选择，先统计 Tref。</a:t>
+            </a:r>
+            <a:endParaRPr sz="1050" b="0">
+              <a:solidFill>
+                <a:srgbClr val="282828"/>
+              </a:solidFill>
+              <a:latin typeface="微软雅黑" panose="020B0503020204020204" charset="-122"/>
+            </a:endParaRPr>
+          </a:p>
+          <a:p>
+            <a:pPr algn="l">
+              <a:spcAft>
+                <a:spcPts val="150"/>
+              </a:spcAft>
+            </a:pPr>
+            <a:r>
+              <a:rPr sz="1050" b="0">
+                <a:solidFill>
+                  <a:srgbClr val="282828"/>
+                </a:solidFill>
+                <a:latin typeface="微软雅黑" panose="020B0503020204020204" charset="-122"/>
+              </a:rPr>
+              <a:t>• 每一步把 (sₜ,vₜ,Rₜ,sₜ₊₁,Aₜ₊₁) 存入 Replay Buffer。</a:t>
+            </a:r>
+            <a:endParaRPr sz="1050" b="0">
+              <a:solidFill>
+                <a:srgbClr val="282828"/>
+              </a:solidFill>
+              <a:latin typeface="微软雅黑" panose="020B0503020204020204" charset="-122"/>
+            </a:endParaRPr>
+          </a:p>
+          <a:p>
+            <a:pPr algn="l">
+              <a:spcAft>
+                <a:spcPts val="150"/>
+              </a:spcAft>
+            </a:pPr>
+            <a:r>
+              <a:rPr sz="1050" b="0">
+                <a:solidFill>
+                  <a:srgbClr val="282828"/>
+                </a:solidFill>
+                <a:latin typeface="微软雅黑" panose="020B0503020204020204" charset="-122"/>
+              </a:rPr>
+              <a:t>• 采用 Double DQN 目标更新 Qθ，降低过估计。</a:t>
+            </a:r>
+            <a:endParaRPr sz="1050" b="0">
+              <a:solidFill>
+                <a:srgbClr val="282828"/>
+              </a:solidFill>
+              <a:latin typeface="微软雅黑" panose="020B0503020204020204" charset="-122"/>
+            </a:endParaRPr>
+          </a:p>
+          <a:p>
+            <a:pPr algn="l">
+              <a:spcAft>
+                <a:spcPts val="150"/>
+              </a:spcAft>
+            </a:pPr>
+            <a:r>
+              <a:rPr sz="1050" b="0">
+                <a:solidFill>
+                  <a:srgbClr val="282828"/>
+                </a:solidFill>
+                <a:latin typeface="微软雅黑" panose="020B0503020204020204" charset="-122"/>
+              </a:rPr>
+              <a:t>• 定期同步目标网络：θ⁻ ← θ。</a:t>
+            </a:r>
+            <a:endParaRPr sz="1050" b="0">
+              <a:solidFill>
+                <a:srgbClr val="282828"/>
+              </a:solidFill>
+              <a:latin typeface="微软雅黑" panose="020B0503020204020204" charset="-122"/>
+            </a:endParaRPr>
+          </a:p>
+        </p:txBody>
+      </p:sp>
+      <p:sp>
+        <p:nvSpPr>
+          <p:cNvPr id="6" name="Rounded Rectangle 5"/>
+          <p:cNvSpPr/>
+          <p:nvPr/>
+        </p:nvSpPr>
+        <p:spPr>
+          <a:xfrm>
+            <a:off x="5806440" y="2529840"/>
+            <a:ext cx="5029200" cy="1680000"/>
+          </a:xfrm>
+          <a:prstGeom prst="roundRect">
+            <a:avLst/>
+          </a:prstGeom>
+          <a:solidFill>
+            <a:srgbClr val="F2F6FC"/>
+          </a:solidFill>
+          <a:ln w="12700">
+            <a:solidFill>
+              <a:srgbClr val="7896BE"/>
+            </a:solidFill>
+          </a:ln>
+        </p:spPr>
+        <p:style>
+          <a:lnRef idx="1">
+            <a:schemeClr val="accent1"/>
+          </a:lnRef>
+          <a:fillRef idx="3">
+            <a:schemeClr val="accent1"/>
+          </a:fillRef>
+          <a:effectRef idx="2">
+            <a:schemeClr val="accent1"/>
+          </a:effectRef>
+          <a:fontRef idx="minor">
+            <a:schemeClr val="lt1"/>
+          </a:fontRef>
+        </p:style>
+        <p:txBody>
+          <a:bodyPr wrap="square" lIns="118872" tIns="54864" rIns="118872" bIns="54864" rtlCol="0" anchor="ctr"/>
+          <a:lstStyle/>
+          <a:p>
+            <a:pPr algn="l">
+              <a:spcAft>
+                <a:spcPts val="150"/>
+              </a:spcAft>
+            </a:pPr>
+            <a:r>
+              <a:rPr sz="1150" b="1">
+                <a:solidFill>
+                  <a:srgbClr val="2F5597"/>
+                </a:solidFill>
+                <a:latin typeface="微软雅黑" panose="020B0503020204020204" charset="-122"/>
+              </a:rPr>
+              <a:t>为什么要分阶段</a:t>
+            </a:r>
+            <a:endParaRPr sz="1150" b="1">
+              <a:solidFill>
+                <a:srgbClr val="2F5597"/>
+              </a:solidFill>
+              <a:latin typeface="微软雅黑" panose="020B0503020204020204" charset="-122"/>
+            </a:endParaRPr>
+          </a:p>
+          <a:p>
+            <a:pPr algn="l">
+              <a:spcAft>
+                <a:spcPts val="150"/>
+              </a:spcAft>
+            </a:pPr>
+            <a:r>
+              <a:rPr sz="1050" b="0">
+                <a:solidFill>
+                  <a:srgbClr val="282828"/>
+                </a:solidFill>
+                <a:latin typeface="微软雅黑" panose="020B0503020204020204" charset="-122"/>
+              </a:rPr>
+              <a:t>• 早期 Q 值不稳定，不能直接主导蚂蚁构造。</a:t>
+            </a:r>
+            <a:endParaRPr sz="1050" b="0">
+              <a:solidFill>
+                <a:srgbClr val="282828"/>
+              </a:solidFill>
+              <a:latin typeface="微软雅黑" panose="020B0503020204020204" charset="-122"/>
+            </a:endParaRPr>
+          </a:p>
+          <a:p>
+            <a:pPr algn="l">
+              <a:spcAft>
+                <a:spcPts val="150"/>
+              </a:spcAft>
+            </a:pPr>
+            <a:r>
+              <a:rPr sz="1050" b="0">
+                <a:solidFill>
+                  <a:srgbClr val="282828"/>
+                </a:solidFill>
+                <a:latin typeface="微软雅黑" panose="020B0503020204020204" charset="-122"/>
+              </a:rPr>
+              <a:t>• 让 κ 从小到大，逐步提高 DDQN Advantage 的校正作用。</a:t>
+            </a:r>
+            <a:endParaRPr sz="1050" b="0">
+              <a:solidFill>
+                <a:srgbClr val="282828"/>
+              </a:solidFill>
+              <a:latin typeface="微软雅黑" panose="020B0503020204020204" charset="-122"/>
+            </a:endParaRPr>
+          </a:p>
+          <a:p>
+            <a:pPr algn="l">
+              <a:spcAft>
+                <a:spcPts val="150"/>
+              </a:spcAft>
+            </a:pPr>
+            <a:r>
+              <a:rPr sz="1050" b="0">
+                <a:solidFill>
+                  <a:srgbClr val="282828"/>
+                </a:solidFill>
+                <a:latin typeface="微软雅黑" panose="020B0503020204020204" charset="-122"/>
+              </a:rPr>
+              <a:t>• 后期降低学习率并冻结网络，稳定输出 Pareto 档案。</a:t>
+            </a:r>
+            <a:endParaRPr sz="1050" b="0">
+              <a:solidFill>
+                <a:srgbClr val="282828"/>
+              </a:solidFill>
+              <a:latin typeface="微软雅黑" panose="020B0503020204020204" charset="-122"/>
+            </a:endParaRPr>
+          </a:p>
+        </p:txBody>
+      </p:sp>
+      <p:sp>
+        <p:nvSpPr>
+          <p:cNvPr id="7" name="Rounded Rectangle 6"/>
+          <p:cNvSpPr/>
+          <p:nvPr/>
+        </p:nvSpPr>
+        <p:spPr>
+          <a:xfrm>
+            <a:off x="594360" y="4511040"/>
+            <a:ext cx="2057400" cy="685800"/>
+          </a:xfrm>
+          <a:prstGeom prst="roundRect">
+            <a:avLst/>
+          </a:prstGeom>
+          <a:solidFill>
+            <a:srgbClr val="FFFFFF"/>
+          </a:solidFill>
+          <a:ln w="12700">
+            <a:solidFill>
+              <a:srgbClr val="2F5597"/>
+            </a:solidFill>
+          </a:ln>
+        </p:spPr>
+        <p:style>
+          <a:lnRef idx="1">
+            <a:schemeClr val="accent1"/>
+          </a:lnRef>
+          <a:fillRef idx="3">
+            <a:schemeClr val="accent1"/>
+          </a:fillRef>
+          <a:effectRef idx="2">
+            <a:schemeClr val="accent1"/>
+          </a:effectRef>
+          <a:fontRef idx="minor">
+            <a:schemeClr val="lt1"/>
+          </a:fontRef>
+        </p:style>
+        <p:txBody>
+          <a:bodyPr wrap="square" lIns="45720" tIns="18288" rIns="45720" bIns="18288" rtlCol="0" anchor="ctr"/>
+          <a:lstStyle/>
+          <a:p>
+            <a:pPr algn="ctr"/>
+            <a:r>
+              <a:rPr sz="1050" b="1">
+                <a:solidFill>
+                  <a:srgbClr val="2F5597"/>
+                </a:solidFill>
+                <a:latin typeface="微软雅黑" panose="020B0503020204020204" charset="-122"/>
+              </a:rPr>
+              <a:t>Warm-up
+1–30</a:t>
+            </a:r>
+            <a:endParaRPr sz="1050" b="1">
+              <a:solidFill>
+                <a:srgbClr val="2F5597"/>
+              </a:solidFill>
+              <a:latin typeface="微软雅黑" panose="020B0503020204020204" charset="-122"/>
+            </a:endParaRPr>
+          </a:p>
+          <a:p>
+            <a:pPr algn="ctr"/>
+            <a:r>
+              <a:rPr sz="900">
+                <a:solidFill>
+                  <a:srgbClr val="282828"/>
+                </a:solidFill>
+                <a:latin typeface="微软雅黑" panose="020B0503020204020204" charset="-122"/>
+              </a:rPr>
+              <a:t>τ+η 构造
+统计 Tref</a:t>
+            </a:r>
+            <a:endParaRPr sz="900">
+              <a:solidFill>
+                <a:srgbClr val="282828"/>
+              </a:solidFill>
+              <a:latin typeface="微软雅黑" panose="020B0503020204020204" charset="-122"/>
+            </a:endParaRPr>
+          </a:p>
+        </p:txBody>
+      </p:sp>
+      <p:sp>
+        <p:nvSpPr>
+          <p:cNvPr id="8" name="Rounded Rectangle 7"/>
+          <p:cNvSpPr/>
+          <p:nvPr/>
+        </p:nvSpPr>
+        <p:spPr>
+          <a:xfrm>
+            <a:off x="2791460" y="4511040"/>
+            <a:ext cx="2057400" cy="685800"/>
+          </a:xfrm>
+          <a:prstGeom prst="roundRect">
+            <a:avLst/>
+          </a:prstGeom>
+          <a:solidFill>
+            <a:srgbClr val="FFFFFF"/>
+          </a:solidFill>
+          <a:ln w="12700">
+            <a:solidFill>
+              <a:srgbClr val="2F5597"/>
+            </a:solidFill>
+          </a:ln>
+        </p:spPr>
+        <p:style>
+          <a:lnRef idx="1">
+            <a:schemeClr val="accent1"/>
+          </a:lnRef>
+          <a:fillRef idx="3">
+            <a:schemeClr val="accent1"/>
+          </a:fillRef>
+          <a:effectRef idx="2">
+            <a:schemeClr val="accent1"/>
+          </a:effectRef>
+          <a:fontRef idx="minor">
+            <a:schemeClr val="lt1"/>
+          </a:fontRef>
+        </p:style>
+        <p:txBody>
+          <a:bodyPr wrap="square" lIns="45720" tIns="18288" rIns="45720" bIns="18288" rtlCol="0" anchor="ctr"/>
+          <a:lstStyle/>
+          <a:p>
+            <a:pPr algn="ctr"/>
+            <a:r>
+              <a:rPr sz="1050" b="1">
+                <a:solidFill>
+                  <a:srgbClr val="2F5597"/>
+                </a:solidFill>
+                <a:latin typeface="微软雅黑" panose="020B0503020204020204" charset="-122"/>
+              </a:rPr>
+              <a:t>轻度 RL
+31–90</a:t>
+            </a:r>
+            <a:endParaRPr sz="1050" b="1">
+              <a:solidFill>
+                <a:srgbClr val="2F5597"/>
+              </a:solidFill>
+              <a:latin typeface="微软雅黑" panose="020B0503020204020204" charset="-122"/>
+            </a:endParaRPr>
+          </a:p>
+          <a:p>
+            <a:pPr algn="ctr"/>
+            <a:r>
+              <a:rPr sz="900">
+                <a:solidFill>
+                  <a:srgbClr val="282828"/>
+                </a:solidFill>
+                <a:latin typeface="微软雅黑" panose="020B0503020204020204" charset="-122"/>
+              </a:rPr>
+              <a:t>开始训练
+κ:0.1→0.4</a:t>
+            </a:r>
+            <a:endParaRPr sz="900">
+              <a:solidFill>
+                <a:srgbClr val="282828"/>
+              </a:solidFill>
+              <a:latin typeface="微软雅黑" panose="020B0503020204020204" charset="-122"/>
+            </a:endParaRPr>
+          </a:p>
+        </p:txBody>
+      </p:sp>
+      <p:sp>
+        <p:nvSpPr>
+          <p:cNvPr id="9" name="Rounded Rectangle 8"/>
+          <p:cNvSpPr/>
+          <p:nvPr/>
+        </p:nvSpPr>
+        <p:spPr>
+          <a:xfrm>
+            <a:off x="4988560" y="4511040"/>
+            <a:ext cx="2057400" cy="685800"/>
+          </a:xfrm>
+          <a:prstGeom prst="roundRect">
+            <a:avLst/>
+          </a:prstGeom>
+          <a:solidFill>
+            <a:srgbClr val="FFFFFF"/>
+          </a:solidFill>
+          <a:ln w="12700">
+            <a:solidFill>
+              <a:srgbClr val="2F5597"/>
+            </a:solidFill>
+          </a:ln>
+        </p:spPr>
+        <p:style>
+          <a:lnRef idx="1">
+            <a:schemeClr val="accent1"/>
+          </a:lnRef>
+          <a:fillRef idx="3">
+            <a:schemeClr val="accent1"/>
+          </a:fillRef>
+          <a:effectRef idx="2">
+            <a:schemeClr val="accent1"/>
+          </a:effectRef>
+          <a:fontRef idx="minor">
+            <a:schemeClr val="lt1"/>
+          </a:fontRef>
+        </p:style>
+        <p:txBody>
+          <a:bodyPr wrap="square" lIns="45720" tIns="18288" rIns="45720" bIns="18288" rtlCol="0" anchor="ctr"/>
+          <a:lstStyle/>
+          <a:p>
+            <a:pPr algn="ctr"/>
+            <a:r>
+              <a:rPr sz="1050" b="1">
+                <a:solidFill>
+                  <a:srgbClr val="2F5597"/>
+                </a:solidFill>
+                <a:latin typeface="微软雅黑" panose="020B0503020204020204" charset="-122"/>
+              </a:rPr>
+              <a:t>强 RL
+91–240</a:t>
+            </a:r>
+            <a:endParaRPr sz="1050" b="1">
+              <a:solidFill>
+                <a:srgbClr val="2F5597"/>
+              </a:solidFill>
+              <a:latin typeface="微软雅黑" panose="020B0503020204020204" charset="-122"/>
+            </a:endParaRPr>
+          </a:p>
+          <a:p>
+            <a:pPr algn="ctr"/>
+            <a:r>
+              <a:rPr sz="900">
+                <a:solidFill>
+                  <a:srgbClr val="282828"/>
+                </a:solidFill>
+                <a:latin typeface="微软雅黑" panose="020B0503020204020204" charset="-122"/>
+              </a:rPr>
+              <a:t>正式辅助
+κ:0.4→1.0</a:t>
+            </a:r>
+            <a:endParaRPr sz="900">
+              <a:solidFill>
+                <a:srgbClr val="282828"/>
+              </a:solidFill>
+              <a:latin typeface="微软雅黑" panose="020B0503020204020204" charset="-122"/>
+            </a:endParaRPr>
+          </a:p>
+        </p:txBody>
+      </p:sp>
+      <p:sp>
+        <p:nvSpPr>
+          <p:cNvPr id="10" name="Rounded Rectangle 9"/>
+          <p:cNvSpPr/>
+          <p:nvPr/>
+        </p:nvSpPr>
+        <p:spPr>
+          <a:xfrm>
+            <a:off x="7185660" y="4511040"/>
+            <a:ext cx="2057400" cy="685800"/>
+          </a:xfrm>
+          <a:prstGeom prst="roundRect">
+            <a:avLst/>
+          </a:prstGeom>
+          <a:solidFill>
+            <a:srgbClr val="FFFFFF"/>
+          </a:solidFill>
+          <a:ln w="12700">
+            <a:solidFill>
+              <a:srgbClr val="2F5597"/>
+            </a:solidFill>
+          </a:ln>
+        </p:spPr>
+        <p:style>
+          <a:lnRef idx="1">
+            <a:schemeClr val="accent1"/>
+          </a:lnRef>
+          <a:fillRef idx="3">
+            <a:schemeClr val="accent1"/>
+          </a:fillRef>
+          <a:effectRef idx="2">
+            <a:schemeClr val="accent1"/>
+          </a:effectRef>
+          <a:fontRef idx="minor">
+            <a:schemeClr val="lt1"/>
+          </a:fontRef>
+        </p:style>
+        <p:txBody>
+          <a:bodyPr wrap="square" lIns="45720" tIns="18288" rIns="45720" bIns="18288" rtlCol="0" anchor="ctr"/>
+          <a:lstStyle/>
+          <a:p>
+            <a:pPr algn="ctr"/>
+            <a:r>
+              <a:rPr sz="1050" b="1">
+                <a:solidFill>
+                  <a:srgbClr val="2F5597"/>
+                </a:solidFill>
+                <a:latin typeface="微软雅黑" panose="020B0503020204020204" charset="-122"/>
+              </a:rPr>
+              <a:t>收敛训练
+241–280</a:t>
+            </a:r>
+            <a:endParaRPr sz="1050" b="1">
+              <a:solidFill>
+                <a:srgbClr val="2F5597"/>
+              </a:solidFill>
+              <a:latin typeface="微软雅黑" panose="020B0503020204020204" charset="-122"/>
+            </a:endParaRPr>
+          </a:p>
+          <a:p>
+            <a:pPr algn="ctr"/>
+            <a:r>
+              <a:rPr sz="900">
+                <a:solidFill>
+                  <a:srgbClr val="282828"/>
+                </a:solidFill>
+                <a:latin typeface="微软雅黑" panose="020B0503020204020204" charset="-122"/>
+              </a:rPr>
+              <a:t>降学习率
+κ:1.0→1.2</a:t>
+            </a:r>
+            <a:endParaRPr sz="900">
+              <a:solidFill>
+                <a:srgbClr val="282828"/>
+              </a:solidFill>
+              <a:latin typeface="微软雅黑" panose="020B0503020204020204" charset="-122"/>
+            </a:endParaRPr>
+          </a:p>
+        </p:txBody>
+      </p:sp>
+      <p:sp>
+        <p:nvSpPr>
+          <p:cNvPr id="11" name="Rounded Rectangle 10"/>
+          <p:cNvSpPr/>
+          <p:nvPr/>
+        </p:nvSpPr>
+        <p:spPr>
+          <a:xfrm>
+            <a:off x="9382760" y="4511040"/>
+            <a:ext cx="2057400" cy="685800"/>
+          </a:xfrm>
+          <a:prstGeom prst="roundRect">
+            <a:avLst/>
+          </a:prstGeom>
+          <a:solidFill>
+            <a:srgbClr val="FFFFFF"/>
+          </a:solidFill>
+          <a:ln w="12700">
+            <a:solidFill>
+              <a:srgbClr val="2F5597"/>
+            </a:solidFill>
+          </a:ln>
+        </p:spPr>
+        <p:style>
+          <a:lnRef idx="1">
+            <a:schemeClr val="accent1"/>
+          </a:lnRef>
+          <a:fillRef idx="3">
+            <a:schemeClr val="accent1"/>
+          </a:fillRef>
+          <a:effectRef idx="2">
+            <a:schemeClr val="accent1"/>
+          </a:effectRef>
+          <a:fontRef idx="minor">
+            <a:schemeClr val="lt1"/>
+          </a:fontRef>
+        </p:style>
+        <p:txBody>
+          <a:bodyPr wrap="square" lIns="45720" tIns="18288" rIns="45720" bIns="18288" rtlCol="0" anchor="ctr"/>
+          <a:lstStyle/>
+          <a:p>
+            <a:pPr algn="ctr"/>
+            <a:r>
+              <a:rPr sz="1050" b="1">
+                <a:solidFill>
+                  <a:srgbClr val="2F5597"/>
+                </a:solidFill>
+                <a:latin typeface="微软雅黑" panose="020B0503020204020204" charset="-122"/>
+              </a:rPr>
+              <a:t>冻结输出
+281–300</a:t>
+            </a:r>
+            <a:endParaRPr sz="1050" b="1">
+              <a:solidFill>
+                <a:srgbClr val="2F5597"/>
+              </a:solidFill>
+              <a:latin typeface="微软雅黑" panose="020B0503020204020204" charset="-122"/>
+            </a:endParaRPr>
+          </a:p>
+          <a:p>
+            <a:pPr algn="ctr"/>
+            <a:r>
+              <a:rPr sz="900">
+                <a:solidFill>
+                  <a:srgbClr val="282828"/>
+                </a:solidFill>
+                <a:latin typeface="微软雅黑" panose="020B0503020204020204" charset="-122"/>
+              </a:rPr>
+              <a:t>冻结 DDQN
+只辅助构造</a:t>
+            </a:r>
+            <a:endParaRPr sz="900">
+              <a:solidFill>
+                <a:srgbClr val="282828"/>
+              </a:solidFill>
+              <a:latin typeface="微软雅黑" panose="020B0503020204020204" charset="-122"/>
+            </a:endParaRPr>
+          </a:p>
+        </p:txBody>
+      </p:sp>
+      <p:sp>
+        <p:nvSpPr>
+          <p:cNvPr id="12" name="Rounded Rectangle 11"/>
+          <p:cNvSpPr/>
+          <p:nvPr/>
+        </p:nvSpPr>
+        <p:spPr>
+          <a:xfrm>
+            <a:off x="1097280" y="5532120"/>
+            <a:ext cx="9418320" cy="457200"/>
+          </a:xfrm>
+          <a:prstGeom prst="roundRect">
+            <a:avLst/>
+          </a:prstGeom>
+          <a:solidFill>
+            <a:srgbClr val="FFFFFF"/>
+          </a:solidFill>
+          <a:ln w="12700">
+            <a:solidFill>
+              <a:srgbClr val="2F5597"/>
+            </a:solidFill>
+          </a:ln>
+        </p:spPr>
+        <p:style>
+          <a:lnRef idx="1">
+            <a:schemeClr val="accent1"/>
+          </a:lnRef>
+          <a:fillRef idx="3">
+            <a:schemeClr val="accent1"/>
+          </a:fillRef>
+          <a:effectRef idx="2">
+            <a:schemeClr val="accent1"/>
+          </a:effectRef>
+          <a:fontRef idx="minor">
+            <a:schemeClr val="lt1"/>
+          </a:fontRef>
+        </p:style>
+        <p:txBody>
+          <a:bodyPr wrap="square" rtlCol="0" anchor="ctr"/>
+          <a:lstStyle/>
+          <a:p>
+            <a:pPr algn="ctr"/>
+            <a:r>
+              <a:rPr sz="1200">
+                <a:solidFill>
+                  <a:srgbClr val="282828"/>
+                </a:solidFill>
+                <a:latin typeface="微软雅黑" panose="020B0503020204020204" charset="-122"/>
+              </a:rPr>
+              <a:t>核心安排：Warm-up 先稳定奖励尺度与经验样本；随后逐步增大 κ，使 DDQN 从“轻度校正”过渡到“稳定辅助构造”。</a:t>
+            </a:r>
+            <a:endParaRPr sz="1200">
+              <a:solidFill>
+                <a:srgbClr val="282828"/>
+              </a:solidFill>
+              <a:latin typeface="微软雅黑" panose="020B0503020204020204" charset="-122"/>
+            </a:endParaRPr>
           </a:p>
         </p:txBody>
       </p:sp>
@@ -9020,7 +9387,7 @@
 </file>
 
 <file path=ppt/slides/slide8.xml><?xml version="1.0" encoding="utf-8"?>
-<p:sld xmlns:a="http://schemas.openxmlformats.org/drawingml/2006/main" xmlns:p="http://schemas.openxmlformats.org/presentationml/2006/main" xmlns:r="http://schemas.openxmlformats.org/officeDocument/2006/relationships">
+<p:sld xmlns:a="http://schemas.openxmlformats.org/drawingml/2006/main" xmlns:r="http://schemas.openxmlformats.org/officeDocument/2006/relationships" xmlns:p="http://schemas.openxmlformats.org/presentationml/2006/main">
   <p:cSld>
     <p:spTree>
       <p:nvGrpSpPr>
@@ -9028,7 +9395,14 @@
         <p:cNvGrpSpPr/>
         <p:nvPr/>
       </p:nvGrpSpPr>
-      <p:grpSpPr/>
+      <p:grpSpPr>
+        <a:xfrm>
+          <a:off x="0" y="0"/>
+          <a:ext cx="0" cy="0"/>
+          <a:chOff x="0" y="0"/>
+          <a:chExt cx="0" cy="0"/>
+        </a:xfrm>
+      </p:grpSpPr>
       <p:sp>
         <p:nvSpPr>
           <p:cNvPr id="2" name="TextBox 1"/>
@@ -9046,34 +9420,99 @@
           <a:noFill/>
         </p:spPr>
         <p:txBody>
-          <a:bodyPr wrap="square" lIns="0" rIns="0" tIns="0" bIns="0">
+          <a:bodyPr wrap="none">
             <a:spAutoFit/>
           </a:bodyPr>
           <a:lstStyle/>
           <a:p>
-            <a:pPr algn="l"/>
-            <a:r>
-              <a:rPr sz="2000" b="1">
+            <a:r>
+              <a:rPr sz="2400" b="1">
                 <a:solidFill>
                   <a:srgbClr val="2F5597"/>
                 </a:solidFill>
-                <a:latin typeface="微软雅黑"/>
-              </a:rPr>
-              <a:t>DDQN 在线训练机制与阶段安排</a:t>
-            </a:r>
-          </a:p>
-        </p:txBody>
-      </p:sp>
-      <p:sp>
-        <p:nvSpPr>
-          <p:cNvPr id="3" name="TextBox 2"/>
+                <a:latin typeface="微软雅黑" panose="020B0503020204020204" charset="-122"/>
+              </a:rPr>
+              <a:t>算法整理流程</a:t>
+            </a:r>
+            <a:endParaRPr sz="2400" b="1">
+              <a:solidFill>
+                <a:srgbClr val="2F5597"/>
+              </a:solidFill>
+              <a:latin typeface="微软雅黑" panose="020B0503020204020204" charset="-122"/>
+            </a:endParaRPr>
+          </a:p>
+        </p:txBody>
+      </p:sp>
+      <p:sp>
+        <p:nvSpPr>
+          <p:cNvPr id="3" name="Rounded Rectangle 2"/>
+          <p:cNvSpPr/>
+          <p:nvPr/>
+        </p:nvSpPr>
+        <p:spPr>
+          <a:xfrm>
+            <a:off x="548640" y="960120"/>
+            <a:ext cx="411480" cy="411480"/>
+          </a:xfrm>
+          <a:prstGeom prst="roundRect">
+            <a:avLst/>
+          </a:prstGeom>
+          <a:solidFill>
+            <a:srgbClr val="2F5597"/>
+          </a:solidFill>
+          <a:ln w="12700">
+            <a:solidFill>
+              <a:srgbClr val="2F5597"/>
+            </a:solidFill>
+          </a:ln>
+        </p:spPr>
+        <p:style>
+          <a:lnRef idx="1">
+            <a:schemeClr val="accent1"/>
+          </a:lnRef>
+          <a:fillRef idx="3">
+            <a:schemeClr val="accent1"/>
+          </a:fillRef>
+          <a:effectRef idx="2">
+            <a:schemeClr val="accent1"/>
+          </a:effectRef>
+          <a:fontRef idx="minor">
+            <a:schemeClr val="lt1"/>
+          </a:fontRef>
+        </p:style>
+        <p:txBody>
+          <a:bodyPr wrap="square" lIns="63500" tIns="38100" rIns="63500" bIns="38100" rtlCol="0" anchor="ctr"/>
+          <a:lstStyle/>
+          <a:p>
+            <a:pPr algn="ctr"/>
+            <a:r>
+              <a:rPr sz="1400" b="1">
+                <a:solidFill>
+                  <a:srgbClr val="FFFFFF"/>
+                </a:solidFill>
+                <a:latin typeface="微软雅黑" panose="020B0503020204020204" charset="-122"/>
+              </a:rPr>
+              <a:t>1</a:t>
+            </a:r>
+            <a:endParaRPr sz="1400" b="1">
+              <a:solidFill>
+                <a:srgbClr val="FFFFFF"/>
+              </a:solidFill>
+              <a:latin typeface="微软雅黑" panose="020B0503020204020204" charset="-122"/>
+            </a:endParaRPr>
+          </a:p>
+        </p:txBody>
+      </p:sp>
+      <p:sp>
+        <p:nvSpPr>
+          <p:cNvPr id="4" name="TextBox 3"/>
           <p:cNvSpPr txBox="1"/>
           <p:nvPr/>
         </p:nvSpPr>
         <p:spPr>
           <a:xfrm>
-            <a:off x="502920" y="868680"/>
-            <a:ext cx="10332720" cy="685800"/>
+            <a:off x="1097280" y="941832"/>
+            <a:ext cx="4572000" cy="256032"/>
           </a:xfrm>
           <a:prstGeom prst="rect">
             <a:avLst/>
@@ -9081,34 +9520,1059 @@
           <a:noFill/>
         </p:spPr>
         <p:txBody>
-          <a:bodyPr wrap="square" lIns="0" rIns="0" tIns="0" bIns="0">
+          <a:bodyPr wrap="square" lIns="50800" tIns="38100" rIns="50800" bIns="38100">
             <a:spAutoFit/>
           </a:bodyPr>
           <a:lstStyle/>
           <a:p>
-            <a:pPr algn="l"/>
-            <a:r>
-              <a:rPr sz="1300" b="0">
-                <a:solidFill>
-                  <a:srgbClr val="282828"/>
-                </a:solidFill>
-                <a:latin typeface="微软雅黑"/>
-              </a:rPr>
-              <a:t>每只蚂蚁构造一个完整调度方案视为一个 episode。算法边构造解、边存储经验，并用 Replay Buffer 在线更新 MLP-DDQN；RL 的影响强度 κ 分阶段逐步增大。</a:t>
-            </a:r>
-          </a:p>
-        </p:txBody>
-      </p:sp>
-      <p:sp>
-        <p:nvSpPr>
-          <p:cNvPr id="4" name="Rounded Rectangle 3"/>
+            <a:r>
+              <a:rPr sz="1400" b="1">
+                <a:solidFill>
+                  <a:srgbClr val="2F5597"/>
+                </a:solidFill>
+                <a:latin typeface="微软雅黑" panose="020B0503020204020204" charset="-122"/>
+              </a:rPr>
+              <a:t>生成三元候选节点 V</a:t>
+            </a:r>
+            <a:endParaRPr sz="1400" b="1">
+              <a:solidFill>
+                <a:srgbClr val="2F5597"/>
+              </a:solidFill>
+              <a:latin typeface="微软雅黑" panose="020B0503020204020204" charset="-122"/>
+            </a:endParaRPr>
+          </a:p>
+        </p:txBody>
+      </p:sp>
+      <p:sp>
+        <p:nvSpPr>
+          <p:cNvPr id="5" name="TextBox 4"/>
+          <p:cNvSpPr txBox="1"/>
+          <p:nvPr/>
+        </p:nvSpPr>
+        <p:spPr>
+          <a:xfrm>
+            <a:off x="1097280" y="1280160"/>
+            <a:ext cx="4754880" cy="566928"/>
+          </a:xfrm>
+          <a:prstGeom prst="rect">
+            <a:avLst/>
+          </a:prstGeom>
+          <a:noFill/>
+        </p:spPr>
+        <p:txBody>
+          <a:bodyPr wrap="square" lIns="50800" tIns="38100" rIns="50800" bIns="38100">
+            <a:spAutoFit/>
+          </a:bodyPr>
+          <a:lstStyle/>
+          <a:p>
+            <a:r>
+              <a:rPr sz="1200" b="0">
+                <a:solidFill>
+                  <a:srgbClr val="282828"/>
+                </a:solidFill>
+                <a:latin typeface="微软雅黑" panose="020B0503020204020204" charset="-122"/>
+              </a:rPr>
+              <a:t>task / satellite / window → vⱼᵢₖ</a:t>
+            </a:r>
+            <a:endParaRPr sz="1200" b="0">
+              <a:solidFill>
+                <a:srgbClr val="282828"/>
+              </a:solidFill>
+              <a:latin typeface="微软雅黑" panose="020B0503020204020204" charset="-122"/>
+            </a:endParaRPr>
+          </a:p>
+        </p:txBody>
+      </p:sp>
+      <p:sp>
+        <p:nvSpPr>
+          <p:cNvPr id="6" name="Rounded Rectangle 5"/>
           <p:cNvSpPr/>
           <p:nvPr/>
         </p:nvSpPr>
         <p:spPr>
           <a:xfrm>
-            <a:off x="548640" y="1661160"/>
-            <a:ext cx="10972800" cy="594360"/>
+            <a:off x="548640" y="2103120"/>
+            <a:ext cx="411480" cy="411480"/>
+          </a:xfrm>
+          <a:prstGeom prst="roundRect">
+            <a:avLst/>
+          </a:prstGeom>
+          <a:solidFill>
+            <a:srgbClr val="2F5597"/>
+          </a:solidFill>
+          <a:ln w="12700">
+            <a:solidFill>
+              <a:srgbClr val="2F5597"/>
+            </a:solidFill>
+          </a:ln>
+        </p:spPr>
+        <p:style>
+          <a:lnRef idx="1">
+            <a:schemeClr val="accent1"/>
+          </a:lnRef>
+          <a:fillRef idx="3">
+            <a:schemeClr val="accent1"/>
+          </a:fillRef>
+          <a:effectRef idx="2">
+            <a:schemeClr val="accent1"/>
+          </a:effectRef>
+          <a:fontRef idx="minor">
+            <a:schemeClr val="lt1"/>
+          </a:fontRef>
+        </p:style>
+        <p:txBody>
+          <a:bodyPr wrap="square" lIns="63500" tIns="38100" rIns="63500" bIns="38100" rtlCol="0" anchor="ctr"/>
+          <a:lstStyle/>
+          <a:p>
+            <a:pPr algn="ctr"/>
+            <a:r>
+              <a:rPr sz="1400" b="1">
+                <a:solidFill>
+                  <a:srgbClr val="FFFFFF"/>
+                </a:solidFill>
+                <a:latin typeface="微软雅黑" panose="020B0503020204020204" charset="-122"/>
+              </a:rPr>
+              <a:t>2</a:t>
+            </a:r>
+            <a:endParaRPr sz="1400" b="1">
+              <a:solidFill>
+                <a:srgbClr val="FFFFFF"/>
+              </a:solidFill>
+              <a:latin typeface="微软雅黑" panose="020B0503020204020204" charset="-122"/>
+            </a:endParaRPr>
+          </a:p>
+        </p:txBody>
+      </p:sp>
+      <p:sp>
+        <p:nvSpPr>
+          <p:cNvPr id="7" name="TextBox 6"/>
+          <p:cNvSpPr txBox="1"/>
+          <p:nvPr/>
+        </p:nvSpPr>
+        <p:spPr>
+          <a:xfrm>
+            <a:off x="1097280" y="2084831"/>
+            <a:ext cx="4572000" cy="256032"/>
+          </a:xfrm>
+          <a:prstGeom prst="rect">
+            <a:avLst/>
+          </a:prstGeom>
+          <a:noFill/>
+        </p:spPr>
+        <p:txBody>
+          <a:bodyPr wrap="square" lIns="50800" tIns="38100" rIns="50800" bIns="38100">
+            <a:spAutoFit/>
+          </a:bodyPr>
+          <a:lstStyle/>
+          <a:p>
+            <a:r>
+              <a:rPr sz="1400" b="1">
+                <a:solidFill>
+                  <a:srgbClr val="2F5597"/>
+                </a:solidFill>
+                <a:latin typeface="微软雅黑" panose="020B0503020204020204" charset="-122"/>
+              </a:rPr>
+              <a:t>构建冲突图 G=(V,E)</a:t>
+            </a:r>
+            <a:endParaRPr sz="1400" b="1">
+              <a:solidFill>
+                <a:srgbClr val="2F5597"/>
+              </a:solidFill>
+              <a:latin typeface="微软雅黑" panose="020B0503020204020204" charset="-122"/>
+            </a:endParaRPr>
+          </a:p>
+        </p:txBody>
+      </p:sp>
+      <p:sp>
+        <p:nvSpPr>
+          <p:cNvPr id="8" name="TextBox 7"/>
+          <p:cNvSpPr txBox="1"/>
+          <p:nvPr/>
+        </p:nvSpPr>
+        <p:spPr>
+          <a:xfrm>
+            <a:off x="1097280" y="2423160"/>
+            <a:ext cx="4754880" cy="566928"/>
+          </a:xfrm>
+          <a:prstGeom prst="rect">
+            <a:avLst/>
+          </a:prstGeom>
+          <a:noFill/>
+        </p:spPr>
+        <p:txBody>
+          <a:bodyPr wrap="square" lIns="50800" tIns="38100" rIns="50800" bIns="38100">
+            <a:spAutoFit/>
+          </a:bodyPr>
+          <a:lstStyle/>
+          <a:p>
+            <a:r>
+              <a:rPr sz="1200" b="0">
+                <a:solidFill>
+                  <a:srgbClr val="282828"/>
+                </a:solidFill>
+                <a:latin typeface="微软雅黑" panose="020B0503020204020204" charset="-122"/>
+              </a:rPr>
+              <a:t>任务重复、窗口重叠、姿态转移不足连边</a:t>
+            </a:r>
+            <a:endParaRPr sz="1200" b="0">
+              <a:solidFill>
+                <a:srgbClr val="282828"/>
+              </a:solidFill>
+              <a:latin typeface="微软雅黑" panose="020B0503020204020204" charset="-122"/>
+            </a:endParaRPr>
+          </a:p>
+        </p:txBody>
+      </p:sp>
+      <p:sp>
+        <p:nvSpPr>
+          <p:cNvPr id="9" name="Rounded Rectangle 8"/>
+          <p:cNvSpPr/>
+          <p:nvPr/>
+        </p:nvSpPr>
+        <p:spPr>
+          <a:xfrm>
+            <a:off x="548640" y="3246120"/>
+            <a:ext cx="411480" cy="411480"/>
+          </a:xfrm>
+          <a:prstGeom prst="roundRect">
+            <a:avLst/>
+          </a:prstGeom>
+          <a:solidFill>
+            <a:srgbClr val="2F5597"/>
+          </a:solidFill>
+          <a:ln w="12700">
+            <a:solidFill>
+              <a:srgbClr val="2F5597"/>
+            </a:solidFill>
+          </a:ln>
+        </p:spPr>
+        <p:style>
+          <a:lnRef idx="1">
+            <a:schemeClr val="accent1"/>
+          </a:lnRef>
+          <a:fillRef idx="3">
+            <a:schemeClr val="accent1"/>
+          </a:fillRef>
+          <a:effectRef idx="2">
+            <a:schemeClr val="accent1"/>
+          </a:effectRef>
+          <a:fontRef idx="minor">
+            <a:schemeClr val="lt1"/>
+          </a:fontRef>
+        </p:style>
+        <p:txBody>
+          <a:bodyPr wrap="square" lIns="63500" tIns="38100" rIns="63500" bIns="38100" rtlCol="0" anchor="ctr"/>
+          <a:lstStyle/>
+          <a:p>
+            <a:pPr algn="ctr"/>
+            <a:r>
+              <a:rPr sz="1400" b="1">
+                <a:solidFill>
+                  <a:srgbClr val="FFFFFF"/>
+                </a:solidFill>
+                <a:latin typeface="微软雅黑" panose="020B0503020204020204" charset="-122"/>
+              </a:rPr>
+              <a:t>3</a:t>
+            </a:r>
+            <a:endParaRPr sz="1400" b="1">
+              <a:solidFill>
+                <a:srgbClr val="FFFFFF"/>
+              </a:solidFill>
+              <a:latin typeface="微软雅黑" panose="020B0503020204020204" charset="-122"/>
+            </a:endParaRPr>
+          </a:p>
+        </p:txBody>
+      </p:sp>
+      <p:sp>
+        <p:nvSpPr>
+          <p:cNvPr id="10" name="TextBox 9"/>
+          <p:cNvSpPr txBox="1"/>
+          <p:nvPr/>
+        </p:nvSpPr>
+        <p:spPr>
+          <a:xfrm>
+            <a:off x="1097280" y="3227832"/>
+            <a:ext cx="4572000" cy="256032"/>
+          </a:xfrm>
+          <a:prstGeom prst="rect">
+            <a:avLst/>
+          </a:prstGeom>
+          <a:noFill/>
+        </p:spPr>
+        <p:txBody>
+          <a:bodyPr wrap="square" lIns="50800" tIns="38100" rIns="50800" bIns="38100">
+            <a:spAutoFit/>
+          </a:bodyPr>
+          <a:lstStyle/>
+          <a:p>
+            <a:r>
+              <a:rPr sz="1400" b="1">
+                <a:solidFill>
+                  <a:srgbClr val="2F5597"/>
+                </a:solidFill>
+                <a:latin typeface="微软雅黑" panose="020B0503020204020204" charset="-122"/>
+              </a:rPr>
+              <a:t>初始化 MOACO 与 DDQN</a:t>
+            </a:r>
+            <a:endParaRPr sz="1400" b="1">
+              <a:solidFill>
+                <a:srgbClr val="2F5597"/>
+              </a:solidFill>
+              <a:latin typeface="微软雅黑" panose="020B0503020204020204" charset="-122"/>
+            </a:endParaRPr>
+          </a:p>
+        </p:txBody>
+      </p:sp>
+      <p:sp>
+        <p:nvSpPr>
+          <p:cNvPr id="11" name="TextBox 10"/>
+          <p:cNvSpPr txBox="1"/>
+          <p:nvPr/>
+        </p:nvSpPr>
+        <p:spPr>
+          <a:xfrm>
+            <a:off x="1097280" y="3566160"/>
+            <a:ext cx="4754880" cy="566928"/>
+          </a:xfrm>
+          <a:prstGeom prst="rect">
+            <a:avLst/>
+          </a:prstGeom>
+          <a:noFill/>
+        </p:spPr>
+        <p:txBody>
+          <a:bodyPr wrap="square" lIns="50800" tIns="38100" rIns="50800" bIns="38100">
+            <a:spAutoFit/>
+          </a:bodyPr>
+          <a:lstStyle/>
+          <a:p>
+            <a:r>
+              <a:rPr sz="1200" b="0">
+                <a:solidFill>
+                  <a:srgbClr val="282828"/>
+                </a:solidFill>
+                <a:latin typeface="微软雅黑" panose="020B0503020204020204" charset="-122"/>
+              </a:rPr>
+              <a:t>τ(v)、η(v)、Pareto 档案、MLP-DDQN、Replay Buffer</a:t>
+            </a:r>
+            <a:endParaRPr sz="1200" b="0">
+              <a:solidFill>
+                <a:srgbClr val="282828"/>
+              </a:solidFill>
+              <a:latin typeface="微软雅黑" panose="020B0503020204020204" charset="-122"/>
+            </a:endParaRPr>
+          </a:p>
+        </p:txBody>
+      </p:sp>
+      <p:sp>
+        <p:nvSpPr>
+          <p:cNvPr id="12" name="Rounded Rectangle 11"/>
+          <p:cNvSpPr/>
+          <p:nvPr/>
+        </p:nvSpPr>
+        <p:spPr>
+          <a:xfrm>
+            <a:off x="548640" y="4389120"/>
+            <a:ext cx="411480" cy="411480"/>
+          </a:xfrm>
+          <a:prstGeom prst="roundRect">
+            <a:avLst/>
+          </a:prstGeom>
+          <a:solidFill>
+            <a:srgbClr val="2F5597"/>
+          </a:solidFill>
+          <a:ln w="12700">
+            <a:solidFill>
+              <a:srgbClr val="2F5597"/>
+            </a:solidFill>
+          </a:ln>
+        </p:spPr>
+        <p:style>
+          <a:lnRef idx="1">
+            <a:schemeClr val="accent1"/>
+          </a:lnRef>
+          <a:fillRef idx="3">
+            <a:schemeClr val="accent1"/>
+          </a:fillRef>
+          <a:effectRef idx="2">
+            <a:schemeClr val="accent1"/>
+          </a:effectRef>
+          <a:fontRef idx="minor">
+            <a:schemeClr val="lt1"/>
+          </a:fontRef>
+        </p:style>
+        <p:txBody>
+          <a:bodyPr wrap="square" lIns="63500" tIns="38100" rIns="63500" bIns="38100" rtlCol="0" anchor="ctr"/>
+          <a:lstStyle/>
+          <a:p>
+            <a:pPr algn="ctr"/>
+            <a:r>
+              <a:rPr sz="1400" b="1">
+                <a:solidFill>
+                  <a:srgbClr val="FFFFFF"/>
+                </a:solidFill>
+                <a:latin typeface="微软雅黑" panose="020B0503020204020204" charset="-122"/>
+              </a:rPr>
+              <a:t>4</a:t>
+            </a:r>
+            <a:endParaRPr sz="1400" b="1">
+              <a:solidFill>
+                <a:srgbClr val="FFFFFF"/>
+              </a:solidFill>
+              <a:latin typeface="微软雅黑" panose="020B0503020204020204" charset="-122"/>
+            </a:endParaRPr>
+          </a:p>
+        </p:txBody>
+      </p:sp>
+      <p:sp>
+        <p:nvSpPr>
+          <p:cNvPr id="13" name="TextBox 12"/>
+          <p:cNvSpPr txBox="1"/>
+          <p:nvPr/>
+        </p:nvSpPr>
+        <p:spPr>
+          <a:xfrm>
+            <a:off x="1097280" y="4370832"/>
+            <a:ext cx="4572000" cy="256032"/>
+          </a:xfrm>
+          <a:prstGeom prst="rect">
+            <a:avLst/>
+          </a:prstGeom>
+          <a:noFill/>
+        </p:spPr>
+        <p:txBody>
+          <a:bodyPr wrap="square" lIns="50800" tIns="38100" rIns="50800" bIns="38100">
+            <a:spAutoFit/>
+          </a:bodyPr>
+          <a:lstStyle/>
+          <a:p>
+            <a:r>
+              <a:rPr sz="1400" b="1">
+                <a:solidFill>
+                  <a:srgbClr val="2F5597"/>
+                </a:solidFill>
+                <a:latin typeface="微软雅黑" panose="020B0503020204020204" charset="-122"/>
+              </a:rPr>
+              <a:t>Warm-up 阶段</a:t>
+            </a:r>
+            <a:endParaRPr sz="1400" b="1">
+              <a:solidFill>
+                <a:srgbClr val="2F5597"/>
+              </a:solidFill>
+              <a:latin typeface="微软雅黑" panose="020B0503020204020204" charset="-122"/>
+            </a:endParaRPr>
+          </a:p>
+        </p:txBody>
+      </p:sp>
+      <p:sp>
+        <p:nvSpPr>
+          <p:cNvPr id="14" name="TextBox 13"/>
+          <p:cNvSpPr txBox="1"/>
+          <p:nvPr/>
+        </p:nvSpPr>
+        <p:spPr>
+          <a:xfrm>
+            <a:off x="1097280" y="4709159"/>
+            <a:ext cx="4754880" cy="566928"/>
+          </a:xfrm>
+          <a:prstGeom prst="rect">
+            <a:avLst/>
+          </a:prstGeom>
+          <a:noFill/>
+        </p:spPr>
+        <p:txBody>
+          <a:bodyPr wrap="square" lIns="50800" tIns="38100" rIns="50800" bIns="38100">
+            <a:spAutoFit/>
+          </a:bodyPr>
+          <a:lstStyle/>
+          <a:p>
+            <a:r>
+              <a:rPr sz="1200" b="0">
+                <a:solidFill>
+                  <a:srgbClr val="282828"/>
+                </a:solidFill>
+                <a:latin typeface="微软雅黑" panose="020B0503020204020204" charset="-122"/>
+              </a:rPr>
+              <a:t>只用 τ+η 构造解，统计 Tref，收集原始轨迹</a:t>
+            </a:r>
+            <a:endParaRPr sz="1200" b="0">
+              <a:solidFill>
+                <a:srgbClr val="282828"/>
+              </a:solidFill>
+              <a:latin typeface="微软雅黑" panose="020B0503020204020204" charset="-122"/>
+            </a:endParaRPr>
+          </a:p>
+        </p:txBody>
+      </p:sp>
+      <p:sp>
+        <p:nvSpPr>
+          <p:cNvPr id="15" name="Rounded Rectangle 14"/>
+          <p:cNvSpPr/>
+          <p:nvPr/>
+        </p:nvSpPr>
+        <p:spPr>
+          <a:xfrm>
+            <a:off x="5943600" y="960120"/>
+            <a:ext cx="411480" cy="411480"/>
+          </a:xfrm>
+          <a:prstGeom prst="roundRect">
+            <a:avLst/>
+          </a:prstGeom>
+          <a:solidFill>
+            <a:srgbClr val="2F5597"/>
+          </a:solidFill>
+          <a:ln w="12700">
+            <a:solidFill>
+              <a:srgbClr val="2F5597"/>
+            </a:solidFill>
+          </a:ln>
+        </p:spPr>
+        <p:style>
+          <a:lnRef idx="1">
+            <a:schemeClr val="accent1"/>
+          </a:lnRef>
+          <a:fillRef idx="3">
+            <a:schemeClr val="accent1"/>
+          </a:fillRef>
+          <a:effectRef idx="2">
+            <a:schemeClr val="accent1"/>
+          </a:effectRef>
+          <a:fontRef idx="minor">
+            <a:schemeClr val="lt1"/>
+          </a:fontRef>
+        </p:style>
+        <p:txBody>
+          <a:bodyPr wrap="square" lIns="63500" tIns="38100" rIns="63500" bIns="38100" rtlCol="0" anchor="ctr"/>
+          <a:lstStyle/>
+          <a:p>
+            <a:pPr algn="ctr"/>
+            <a:r>
+              <a:rPr sz="1400" b="1">
+                <a:solidFill>
+                  <a:srgbClr val="FFFFFF"/>
+                </a:solidFill>
+                <a:latin typeface="微软雅黑" panose="020B0503020204020204" charset="-122"/>
+              </a:rPr>
+              <a:t>5</a:t>
+            </a:r>
+            <a:endParaRPr sz="1400" b="1">
+              <a:solidFill>
+                <a:srgbClr val="FFFFFF"/>
+              </a:solidFill>
+              <a:latin typeface="微软雅黑" panose="020B0503020204020204" charset="-122"/>
+            </a:endParaRPr>
+          </a:p>
+        </p:txBody>
+      </p:sp>
+      <p:sp>
+        <p:nvSpPr>
+          <p:cNvPr id="16" name="TextBox 15"/>
+          <p:cNvSpPr txBox="1"/>
+          <p:nvPr/>
+        </p:nvSpPr>
+        <p:spPr>
+          <a:xfrm>
+            <a:off x="6492240" y="941832"/>
+            <a:ext cx="4572000" cy="256032"/>
+          </a:xfrm>
+          <a:prstGeom prst="rect">
+            <a:avLst/>
+          </a:prstGeom>
+          <a:noFill/>
+        </p:spPr>
+        <p:txBody>
+          <a:bodyPr wrap="square" lIns="50800" tIns="38100" rIns="50800" bIns="38100">
+            <a:spAutoFit/>
+          </a:bodyPr>
+          <a:lstStyle/>
+          <a:p>
+            <a:r>
+              <a:rPr sz="1400" b="1">
+                <a:solidFill>
+                  <a:srgbClr val="2F5597"/>
+                </a:solidFill>
+                <a:latin typeface="微软雅黑" panose="020B0503020204020204" charset="-122"/>
+              </a:rPr>
+              <a:t>冲突图动作掩码</a:t>
+            </a:r>
+            <a:endParaRPr sz="1400" b="1">
+              <a:solidFill>
+                <a:srgbClr val="2F5597"/>
+              </a:solidFill>
+              <a:latin typeface="微软雅黑" panose="020B0503020204020204" charset="-122"/>
+            </a:endParaRPr>
+          </a:p>
+        </p:txBody>
+      </p:sp>
+      <p:sp>
+        <p:nvSpPr>
+          <p:cNvPr id="17" name="TextBox 16"/>
+          <p:cNvSpPr txBox="1"/>
+          <p:nvPr/>
+        </p:nvSpPr>
+        <p:spPr>
+          <a:xfrm>
+            <a:off x="6492240" y="1280160"/>
+            <a:ext cx="4754880" cy="566928"/>
+          </a:xfrm>
+          <a:prstGeom prst="rect">
+            <a:avLst/>
+          </a:prstGeom>
+          <a:noFill/>
+        </p:spPr>
+        <p:txBody>
+          <a:bodyPr wrap="square" lIns="50800" tIns="38100" rIns="50800" bIns="38100">
+            <a:spAutoFit/>
+          </a:bodyPr>
+          <a:lstStyle/>
+          <a:p>
+            <a:r>
+              <a:rPr sz="1200" b="0">
+                <a:solidFill>
+                  <a:srgbClr val="282828"/>
+                </a:solidFill>
+                <a:latin typeface="微软雅黑" panose="020B0503020204020204" charset="-122"/>
+              </a:rPr>
+              <a:t>根据 Aₜ={v|N(v)∩Xₜ=∅} 得到当前可选节点</a:t>
+            </a:r>
+            <a:endParaRPr sz="1200" b="0">
+              <a:solidFill>
+                <a:srgbClr val="282828"/>
+              </a:solidFill>
+              <a:latin typeface="微软雅黑" panose="020B0503020204020204" charset="-122"/>
+            </a:endParaRPr>
+          </a:p>
+        </p:txBody>
+      </p:sp>
+      <p:sp>
+        <p:nvSpPr>
+          <p:cNvPr id="18" name="Rounded Rectangle 17"/>
+          <p:cNvSpPr/>
+          <p:nvPr/>
+        </p:nvSpPr>
+        <p:spPr>
+          <a:xfrm>
+            <a:off x="5943600" y="2103120"/>
+            <a:ext cx="411480" cy="411480"/>
+          </a:xfrm>
+          <a:prstGeom prst="roundRect">
+            <a:avLst/>
+          </a:prstGeom>
+          <a:solidFill>
+            <a:srgbClr val="2F5597"/>
+          </a:solidFill>
+          <a:ln w="12700">
+            <a:solidFill>
+              <a:srgbClr val="2F5597"/>
+            </a:solidFill>
+          </a:ln>
+        </p:spPr>
+        <p:style>
+          <a:lnRef idx="1">
+            <a:schemeClr val="accent1"/>
+          </a:lnRef>
+          <a:fillRef idx="3">
+            <a:schemeClr val="accent1"/>
+          </a:fillRef>
+          <a:effectRef idx="2">
+            <a:schemeClr val="accent1"/>
+          </a:effectRef>
+          <a:fontRef idx="minor">
+            <a:schemeClr val="lt1"/>
+          </a:fontRef>
+        </p:style>
+        <p:txBody>
+          <a:bodyPr wrap="square" lIns="63500" tIns="38100" rIns="63500" bIns="38100" rtlCol="0" anchor="ctr"/>
+          <a:lstStyle/>
+          <a:p>
+            <a:pPr algn="ctr"/>
+            <a:r>
+              <a:rPr sz="1400" b="1">
+                <a:solidFill>
+                  <a:srgbClr val="FFFFFF"/>
+                </a:solidFill>
+                <a:latin typeface="微软雅黑" panose="020B0503020204020204" charset="-122"/>
+              </a:rPr>
+              <a:t>6</a:t>
+            </a:r>
+            <a:endParaRPr sz="1400" b="1">
+              <a:solidFill>
+                <a:srgbClr val="FFFFFF"/>
+              </a:solidFill>
+              <a:latin typeface="微软雅黑" panose="020B0503020204020204" charset="-122"/>
+            </a:endParaRPr>
+          </a:p>
+        </p:txBody>
+      </p:sp>
+      <p:sp>
+        <p:nvSpPr>
+          <p:cNvPr id="19" name="TextBox 18"/>
+          <p:cNvSpPr txBox="1"/>
+          <p:nvPr/>
+        </p:nvSpPr>
+        <p:spPr>
+          <a:xfrm>
+            <a:off x="6492240" y="2084831"/>
+            <a:ext cx="4572000" cy="256032"/>
+          </a:xfrm>
+          <a:prstGeom prst="rect">
+            <a:avLst/>
+          </a:prstGeom>
+          <a:noFill/>
+        </p:spPr>
+        <p:txBody>
+          <a:bodyPr wrap="square" lIns="50800" tIns="38100" rIns="50800" bIns="38100">
+            <a:spAutoFit/>
+          </a:bodyPr>
+          <a:lstStyle/>
+          <a:p>
+            <a:r>
+              <a:rPr sz="1400" b="1">
+                <a:solidFill>
+                  <a:srgbClr val="2F5597"/>
+                </a:solidFill>
+                <a:latin typeface="微软雅黑" panose="020B0503020204020204" charset="-122"/>
+              </a:rPr>
+              <a:t>DDQN 计算节点 Q 值</a:t>
+            </a:r>
+            <a:endParaRPr sz="1400" b="1">
+              <a:solidFill>
+                <a:srgbClr val="2F5597"/>
+              </a:solidFill>
+              <a:latin typeface="微软雅黑" panose="020B0503020204020204" charset="-122"/>
+            </a:endParaRPr>
+          </a:p>
+        </p:txBody>
+      </p:sp>
+      <p:sp>
+        <p:nvSpPr>
+          <p:cNvPr id="20" name="TextBox 19"/>
+          <p:cNvSpPr txBox="1"/>
+          <p:nvPr/>
+        </p:nvSpPr>
+        <p:spPr>
+          <a:xfrm>
+            <a:off x="6492240" y="2423160"/>
+            <a:ext cx="4754880" cy="566928"/>
+          </a:xfrm>
+          <a:prstGeom prst="rect">
+            <a:avLst/>
+          </a:prstGeom>
+          <a:noFill/>
+        </p:spPr>
+        <p:txBody>
+          <a:bodyPr wrap="square" lIns="50800" tIns="38100" rIns="50800" bIns="38100">
+            <a:spAutoFit/>
+          </a:bodyPr>
+          <a:lstStyle/>
+          <a:p>
+            <a:r>
+              <a:rPr sz="1200" b="0">
+                <a:solidFill>
+                  <a:srgbClr val="282828"/>
+                </a:solidFill>
+                <a:latin typeface="微软雅黑" panose="020B0503020204020204" charset="-122"/>
+              </a:rPr>
+              <a:t>Qθ(sₜ,v)=MLP([gₜ,h(v)])，并计算 Advθ(sₜ,v)</a:t>
+            </a:r>
+            <a:endParaRPr sz="1200" b="0">
+              <a:solidFill>
+                <a:srgbClr val="282828"/>
+              </a:solidFill>
+              <a:latin typeface="微软雅黑" panose="020B0503020204020204" charset="-122"/>
+            </a:endParaRPr>
+          </a:p>
+        </p:txBody>
+      </p:sp>
+      <p:sp>
+        <p:nvSpPr>
+          <p:cNvPr id="21" name="Rounded Rectangle 20"/>
+          <p:cNvSpPr/>
+          <p:nvPr/>
+        </p:nvSpPr>
+        <p:spPr>
+          <a:xfrm>
+            <a:off x="5943600" y="3246120"/>
+            <a:ext cx="411480" cy="411480"/>
+          </a:xfrm>
+          <a:prstGeom prst="roundRect">
+            <a:avLst/>
+          </a:prstGeom>
+          <a:solidFill>
+            <a:srgbClr val="2F5597"/>
+          </a:solidFill>
+          <a:ln w="12700">
+            <a:solidFill>
+              <a:srgbClr val="2F5597"/>
+            </a:solidFill>
+          </a:ln>
+        </p:spPr>
+        <p:style>
+          <a:lnRef idx="1">
+            <a:schemeClr val="accent1"/>
+          </a:lnRef>
+          <a:fillRef idx="3">
+            <a:schemeClr val="accent1"/>
+          </a:fillRef>
+          <a:effectRef idx="2">
+            <a:schemeClr val="accent1"/>
+          </a:effectRef>
+          <a:fontRef idx="minor">
+            <a:schemeClr val="lt1"/>
+          </a:fontRef>
+        </p:style>
+        <p:txBody>
+          <a:bodyPr wrap="square" lIns="63500" tIns="38100" rIns="63500" bIns="38100" rtlCol="0" anchor="ctr"/>
+          <a:lstStyle/>
+          <a:p>
+            <a:pPr algn="ctr"/>
+            <a:r>
+              <a:rPr sz="1400" b="1">
+                <a:solidFill>
+                  <a:srgbClr val="FFFFFF"/>
+                </a:solidFill>
+                <a:latin typeface="微软雅黑" panose="020B0503020204020204" charset="-122"/>
+              </a:rPr>
+              <a:t>7</a:t>
+            </a:r>
+            <a:endParaRPr sz="1400" b="1">
+              <a:solidFill>
+                <a:srgbClr val="FFFFFF"/>
+              </a:solidFill>
+              <a:latin typeface="微软雅黑" panose="020B0503020204020204" charset="-122"/>
+            </a:endParaRPr>
+          </a:p>
+        </p:txBody>
+      </p:sp>
+      <p:sp>
+        <p:nvSpPr>
+          <p:cNvPr id="22" name="TextBox 21"/>
+          <p:cNvSpPr txBox="1"/>
+          <p:nvPr/>
+        </p:nvSpPr>
+        <p:spPr>
+          <a:xfrm>
+            <a:off x="6492240" y="3227832"/>
+            <a:ext cx="4572000" cy="256032"/>
+          </a:xfrm>
+          <a:prstGeom prst="rect">
+            <a:avLst/>
+          </a:prstGeom>
+          <a:noFill/>
+        </p:spPr>
+        <p:txBody>
+          <a:bodyPr wrap="square" lIns="50800" tIns="38100" rIns="50800" bIns="38100">
+            <a:spAutoFit/>
+          </a:bodyPr>
+          <a:lstStyle/>
+          <a:p>
+            <a:r>
+              <a:rPr sz="1400" b="1">
+                <a:solidFill>
+                  <a:srgbClr val="2F5597"/>
+                </a:solidFill>
+                <a:latin typeface="微软雅黑" panose="020B0503020204020204" charset="-122"/>
+              </a:rPr>
+              <a:t>状态感知节点选择</a:t>
+            </a:r>
+            <a:endParaRPr sz="1400" b="1">
+              <a:solidFill>
+                <a:srgbClr val="2F5597"/>
+              </a:solidFill>
+              <a:latin typeface="微软雅黑" panose="020B0503020204020204" charset="-122"/>
+            </a:endParaRPr>
+          </a:p>
+        </p:txBody>
+      </p:sp>
+      <p:sp>
+        <p:nvSpPr>
+          <p:cNvPr id="23" name="TextBox 22"/>
+          <p:cNvSpPr txBox="1"/>
+          <p:nvPr/>
+        </p:nvSpPr>
+        <p:spPr>
+          <a:xfrm>
+            <a:off x="6492240" y="3566160"/>
+            <a:ext cx="4754880" cy="566928"/>
+          </a:xfrm>
+          <a:prstGeom prst="rect">
+            <a:avLst/>
+          </a:prstGeom>
+          <a:noFill/>
+        </p:spPr>
+        <p:txBody>
+          <a:bodyPr wrap="square" lIns="50800" tIns="38100" rIns="50800" bIns="38100">
+            <a:spAutoFit/>
+          </a:bodyPr>
+          <a:lstStyle/>
+          <a:p>
+            <a:r>
+              <a:rPr sz="1200" b="0">
+                <a:solidFill>
+                  <a:srgbClr val="282828"/>
+                </a:solidFill>
+                <a:latin typeface="微软雅黑" panose="020B0503020204020204" charset="-122"/>
+              </a:rPr>
+              <a:t>P(v|sₜ) ∝ τ(v)^α η(v)^β exp(κAdvθ(sₜ,v))</a:t>
+            </a:r>
+            <a:endParaRPr sz="1200" b="0">
+              <a:solidFill>
+                <a:srgbClr val="282828"/>
+              </a:solidFill>
+              <a:latin typeface="微软雅黑" panose="020B0503020204020204" charset="-122"/>
+            </a:endParaRPr>
+          </a:p>
+        </p:txBody>
+      </p:sp>
+      <p:sp>
+        <p:nvSpPr>
+          <p:cNvPr id="24" name="Rounded Rectangle 23"/>
+          <p:cNvSpPr/>
+          <p:nvPr/>
+        </p:nvSpPr>
+        <p:spPr>
+          <a:xfrm>
+            <a:off x="5943600" y="4389120"/>
+            <a:ext cx="411480" cy="411480"/>
+          </a:xfrm>
+          <a:prstGeom prst="roundRect">
+            <a:avLst/>
+          </a:prstGeom>
+          <a:solidFill>
+            <a:srgbClr val="2F5597"/>
+          </a:solidFill>
+          <a:ln w="12700">
+            <a:solidFill>
+              <a:srgbClr val="2F5597"/>
+            </a:solidFill>
+          </a:ln>
+        </p:spPr>
+        <p:style>
+          <a:lnRef idx="1">
+            <a:schemeClr val="accent1"/>
+          </a:lnRef>
+          <a:fillRef idx="3">
+            <a:schemeClr val="accent1"/>
+          </a:fillRef>
+          <a:effectRef idx="2">
+            <a:schemeClr val="accent1"/>
+          </a:effectRef>
+          <a:fontRef idx="minor">
+            <a:schemeClr val="lt1"/>
+          </a:fontRef>
+        </p:style>
+        <p:txBody>
+          <a:bodyPr wrap="square" lIns="63500" tIns="38100" rIns="63500" bIns="38100" rtlCol="0" anchor="ctr"/>
+          <a:lstStyle/>
+          <a:p>
+            <a:pPr algn="ctr"/>
+            <a:r>
+              <a:rPr sz="1400" b="1">
+                <a:solidFill>
+                  <a:srgbClr val="FFFFFF"/>
+                </a:solidFill>
+                <a:latin typeface="微软雅黑" panose="020B0503020204020204" charset="-122"/>
+              </a:rPr>
+              <a:t>8</a:t>
+            </a:r>
+            <a:endParaRPr sz="1400" b="1">
+              <a:solidFill>
+                <a:srgbClr val="FFFFFF"/>
+              </a:solidFill>
+              <a:latin typeface="微软雅黑" panose="020B0503020204020204" charset="-122"/>
+            </a:endParaRPr>
+          </a:p>
+        </p:txBody>
+      </p:sp>
+      <p:sp>
+        <p:nvSpPr>
+          <p:cNvPr id="25" name="TextBox 24"/>
+          <p:cNvSpPr txBox="1"/>
+          <p:nvPr/>
+        </p:nvSpPr>
+        <p:spPr>
+          <a:xfrm>
+            <a:off x="6492240" y="4370832"/>
+            <a:ext cx="4572000" cy="256032"/>
+          </a:xfrm>
+          <a:prstGeom prst="rect">
+            <a:avLst/>
+          </a:prstGeom>
+          <a:noFill/>
+        </p:spPr>
+        <p:txBody>
+          <a:bodyPr wrap="square" lIns="50800" tIns="38100" rIns="50800" bIns="38100">
+            <a:spAutoFit/>
+          </a:bodyPr>
+          <a:lstStyle/>
+          <a:p>
+            <a:r>
+              <a:rPr sz="1400" b="1">
+                <a:solidFill>
+                  <a:srgbClr val="2F5597"/>
+                </a:solidFill>
+                <a:latin typeface="微软雅黑" panose="020B0503020204020204" charset="-122"/>
+              </a:rPr>
+              <a:t>奖励、档案与信息素更新</a:t>
+            </a:r>
+            <a:endParaRPr sz="1400" b="1">
+              <a:solidFill>
+                <a:srgbClr val="2F5597"/>
+              </a:solidFill>
+              <a:latin typeface="微软雅黑" panose="020B0503020204020204" charset="-122"/>
+            </a:endParaRPr>
+          </a:p>
+        </p:txBody>
+      </p:sp>
+      <p:sp>
+        <p:nvSpPr>
+          <p:cNvPr id="26" name="TextBox 25"/>
+          <p:cNvSpPr txBox="1"/>
+          <p:nvPr/>
+        </p:nvSpPr>
+        <p:spPr>
+          <a:xfrm>
+            <a:off x="6492240" y="4709159"/>
+            <a:ext cx="4754880" cy="566928"/>
+          </a:xfrm>
+          <a:prstGeom prst="rect">
+            <a:avLst/>
+          </a:prstGeom>
+          <a:noFill/>
+        </p:spPr>
+        <p:txBody>
+          <a:bodyPr wrap="square" lIns="50800" tIns="38100" rIns="50800" bIns="38100">
+            <a:spAutoFit/>
+          </a:bodyPr>
+          <a:lstStyle/>
+          <a:p>
+            <a:r>
+              <a:rPr sz="1200" b="0">
+                <a:solidFill>
+                  <a:srgbClr val="282828"/>
+                </a:solidFill>
+                <a:latin typeface="微软雅黑" panose="020B0503020204020204" charset="-122"/>
+              </a:rPr>
+              <a:t>缩放即时奖励 + Pareto 终局奖励；更新 Archive 与 τ(v)</a:t>
+            </a:r>
+            <a:endParaRPr sz="1200" b="0">
+              <a:solidFill>
+                <a:srgbClr val="282828"/>
+              </a:solidFill>
+              <a:latin typeface="微软雅黑" panose="020B0503020204020204" charset="-122"/>
+            </a:endParaRPr>
+          </a:p>
+        </p:txBody>
+      </p:sp>
+      <p:sp>
+        <p:nvSpPr>
+          <p:cNvPr id="27" name="Rounded Rectangle 26"/>
+          <p:cNvSpPr/>
+          <p:nvPr/>
+        </p:nvSpPr>
+        <p:spPr>
+          <a:xfrm>
+            <a:off x="1097280" y="5715000"/>
+            <a:ext cx="9326880" cy="411480"/>
           </a:xfrm>
           <a:prstGeom prst="roundRect">
             <a:avLst/>
@@ -9137,641 +10601,25 @@
           </a:fontRef>
         </p:style>
         <p:txBody>
-          <a:bodyPr rtlCol="0" anchor="ctr" wrap="square"/>
+          <a:bodyPr wrap="square" lIns="63500" tIns="38100" rIns="63500" bIns="38100" rtlCol="0" anchor="ctr"/>
           <a:lstStyle/>
           <a:p>
             <a:pPr algn="ctr"/>
             <a:r>
-              <a:rPr sz="1400">
-                <a:solidFill>
-                  <a:srgbClr val="282828"/>
-                </a:solidFill>
-                <a:latin typeface="微软雅黑"/>
-              </a:rPr>
-              <a:t>transition = (sₜ, vₜ, Rₜ, sₜ₊₁, Aₜ₊₁)      yₜ = Rₜ + γ Qθ⁻(sₜ₊₁, argmaxᵤ Qθ(sₜ₊₁,u))</a:t>
-            </a:r>
-          </a:p>
-        </p:txBody>
-      </p:sp>
-      <p:sp>
-        <p:nvSpPr>
-          <p:cNvPr id="5" name="Rounded Rectangle 4"/>
-          <p:cNvSpPr/>
-          <p:nvPr/>
-        </p:nvSpPr>
-        <p:spPr>
-          <a:xfrm>
-            <a:off x="640080" y="2529840"/>
-            <a:ext cx="5029200" cy="1680000"/>
-          </a:xfrm>
-          <a:prstGeom prst="roundRect">
-            <a:avLst/>
-          </a:prstGeom>
-          <a:solidFill>
-            <a:srgbClr val="F2F6FC"/>
-          </a:solidFill>
-          <a:ln w="12700">
-            <a:solidFill>
-              <a:srgbClr val="7896BE"/>
-            </a:solidFill>
-          </a:ln>
-        </p:spPr>
-        <p:style>
-          <a:lnRef idx="1">
-            <a:schemeClr val="accent1"/>
-          </a:lnRef>
-          <a:fillRef idx="3">
-            <a:schemeClr val="accent1"/>
-          </a:fillRef>
-          <a:effectRef idx="2">
-            <a:schemeClr val="accent1"/>
-          </a:effectRef>
-          <a:fontRef idx="minor">
-            <a:schemeClr val="lt1"/>
-          </a:fontRef>
-        </p:style>
-        <p:txBody>
-          <a:bodyPr rtlCol="0" anchor="ctr" wrap="square" lIns="118872" rIns="118872" tIns="54864" bIns="54864"/>
-          <a:lstStyle/>
-          <a:p>
-            <a:pPr algn="l">
-              <a:spcAft>
-                <a:spcPts val="150"/>
-              </a:spcAft>
-            </a:pPr>
-            <a:r>
-              <a:rPr sz="1150" b="1">
-                <a:solidFill>
-                  <a:srgbClr val="2F5597"/>
-                </a:solidFill>
-                <a:latin typeface="微软雅黑"/>
-              </a:rPr>
-              <a:t>在线训练怎么做</a:t>
-            </a:r>
-          </a:p>
-          <a:p>
-            <a:pPr algn="l">
-              <a:spcAft>
-                <a:spcPts val="150"/>
-              </a:spcAft>
-            </a:pPr>
-            <a:r>
-              <a:rPr sz="1050" b="0">
-                <a:solidFill>
-                  <a:srgbClr val="282828"/>
-                </a:solidFill>
-                <a:latin typeface="微软雅黑"/>
-              </a:rPr>
-              <a:t>• Warm-up 阶段不让 DDQN 参与选择，先统计 Tref。</a:t>
-            </a:r>
-          </a:p>
-          <a:p>
-            <a:pPr algn="l">
-              <a:spcAft>
-                <a:spcPts val="150"/>
-              </a:spcAft>
-            </a:pPr>
-            <a:r>
-              <a:rPr sz="1050" b="0">
-                <a:solidFill>
-                  <a:srgbClr val="282828"/>
-                </a:solidFill>
-                <a:latin typeface="微软雅黑"/>
-              </a:rPr>
-              <a:t>• 每一步把 (sₜ,vₜ,Rₜ,sₜ₊₁,Aₜ₊₁) 存入 Replay Buffer。</a:t>
-            </a:r>
-          </a:p>
-          <a:p>
-            <a:pPr algn="l">
-              <a:spcAft>
-                <a:spcPts val="150"/>
-              </a:spcAft>
-            </a:pPr>
-            <a:r>
-              <a:rPr sz="1050" b="0">
-                <a:solidFill>
-                  <a:srgbClr val="282828"/>
-                </a:solidFill>
-                <a:latin typeface="微软雅黑"/>
-              </a:rPr>
-              <a:t>• 采用 Double DQN 目标更新 Qθ，降低过估计。</a:t>
-            </a:r>
-          </a:p>
-          <a:p>
-            <a:pPr algn="l">
-              <a:spcAft>
-                <a:spcPts val="150"/>
-              </a:spcAft>
-            </a:pPr>
-            <a:r>
-              <a:rPr sz="1050" b="0">
-                <a:solidFill>
-                  <a:srgbClr val="282828"/>
-                </a:solidFill>
-                <a:latin typeface="微软雅黑"/>
-              </a:rPr>
-              <a:t>• 定期同步目标网络：θ⁻ ← θ。</a:t>
-            </a:r>
-          </a:p>
-        </p:txBody>
-      </p:sp>
-      <p:sp>
-        <p:nvSpPr>
-          <p:cNvPr id="6" name="Rounded Rectangle 5"/>
-          <p:cNvSpPr/>
-          <p:nvPr/>
-        </p:nvSpPr>
-        <p:spPr>
-          <a:xfrm>
-            <a:off x="5806440" y="2529840"/>
-            <a:ext cx="5029200" cy="1680000"/>
-          </a:xfrm>
-          <a:prstGeom prst="roundRect">
-            <a:avLst/>
-          </a:prstGeom>
-          <a:solidFill>
-            <a:srgbClr val="F2F6FC"/>
-          </a:solidFill>
-          <a:ln w="12700">
-            <a:solidFill>
-              <a:srgbClr val="7896BE"/>
-            </a:solidFill>
-          </a:ln>
-        </p:spPr>
-        <p:style>
-          <a:lnRef idx="1">
-            <a:schemeClr val="accent1"/>
-          </a:lnRef>
-          <a:fillRef idx="3">
-            <a:schemeClr val="accent1"/>
-          </a:fillRef>
-          <a:effectRef idx="2">
-            <a:schemeClr val="accent1"/>
-          </a:effectRef>
-          <a:fontRef idx="minor">
-            <a:schemeClr val="lt1"/>
-          </a:fontRef>
-        </p:style>
-        <p:txBody>
-          <a:bodyPr rtlCol="0" anchor="ctr" wrap="square" lIns="118872" rIns="118872" tIns="54864" bIns="54864"/>
-          <a:lstStyle/>
-          <a:p>
-            <a:pPr algn="l">
-              <a:spcAft>
-                <a:spcPts val="150"/>
-              </a:spcAft>
-            </a:pPr>
-            <a:r>
-              <a:rPr sz="1150" b="1">
-                <a:solidFill>
-                  <a:srgbClr val="2F5597"/>
-                </a:solidFill>
-                <a:latin typeface="微软雅黑"/>
-              </a:rPr>
-              <a:t>为什么要分阶段</a:t>
-            </a:r>
-          </a:p>
-          <a:p>
-            <a:pPr algn="l">
-              <a:spcAft>
-                <a:spcPts val="150"/>
-              </a:spcAft>
-            </a:pPr>
-            <a:r>
-              <a:rPr sz="1050" b="0">
-                <a:solidFill>
-                  <a:srgbClr val="282828"/>
-                </a:solidFill>
-                <a:latin typeface="微软雅黑"/>
-              </a:rPr>
-              <a:t>• 早期 Q 值不稳定，不能直接主导蚂蚁构造。</a:t>
-            </a:r>
-          </a:p>
-          <a:p>
-            <a:pPr algn="l">
-              <a:spcAft>
-                <a:spcPts val="150"/>
-              </a:spcAft>
-            </a:pPr>
-            <a:r>
-              <a:rPr sz="1050" b="0">
-                <a:solidFill>
-                  <a:srgbClr val="282828"/>
-                </a:solidFill>
-                <a:latin typeface="微软雅黑"/>
-              </a:rPr>
-              <a:t>• 让 κ 从小到大，逐步提高 DDQN Advantage 的校正作用。</a:t>
-            </a:r>
-          </a:p>
-          <a:p>
-            <a:pPr algn="l">
-              <a:spcAft>
-                <a:spcPts val="150"/>
-              </a:spcAft>
-            </a:pPr>
-            <a:r>
-              <a:rPr sz="1050" b="0">
-                <a:solidFill>
-                  <a:srgbClr val="282828"/>
-                </a:solidFill>
-                <a:latin typeface="微软雅黑"/>
-              </a:rPr>
-              <a:t>• 后期降低学习率并冻结网络，稳定输出 Pareto 档案。</a:t>
-            </a:r>
-          </a:p>
-        </p:txBody>
-      </p:sp>
-      <p:sp>
-        <p:nvSpPr>
-          <p:cNvPr id="7" name="Rounded Rectangle 6"/>
-          <p:cNvSpPr/>
-          <p:nvPr/>
-        </p:nvSpPr>
-        <p:spPr>
-          <a:xfrm>
-            <a:off x="594360" y="4511040"/>
-            <a:ext cx="2057400" cy="685800"/>
-          </a:xfrm>
-          <a:prstGeom prst="roundRect">
-            <a:avLst/>
-          </a:prstGeom>
-          <a:solidFill>
-            <a:srgbClr val="FFFFFF"/>
-          </a:solidFill>
-          <a:ln w="12700">
-            <a:solidFill>
-              <a:srgbClr val="2F5597"/>
-            </a:solidFill>
-          </a:ln>
-        </p:spPr>
-        <p:style>
-          <a:lnRef idx="1">
-            <a:schemeClr val="accent1"/>
-          </a:lnRef>
-          <a:fillRef idx="3">
-            <a:schemeClr val="accent1"/>
-          </a:fillRef>
-          <a:effectRef idx="2">
-            <a:schemeClr val="accent1"/>
-          </a:effectRef>
-          <a:fontRef idx="minor">
-            <a:schemeClr val="lt1"/>
-          </a:fontRef>
-        </p:style>
-        <p:txBody>
-          <a:bodyPr rtlCol="0" anchor="ctr" wrap="square" lIns="45720" rIns="45720" tIns="18288" bIns="18288"/>
-          <a:lstStyle/>
-          <a:p>
-            <a:pPr algn="ctr"/>
-            <a:r>
-              <a:rPr sz="1050" b="1">
-                <a:solidFill>
-                  <a:srgbClr val="2F5597"/>
-                </a:solidFill>
-                <a:latin typeface="微软雅黑"/>
-              </a:rPr>
-              <a:t>Warm-up
-1–30</a:t>
-            </a:r>
-          </a:p>
-          <a:p>
-            <a:pPr algn="ctr"/>
-            <a:r>
-              <a:rPr sz="900">
-                <a:solidFill>
-                  <a:srgbClr val="282828"/>
-                </a:solidFill>
-                <a:latin typeface="微软雅黑"/>
-              </a:rPr>
-              <a:t>τ+η 构造
-统计 Tref</a:t>
-            </a:r>
-          </a:p>
-        </p:txBody>
-      </p:sp>
-      <p:sp>
-        <p:nvSpPr>
-          <p:cNvPr id="8" name="Rounded Rectangle 7"/>
-          <p:cNvSpPr/>
-          <p:nvPr/>
-        </p:nvSpPr>
-        <p:spPr>
-          <a:xfrm>
-            <a:off x="2791460" y="4511040"/>
-            <a:ext cx="2057400" cy="685800"/>
-          </a:xfrm>
-          <a:prstGeom prst="roundRect">
-            <a:avLst/>
-          </a:prstGeom>
-          <a:solidFill>
-            <a:srgbClr val="FFFFFF"/>
-          </a:solidFill>
-          <a:ln w="12700">
-            <a:solidFill>
-              <a:srgbClr val="2F5597"/>
-            </a:solidFill>
-          </a:ln>
-        </p:spPr>
-        <p:style>
-          <a:lnRef idx="1">
-            <a:schemeClr val="accent1"/>
-          </a:lnRef>
-          <a:fillRef idx="3">
-            <a:schemeClr val="accent1"/>
-          </a:fillRef>
-          <a:effectRef idx="2">
-            <a:schemeClr val="accent1"/>
-          </a:effectRef>
-          <a:fontRef idx="minor">
-            <a:schemeClr val="lt1"/>
-          </a:fontRef>
-        </p:style>
-        <p:txBody>
-          <a:bodyPr rtlCol="0" anchor="ctr" wrap="square" lIns="45720" rIns="45720" tIns="18288" bIns="18288"/>
-          <a:lstStyle/>
-          <a:p>
-            <a:pPr algn="ctr"/>
-            <a:r>
-              <a:rPr sz="1050" b="1">
-                <a:solidFill>
-                  <a:srgbClr val="2F5597"/>
-                </a:solidFill>
-                <a:latin typeface="微软雅黑"/>
-              </a:rPr>
-              <a:t>轻度 RL
-31–90</a:t>
-            </a:r>
-          </a:p>
-          <a:p>
-            <a:pPr algn="ctr"/>
-            <a:r>
-              <a:rPr sz="900">
-                <a:solidFill>
-                  <a:srgbClr val="282828"/>
-                </a:solidFill>
-                <a:latin typeface="微软雅黑"/>
-              </a:rPr>
-              <a:t>开始训练
-κ:0.1→0.4</a:t>
-            </a:r>
-          </a:p>
-        </p:txBody>
-      </p:sp>
-      <p:sp>
-        <p:nvSpPr>
-          <p:cNvPr id="9" name="Rounded Rectangle 8"/>
-          <p:cNvSpPr/>
-          <p:nvPr/>
-        </p:nvSpPr>
-        <p:spPr>
-          <a:xfrm>
-            <a:off x="4988560" y="4511040"/>
-            <a:ext cx="2057400" cy="685800"/>
-          </a:xfrm>
-          <a:prstGeom prst="roundRect">
-            <a:avLst/>
-          </a:prstGeom>
-          <a:solidFill>
-            <a:srgbClr val="FFFFFF"/>
-          </a:solidFill>
-          <a:ln w="12700">
-            <a:solidFill>
-              <a:srgbClr val="2F5597"/>
-            </a:solidFill>
-          </a:ln>
-        </p:spPr>
-        <p:style>
-          <a:lnRef idx="1">
-            <a:schemeClr val="accent1"/>
-          </a:lnRef>
-          <a:fillRef idx="3">
-            <a:schemeClr val="accent1"/>
-          </a:fillRef>
-          <a:effectRef idx="2">
-            <a:schemeClr val="accent1"/>
-          </a:effectRef>
-          <a:fontRef idx="minor">
-            <a:schemeClr val="lt1"/>
-          </a:fontRef>
-        </p:style>
-        <p:txBody>
-          <a:bodyPr rtlCol="0" anchor="ctr" wrap="square" lIns="45720" rIns="45720" tIns="18288" bIns="18288"/>
-          <a:lstStyle/>
-          <a:p>
-            <a:pPr algn="ctr"/>
-            <a:r>
-              <a:rPr sz="1050" b="1">
-                <a:solidFill>
-                  <a:srgbClr val="2F5597"/>
-                </a:solidFill>
-                <a:latin typeface="微软雅黑"/>
-              </a:rPr>
-              <a:t>强 RL
-91–240</a:t>
-            </a:r>
-          </a:p>
-          <a:p>
-            <a:pPr algn="ctr"/>
-            <a:r>
-              <a:rPr sz="900">
-                <a:solidFill>
-                  <a:srgbClr val="282828"/>
-                </a:solidFill>
-                <a:latin typeface="微软雅黑"/>
-              </a:rPr>
-              <a:t>正式辅助
-κ:0.4→1.0</a:t>
-            </a:r>
-          </a:p>
-        </p:txBody>
-      </p:sp>
-      <p:sp>
-        <p:nvSpPr>
-          <p:cNvPr id="10" name="Rounded Rectangle 9"/>
-          <p:cNvSpPr/>
-          <p:nvPr/>
-        </p:nvSpPr>
-        <p:spPr>
-          <a:xfrm>
-            <a:off x="7185660" y="4511040"/>
-            <a:ext cx="2057400" cy="685800"/>
-          </a:xfrm>
-          <a:prstGeom prst="roundRect">
-            <a:avLst/>
-          </a:prstGeom>
-          <a:solidFill>
-            <a:srgbClr val="FFFFFF"/>
-          </a:solidFill>
-          <a:ln w="12700">
-            <a:solidFill>
-              <a:srgbClr val="2F5597"/>
-            </a:solidFill>
-          </a:ln>
-        </p:spPr>
-        <p:style>
-          <a:lnRef idx="1">
-            <a:schemeClr val="accent1"/>
-          </a:lnRef>
-          <a:fillRef idx="3">
-            <a:schemeClr val="accent1"/>
-          </a:fillRef>
-          <a:effectRef idx="2">
-            <a:schemeClr val="accent1"/>
-          </a:effectRef>
-          <a:fontRef idx="minor">
-            <a:schemeClr val="lt1"/>
-          </a:fontRef>
-        </p:style>
-        <p:txBody>
-          <a:bodyPr rtlCol="0" anchor="ctr" wrap="square" lIns="45720" rIns="45720" tIns="18288" bIns="18288"/>
-          <a:lstStyle/>
-          <a:p>
-            <a:pPr algn="ctr"/>
-            <a:r>
-              <a:rPr sz="1050" b="1">
-                <a:solidFill>
-                  <a:srgbClr val="2F5597"/>
-                </a:solidFill>
-                <a:latin typeface="微软雅黑"/>
-              </a:rPr>
-              <a:t>收敛训练
-241–280</a:t>
-            </a:r>
-          </a:p>
-          <a:p>
-            <a:pPr algn="ctr"/>
-            <a:r>
-              <a:rPr sz="900">
-                <a:solidFill>
-                  <a:srgbClr val="282828"/>
-                </a:solidFill>
-                <a:latin typeface="微软雅黑"/>
-              </a:rPr>
-              <a:t>降学习率
-κ:1.0→1.2</a:t>
-            </a:r>
-          </a:p>
-        </p:txBody>
-      </p:sp>
-      <p:sp>
-        <p:nvSpPr>
-          <p:cNvPr id="11" name="Rounded Rectangle 10"/>
-          <p:cNvSpPr/>
-          <p:nvPr/>
-        </p:nvSpPr>
-        <p:spPr>
-          <a:xfrm>
-            <a:off x="9382760" y="4511040"/>
-            <a:ext cx="2057400" cy="685800"/>
-          </a:xfrm>
-          <a:prstGeom prst="roundRect">
-            <a:avLst/>
-          </a:prstGeom>
-          <a:solidFill>
-            <a:srgbClr val="FFFFFF"/>
-          </a:solidFill>
-          <a:ln w="12700">
-            <a:solidFill>
-              <a:srgbClr val="2F5597"/>
-            </a:solidFill>
-          </a:ln>
-        </p:spPr>
-        <p:style>
-          <a:lnRef idx="1">
-            <a:schemeClr val="accent1"/>
-          </a:lnRef>
-          <a:fillRef idx="3">
-            <a:schemeClr val="accent1"/>
-          </a:fillRef>
-          <a:effectRef idx="2">
-            <a:schemeClr val="accent1"/>
-          </a:effectRef>
-          <a:fontRef idx="minor">
-            <a:schemeClr val="lt1"/>
-          </a:fontRef>
-        </p:style>
-        <p:txBody>
-          <a:bodyPr rtlCol="0" anchor="ctr" wrap="square" lIns="45720" rIns="45720" tIns="18288" bIns="18288"/>
-          <a:lstStyle/>
-          <a:p>
-            <a:pPr algn="ctr"/>
-            <a:r>
-              <a:rPr sz="1050" b="1">
-                <a:solidFill>
-                  <a:srgbClr val="2F5597"/>
-                </a:solidFill>
-                <a:latin typeface="微软雅黑"/>
-              </a:rPr>
-              <a:t>冻结输出
-281–300</a:t>
-            </a:r>
-          </a:p>
-          <a:p>
-            <a:pPr algn="ctr"/>
-            <a:r>
-              <a:rPr sz="900">
-                <a:solidFill>
-                  <a:srgbClr val="282828"/>
-                </a:solidFill>
-                <a:latin typeface="微软雅黑"/>
-              </a:rPr>
-              <a:t>冻结 DDQN
-只辅助构造</a:t>
-            </a:r>
-          </a:p>
-        </p:txBody>
-      </p:sp>
-      <p:sp>
-        <p:nvSpPr>
-          <p:cNvPr id="12" name="Rounded Rectangle 11"/>
-          <p:cNvSpPr/>
-          <p:nvPr/>
-        </p:nvSpPr>
-        <p:spPr>
-          <a:xfrm>
-            <a:off x="1097280" y="5532120"/>
-            <a:ext cx="9418320" cy="457200"/>
-          </a:xfrm>
-          <a:prstGeom prst="roundRect">
-            <a:avLst/>
-          </a:prstGeom>
-          <a:solidFill>
-            <a:srgbClr val="FFFFFF"/>
-          </a:solidFill>
-          <a:ln w="12700">
-            <a:solidFill>
-              <a:srgbClr val="2F5597"/>
-            </a:solidFill>
-          </a:ln>
-        </p:spPr>
-        <p:style>
-          <a:lnRef idx="1">
-            <a:schemeClr val="accent1"/>
-          </a:lnRef>
-          <a:fillRef idx="3">
-            <a:schemeClr val="accent1"/>
-          </a:fillRef>
-          <a:effectRef idx="2">
-            <a:schemeClr val="accent1"/>
-          </a:effectRef>
-          <a:fontRef idx="minor">
-            <a:schemeClr val="lt1"/>
-          </a:fontRef>
-        </p:style>
-        <p:txBody>
-          <a:bodyPr rtlCol="0" anchor="ctr" wrap="square"/>
-          <a:lstStyle/>
-          <a:p>
-            <a:pPr algn="ctr"/>
-            <a:r>
-              <a:rPr sz="1200">
-                <a:solidFill>
-                  <a:srgbClr val="282828"/>
-                </a:solidFill>
-                <a:latin typeface="微软雅黑"/>
-              </a:rPr>
-              <a:t>核心安排：Warm-up 先稳定奖励尺度与经验样本；随后逐步增大 κ，使 DDQN 从“轻度校正”过渡到“稳定辅助构造”。</a:t>
-            </a:r>
+              <a:rPr sz="1500" b="0">
+                <a:solidFill>
+                  <a:srgbClr val="282828"/>
+                </a:solidFill>
+                <a:latin typeface="微软雅黑" panose="020B0503020204020204" charset="-122"/>
+              </a:rPr>
+              <a:t>输出：Pareto 档案中的非支配调度方案集合</a:t>
+            </a:r>
+            <a:endParaRPr sz="1500" b="0">
+              <a:solidFill>
+                <a:srgbClr val="282828"/>
+              </a:solidFill>
+              <a:latin typeface="微软雅黑" panose="020B0503020204020204" charset="-122"/>
+            </a:endParaRPr>
           </a:p>
         </p:txBody>
       </p:sp>
@@ -9784,48 +10632,6 @@
 </file>
 
 <file path=ppt/tags/tag1.xml><?xml version="1.0" encoding="utf-8"?>
-<p:tagLst xmlns:p="http://schemas.openxmlformats.org/presentationml/2006/main">
-  <p:tag name="KSO_WM_BEAUTIFY_FLAG" val=""/>
-</p:tagLst>
-</file>
-
-<file path=ppt/tags/tag2.xml><?xml version="1.0" encoding="utf-8"?>
-<p:tagLst xmlns:p="http://schemas.openxmlformats.org/presentationml/2006/main">
-  <p:tag name="KSO_WM_BEAUTIFY_FLAG" val=""/>
-</p:tagLst>
-</file>
-
-<file path=ppt/tags/tag3.xml><?xml version="1.0" encoding="utf-8"?>
-<p:tagLst xmlns:p="http://schemas.openxmlformats.org/presentationml/2006/main">
-  <p:tag name="KSO_WM_BEAUTIFY_FLAG" val=""/>
-</p:tagLst>
-</file>
-
-<file path=ppt/tags/tag4.xml><?xml version="1.0" encoding="utf-8"?>
-<p:tagLst xmlns:p="http://schemas.openxmlformats.org/presentationml/2006/main">
-  <p:tag name="KSO_WM_BEAUTIFY_FLAG" val=""/>
-</p:tagLst>
-</file>
-
-<file path=ppt/tags/tag5.xml><?xml version="1.0" encoding="utf-8"?>
-<p:tagLst xmlns:p="http://schemas.openxmlformats.org/presentationml/2006/main">
-  <p:tag name="KSO_WM_BEAUTIFY_FLAG" val=""/>
-</p:tagLst>
-</file>
-
-<file path=ppt/tags/tag6.xml><?xml version="1.0" encoding="utf-8"?>
-<p:tagLst xmlns:p="http://schemas.openxmlformats.org/presentationml/2006/main">
-  <p:tag name="KSO_WM_BEAUTIFY_FLAG" val=""/>
-</p:tagLst>
-</file>
-
-<file path=ppt/tags/tag7.xml><?xml version="1.0" encoding="utf-8"?>
-<p:tagLst xmlns:p="http://schemas.openxmlformats.org/presentationml/2006/main">
-  <p:tag name="KSO_WM_BEAUTIFY_FLAG" val=""/>
-</p:tagLst>
-</file>
-
-<file path=ppt/tags/tag8.xml><?xml version="1.0" encoding="utf-8"?>
 <p:tagLst xmlns:p="http://schemas.openxmlformats.org/presentationml/2006/main">
   <p:tag name="COMMONDATA" val="eyJoZGlkIjoiNDNhZjYzMWQ5OGY2M2FiNDE3MDVlODgxYzkwYTQ4OTYifQ=="/>
   <p:tag name="RESOURCE_RECORD_KEY" val="{&quot;10&quot;:[21601234]}"/>
